--- a/exports/pptx/lessons/middle-module-13-indic-ecology/day-01-vasudhaiva-kutumbakam.pptx
+++ b/exports/pptx/lessons/middle-module-13-indic-ecology/day-01-vasudhaiva-kutumbakam.pptx
@@ -18,9 +18,14 @@
     <p:sldId id="266" r:id="rId12"/>
     <p:sldId id="267" r:id="rId13"/>
     <p:sldId id="268" r:id="rId14"/>
+    <p:sldId id="269" r:id="rId15"/>
+    <p:sldId id="270" r:id="rId16"/>
+    <p:sldId id="271" r:id="rId17"/>
+    <p:sldId id="272" r:id="rId18"/>
+    <p:sldId id="273" r:id="rId19"/>
   </p:sldIdLst>
   <p:notesMasterIdLst>
-    <p:notesMasterId r:id="rId15"/>
+    <p:notesMasterId r:id="rId20"/>
   </p:notesMasterIdLst>
   <p:sldSz cx="9144000" cy="5143500"/>
   <p:notesSz cx="5143500" cy="9144000"/>
@@ -890,6 +895,446 @@
             <a:fld id="{F7021451-1387-4CA6-816F-3879F97B5CBC}" type="slidenum">
               <a:rPr lang="en-US"/>
               <a:t>13</a:t>
+            </a:fld>
+            <a:endParaRPr lang="en-US"/>
+          </a:p>
+        </p:txBody>
+      </p:sp>
+    </p:spTree>
+    <p:extLst>
+      <p:ext uri="{BB962C8B-B14F-4D97-AF65-F5344CB8AC3E}">
+        <p14:creationId xmlns:p14="http://schemas.microsoft.com/office/powerpoint/2010/main" val="1024086991"/>
+      </p:ext>
+    </p:extLst>
+  </p:cSld>
+  <p:clrMapOvr>
+    <a:masterClrMapping/>
+  </p:clrMapOvr>
+</p:notes>
+</file>
+
+<file path=ppt/notesSlides/notesSlide14.xml><?xml version="1.0" encoding="utf-8"?>
+<p:notes xmlns:a="http://schemas.openxmlformats.org/drawingml/2006/main" xmlns:r="http://schemas.openxmlformats.org/officeDocument/2006/relationships" xmlns:p="http://schemas.openxmlformats.org/presentationml/2006/main">
+  <p:cSld>
+    <p:spTree>
+      <p:nvGrpSpPr>
+        <p:cNvPr id="1" name=""/>
+        <p:cNvGrpSpPr/>
+        <p:nvPr/>
+      </p:nvGrpSpPr>
+      <p:grpSpPr>
+        <a:xfrm>
+          <a:off x="0" y="0"/>
+          <a:ext cx="0" cy="0"/>
+          <a:chOff x="0" y="0"/>
+          <a:chExt cx="0" cy="0"/>
+        </a:xfrm>
+      </p:grpSpPr>
+      <p:sp>
+        <p:nvSpPr>
+          <p:cNvPr id="2" name="Slide Image Placeholder 1"/>
+          <p:cNvSpPr>
+            <a:spLocks noGrp="1" noRot="1" noChangeAspect="1"/>
+          </p:cNvSpPr>
+          <p:nvPr>
+            <p:ph type="sldImg"/>
+          </p:nvPr>
+        </p:nvSpPr>
+        <p:spPr/>
+      </p:sp>
+      <p:sp>
+        <p:nvSpPr>
+          <p:cNvPr id="3" name="Notes Placeholder 2"/>
+          <p:cNvSpPr>
+            <a:spLocks noGrp="1"/>
+          </p:cNvSpPr>
+          <p:nvPr>
+            <p:ph type="body" idx="1"/>
+          </p:nvPr>
+        </p:nvSpPr>
+        <p:spPr/>
+        <p:txBody>
+          <a:bodyPr/>
+          <a:lstStyle/>
+          <a:p>
+            <a:r>
+              <a:rPr lang="en-US" dirty="0"/>
+              <a:t/>
+            </a:r>
+            <a:endParaRPr lang="en-US" dirty="0"/>
+          </a:p>
+        </p:txBody>
+      </p:sp>
+      <p:sp>
+        <p:nvSpPr>
+          <p:cNvPr id="4" name="Slide Number Placeholder 3"/>
+          <p:cNvSpPr>
+            <a:spLocks noGrp="1"/>
+          </p:cNvSpPr>
+          <p:nvPr>
+            <p:ph type="sldNum" sz="quarter" idx="10"/>
+          </p:nvPr>
+        </p:nvSpPr>
+        <p:spPr/>
+        <p:txBody>
+          <a:bodyPr/>
+          <a:lstStyle/>
+          <a:p>
+            <a:fld id="{F7021451-1387-4CA6-816F-3879F97B5CBC}" type="slidenum">
+              <a:rPr lang="en-US"/>
+              <a:t>14</a:t>
+            </a:fld>
+            <a:endParaRPr lang="en-US"/>
+          </a:p>
+        </p:txBody>
+      </p:sp>
+    </p:spTree>
+    <p:extLst>
+      <p:ext uri="{BB962C8B-B14F-4D97-AF65-F5344CB8AC3E}">
+        <p14:creationId xmlns:p14="http://schemas.microsoft.com/office/powerpoint/2010/main" val="1024086991"/>
+      </p:ext>
+    </p:extLst>
+  </p:cSld>
+  <p:clrMapOvr>
+    <a:masterClrMapping/>
+  </p:clrMapOvr>
+</p:notes>
+</file>
+
+<file path=ppt/notesSlides/notesSlide15.xml><?xml version="1.0" encoding="utf-8"?>
+<p:notes xmlns:a="http://schemas.openxmlformats.org/drawingml/2006/main" xmlns:r="http://schemas.openxmlformats.org/officeDocument/2006/relationships" xmlns:p="http://schemas.openxmlformats.org/presentationml/2006/main">
+  <p:cSld>
+    <p:spTree>
+      <p:nvGrpSpPr>
+        <p:cNvPr id="1" name=""/>
+        <p:cNvGrpSpPr/>
+        <p:nvPr/>
+      </p:nvGrpSpPr>
+      <p:grpSpPr>
+        <a:xfrm>
+          <a:off x="0" y="0"/>
+          <a:ext cx="0" cy="0"/>
+          <a:chOff x="0" y="0"/>
+          <a:chExt cx="0" cy="0"/>
+        </a:xfrm>
+      </p:grpSpPr>
+      <p:sp>
+        <p:nvSpPr>
+          <p:cNvPr id="2" name="Slide Image Placeholder 1"/>
+          <p:cNvSpPr>
+            <a:spLocks noGrp="1" noRot="1" noChangeAspect="1"/>
+          </p:cNvSpPr>
+          <p:nvPr>
+            <p:ph type="sldImg"/>
+          </p:nvPr>
+        </p:nvSpPr>
+        <p:spPr/>
+      </p:sp>
+      <p:sp>
+        <p:nvSpPr>
+          <p:cNvPr id="3" name="Notes Placeholder 2"/>
+          <p:cNvSpPr>
+            <a:spLocks noGrp="1"/>
+          </p:cNvSpPr>
+          <p:nvPr>
+            <p:ph type="body" idx="1"/>
+          </p:nvPr>
+        </p:nvSpPr>
+        <p:spPr/>
+        <p:txBody>
+          <a:bodyPr/>
+          <a:lstStyle/>
+          <a:p>
+            <a:r>
+              <a:rPr lang="en-US" dirty="0"/>
+              <a:t/>
+            </a:r>
+            <a:endParaRPr lang="en-US" dirty="0"/>
+          </a:p>
+        </p:txBody>
+      </p:sp>
+      <p:sp>
+        <p:nvSpPr>
+          <p:cNvPr id="4" name="Slide Number Placeholder 3"/>
+          <p:cNvSpPr>
+            <a:spLocks noGrp="1"/>
+          </p:cNvSpPr>
+          <p:nvPr>
+            <p:ph type="sldNum" sz="quarter" idx="10"/>
+          </p:nvPr>
+        </p:nvSpPr>
+        <p:spPr/>
+        <p:txBody>
+          <a:bodyPr/>
+          <a:lstStyle/>
+          <a:p>
+            <a:fld id="{F7021451-1387-4CA6-816F-3879F97B5CBC}" type="slidenum">
+              <a:rPr lang="en-US"/>
+              <a:t>15</a:t>
+            </a:fld>
+            <a:endParaRPr lang="en-US"/>
+          </a:p>
+        </p:txBody>
+      </p:sp>
+    </p:spTree>
+    <p:extLst>
+      <p:ext uri="{BB962C8B-B14F-4D97-AF65-F5344CB8AC3E}">
+        <p14:creationId xmlns:p14="http://schemas.microsoft.com/office/powerpoint/2010/main" val="1024086991"/>
+      </p:ext>
+    </p:extLst>
+  </p:cSld>
+  <p:clrMapOvr>
+    <a:masterClrMapping/>
+  </p:clrMapOvr>
+</p:notes>
+</file>
+
+<file path=ppt/notesSlides/notesSlide16.xml><?xml version="1.0" encoding="utf-8"?>
+<p:notes xmlns:a="http://schemas.openxmlformats.org/drawingml/2006/main" xmlns:r="http://schemas.openxmlformats.org/officeDocument/2006/relationships" xmlns:p="http://schemas.openxmlformats.org/presentationml/2006/main">
+  <p:cSld>
+    <p:spTree>
+      <p:nvGrpSpPr>
+        <p:cNvPr id="1" name=""/>
+        <p:cNvGrpSpPr/>
+        <p:nvPr/>
+      </p:nvGrpSpPr>
+      <p:grpSpPr>
+        <a:xfrm>
+          <a:off x="0" y="0"/>
+          <a:ext cx="0" cy="0"/>
+          <a:chOff x="0" y="0"/>
+          <a:chExt cx="0" cy="0"/>
+        </a:xfrm>
+      </p:grpSpPr>
+      <p:sp>
+        <p:nvSpPr>
+          <p:cNvPr id="2" name="Slide Image Placeholder 1"/>
+          <p:cNvSpPr>
+            <a:spLocks noGrp="1" noRot="1" noChangeAspect="1"/>
+          </p:cNvSpPr>
+          <p:nvPr>
+            <p:ph type="sldImg"/>
+          </p:nvPr>
+        </p:nvSpPr>
+        <p:spPr/>
+      </p:sp>
+      <p:sp>
+        <p:nvSpPr>
+          <p:cNvPr id="3" name="Notes Placeholder 2"/>
+          <p:cNvSpPr>
+            <a:spLocks noGrp="1"/>
+          </p:cNvSpPr>
+          <p:nvPr>
+            <p:ph type="body" idx="1"/>
+          </p:nvPr>
+        </p:nvSpPr>
+        <p:spPr/>
+        <p:txBody>
+          <a:bodyPr/>
+          <a:lstStyle/>
+          <a:p>
+            <a:r>
+              <a:rPr lang="en-US" dirty="0"/>
+              <a:t/>
+            </a:r>
+            <a:endParaRPr lang="en-US" dirty="0"/>
+          </a:p>
+        </p:txBody>
+      </p:sp>
+      <p:sp>
+        <p:nvSpPr>
+          <p:cNvPr id="4" name="Slide Number Placeholder 3"/>
+          <p:cNvSpPr>
+            <a:spLocks noGrp="1"/>
+          </p:cNvSpPr>
+          <p:nvPr>
+            <p:ph type="sldNum" sz="quarter" idx="10"/>
+          </p:nvPr>
+        </p:nvSpPr>
+        <p:spPr/>
+        <p:txBody>
+          <a:bodyPr/>
+          <a:lstStyle/>
+          <a:p>
+            <a:fld id="{F7021451-1387-4CA6-816F-3879F97B5CBC}" type="slidenum">
+              <a:rPr lang="en-US"/>
+              <a:t>16</a:t>
+            </a:fld>
+            <a:endParaRPr lang="en-US"/>
+          </a:p>
+        </p:txBody>
+      </p:sp>
+    </p:spTree>
+    <p:extLst>
+      <p:ext uri="{BB962C8B-B14F-4D97-AF65-F5344CB8AC3E}">
+        <p14:creationId xmlns:p14="http://schemas.microsoft.com/office/powerpoint/2010/main" val="1024086991"/>
+      </p:ext>
+    </p:extLst>
+  </p:cSld>
+  <p:clrMapOvr>
+    <a:masterClrMapping/>
+  </p:clrMapOvr>
+</p:notes>
+</file>
+
+<file path=ppt/notesSlides/notesSlide17.xml><?xml version="1.0" encoding="utf-8"?>
+<p:notes xmlns:a="http://schemas.openxmlformats.org/drawingml/2006/main" xmlns:r="http://schemas.openxmlformats.org/officeDocument/2006/relationships" xmlns:p="http://schemas.openxmlformats.org/presentationml/2006/main">
+  <p:cSld>
+    <p:spTree>
+      <p:nvGrpSpPr>
+        <p:cNvPr id="1" name=""/>
+        <p:cNvGrpSpPr/>
+        <p:nvPr/>
+      </p:nvGrpSpPr>
+      <p:grpSpPr>
+        <a:xfrm>
+          <a:off x="0" y="0"/>
+          <a:ext cx="0" cy="0"/>
+          <a:chOff x="0" y="0"/>
+          <a:chExt cx="0" cy="0"/>
+        </a:xfrm>
+      </p:grpSpPr>
+      <p:sp>
+        <p:nvSpPr>
+          <p:cNvPr id="2" name="Slide Image Placeholder 1"/>
+          <p:cNvSpPr>
+            <a:spLocks noGrp="1" noRot="1" noChangeAspect="1"/>
+          </p:cNvSpPr>
+          <p:nvPr>
+            <p:ph type="sldImg"/>
+          </p:nvPr>
+        </p:nvSpPr>
+        <p:spPr/>
+      </p:sp>
+      <p:sp>
+        <p:nvSpPr>
+          <p:cNvPr id="3" name="Notes Placeholder 2"/>
+          <p:cNvSpPr>
+            <a:spLocks noGrp="1"/>
+          </p:cNvSpPr>
+          <p:nvPr>
+            <p:ph type="body" idx="1"/>
+          </p:nvPr>
+        </p:nvSpPr>
+        <p:spPr/>
+        <p:txBody>
+          <a:bodyPr/>
+          <a:lstStyle/>
+          <a:p>
+            <a:r>
+              <a:rPr lang="en-US" dirty="0"/>
+              <a:t/>
+            </a:r>
+            <a:endParaRPr lang="en-US" dirty="0"/>
+          </a:p>
+        </p:txBody>
+      </p:sp>
+      <p:sp>
+        <p:nvSpPr>
+          <p:cNvPr id="4" name="Slide Number Placeholder 3"/>
+          <p:cNvSpPr>
+            <a:spLocks noGrp="1"/>
+          </p:cNvSpPr>
+          <p:nvPr>
+            <p:ph type="sldNum" sz="quarter" idx="10"/>
+          </p:nvPr>
+        </p:nvSpPr>
+        <p:spPr/>
+        <p:txBody>
+          <a:bodyPr/>
+          <a:lstStyle/>
+          <a:p>
+            <a:fld id="{F7021451-1387-4CA6-816F-3879F97B5CBC}" type="slidenum">
+              <a:rPr lang="en-US"/>
+              <a:t>17</a:t>
+            </a:fld>
+            <a:endParaRPr lang="en-US"/>
+          </a:p>
+        </p:txBody>
+      </p:sp>
+    </p:spTree>
+    <p:extLst>
+      <p:ext uri="{BB962C8B-B14F-4D97-AF65-F5344CB8AC3E}">
+        <p14:creationId xmlns:p14="http://schemas.microsoft.com/office/powerpoint/2010/main" val="1024086991"/>
+      </p:ext>
+    </p:extLst>
+  </p:cSld>
+  <p:clrMapOvr>
+    <a:masterClrMapping/>
+  </p:clrMapOvr>
+</p:notes>
+</file>
+
+<file path=ppt/notesSlides/notesSlide18.xml><?xml version="1.0" encoding="utf-8"?>
+<p:notes xmlns:a="http://schemas.openxmlformats.org/drawingml/2006/main" xmlns:r="http://schemas.openxmlformats.org/officeDocument/2006/relationships" xmlns:p="http://schemas.openxmlformats.org/presentationml/2006/main">
+  <p:cSld>
+    <p:spTree>
+      <p:nvGrpSpPr>
+        <p:cNvPr id="1" name=""/>
+        <p:cNvGrpSpPr/>
+        <p:nvPr/>
+      </p:nvGrpSpPr>
+      <p:grpSpPr>
+        <a:xfrm>
+          <a:off x="0" y="0"/>
+          <a:ext cx="0" cy="0"/>
+          <a:chOff x="0" y="0"/>
+          <a:chExt cx="0" cy="0"/>
+        </a:xfrm>
+      </p:grpSpPr>
+      <p:sp>
+        <p:nvSpPr>
+          <p:cNvPr id="2" name="Slide Image Placeholder 1"/>
+          <p:cNvSpPr>
+            <a:spLocks noGrp="1" noRot="1" noChangeAspect="1"/>
+          </p:cNvSpPr>
+          <p:nvPr>
+            <p:ph type="sldImg"/>
+          </p:nvPr>
+        </p:nvSpPr>
+        <p:spPr/>
+      </p:sp>
+      <p:sp>
+        <p:nvSpPr>
+          <p:cNvPr id="3" name="Notes Placeholder 2"/>
+          <p:cNvSpPr>
+            <a:spLocks noGrp="1"/>
+          </p:cNvSpPr>
+          <p:nvPr>
+            <p:ph type="body" idx="1"/>
+          </p:nvPr>
+        </p:nvSpPr>
+        <p:spPr/>
+        <p:txBody>
+          <a:bodyPr/>
+          <a:lstStyle/>
+          <a:p>
+            <a:r>
+              <a:rPr lang="en-US" dirty="0"/>
+              <a:t/>
+            </a:r>
+            <a:endParaRPr lang="en-US" dirty="0"/>
+          </a:p>
+        </p:txBody>
+      </p:sp>
+      <p:sp>
+        <p:nvSpPr>
+          <p:cNvPr id="4" name="Slide Number Placeholder 3"/>
+          <p:cNvSpPr>
+            <a:spLocks noGrp="1"/>
+          </p:cNvSpPr>
+          <p:nvPr>
+            <p:ph type="sldNum" sz="quarter" idx="10"/>
+          </p:nvPr>
+        </p:nvSpPr>
+        <p:spPr/>
+        <p:txBody>
+          <a:bodyPr/>
+          <a:lstStyle/>
+          <a:p>
+            <a:fld id="{F7021451-1387-4CA6-816F-3879F97B5CBC}" type="slidenum">
+              <a:rPr lang="en-US"/>
+              <a:t>18</a:t>
             </a:fld>
             <a:endParaRPr lang="en-US"/>
           </a:p>
@@ -2189,148 +2634,6 @@
         </p:nvSpPr>
         <p:spPr>
           <a:xfrm>
-            <a:off x="406301" y="1223963"/>
-            <a:ext cx="8498026" cy="274290"/>
-          </a:xfrm>
-          <a:prstGeom prst="rect">
-            <a:avLst/>
-          </a:prstGeom>
-          <a:noFill/>
-          <a:ln/>
-        </p:spPr>
-        <p:txBody>
-          <a:bodyPr wrap="square" lIns="0" tIns="0" rIns="0" bIns="0" rtlCol="0" anchor="t"/>
-          <a:lstStyle/>
-          <a:p>
-            <a:pPr algn="l" indent="0" marL="0">
-              <a:lnSpc>
-                <a:spcPts val="2160"/>
-              </a:lnSpc>
-              <a:spcBef>
-                <a:spcPts val="600"/>
-              </a:spcBef>
-              <a:spcAft>
-                <a:spcPts val="800"/>
-              </a:spcAft>
-              <a:buNone/>
-            </a:pPr>
-            <a:r>
-              <a:rPr lang="en-US" sz="1800" b="1" dirty="0">
-                <a:solidFill>
-                  <a:srgbClr val="FE4447"/>
-                </a:solidFill>
-                <a:latin typeface="Georgia" pitchFamily="34" charset="0"/>
-                <a:ea typeface="Georgia" pitchFamily="34" charset="-122"/>
-                <a:cs typeface="Georgia" pitchFamily="34" charset="-120"/>
-              </a:rPr>
-              <a:t>Learning objective</a:t>
-            </a:r>
-            <a:endParaRPr lang="en-US" sz="1800" dirty="0"/>
-          </a:p>
-        </p:txBody>
-      </p:sp>
-      <p:sp>
-        <p:nvSpPr>
-          <p:cNvPr id="6" name="Text 4"/>
-          <p:cNvSpPr/>
-          <p:nvPr/>
-        </p:nvSpPr>
-        <p:spPr>
-          <a:xfrm>
-            <a:off x="406301" y="1637854"/>
-            <a:ext cx="8498026" cy="639812"/>
-          </a:xfrm>
-          <a:prstGeom prst="rect">
-            <a:avLst/>
-          </a:prstGeom>
-          <a:noFill/>
-          <a:ln/>
-        </p:spPr>
-        <p:txBody>
-          <a:bodyPr wrap="square" lIns="0" tIns="0" rIns="0" bIns="0" rtlCol="0" anchor="t"/>
-          <a:lstStyle/>
-          <a:p>
-            <a:pPr algn="l" indent="0" marL="0">
-              <a:lnSpc>
-                <a:spcPts val="1680"/>
-              </a:lnSpc>
-              <a:spcBef>
-                <a:spcPts val="300"/>
-              </a:spcBef>
-              <a:spcAft>
-                <a:spcPts val="300"/>
-              </a:spcAft>
-              <a:buNone/>
-            </a:pPr>
-            <a:r>
-              <a:rPr lang="en-US" sz="1200" dirty="0">
-                <a:solidFill>
-                  <a:srgbClr val="1C2833"/>
-                </a:solidFill>
-                <a:latin typeface="Arial" pitchFamily="34" charset="0"/>
-                <a:ea typeface="Arial" pitchFamily="34" charset="-122"/>
-                <a:cs typeface="Arial" pitchFamily="34" charset="-120"/>
-              </a:rPr>
-              <a:t>By the end of this lesson, students will recite the phrase </a:t>
-            </a:r>
-            <a:pPr algn="l" indent="0" marL="0">
-              <a:lnSpc>
-                <a:spcPts val="1680"/>
-              </a:lnSpc>
-              <a:spcBef>
-                <a:spcPts val="300"/>
-              </a:spcBef>
-              <a:spcAft>
-                <a:spcPts val="300"/>
-              </a:spcAft>
-              <a:buNone/>
-            </a:pPr>
-            <a:r>
-              <a:rPr lang="en-US" sz="1200" i="1" dirty="0">
-                <a:solidFill>
-                  <a:srgbClr val="1C2833"/>
-                </a:solidFill>
-                <a:latin typeface="Arial" pitchFamily="34" charset="0"/>
-                <a:ea typeface="Arial" pitchFamily="34" charset="-122"/>
-                <a:cs typeface="Arial" pitchFamily="34" charset="-120"/>
-              </a:rPr>
-              <a:t>vasudhaiva kuṭumbakam</a:t>
-            </a:r>
-            <a:pPr algn="l" indent="0" marL="0">
-              <a:lnSpc>
-                <a:spcPts val="1680"/>
-              </a:lnSpc>
-              <a:spcBef>
-                <a:spcPts val="300"/>
-              </a:spcBef>
-              <a:spcAft>
-                <a:spcPts val="300"/>
-              </a:spcAft>
-              <a:buNone/>
-            </a:pPr>
-            <a:r>
-              <a:rPr lang="en-US" sz="1200" dirty="0">
-                <a:solidFill>
-                  <a:srgbClr val="1C2833"/>
-                </a:solidFill>
-                <a:latin typeface="Arial" pitchFamily="34" charset="0"/>
-                <a:ea typeface="Arial" pitchFamily="34" charset="-122"/>
-                <a:cs typeface="Arial" pitchFamily="34" charset="-120"/>
-              </a:rPr>
-              <a:t> with its meaning, name its source (Mahā Upaniṣad 6.71–73), and give one concrete example of "treating something non-human as family" that they have actually seen.</a:t>
-            </a:r>
-            <a:endParaRPr lang="en-US" sz="1200" dirty="0"/>
-          </a:p>
-        </p:txBody>
-      </p:sp>
-      <p:sp>
-        <p:nvSpPr>
-          <p:cNvPr id="7" name="Text 5"/>
-          <p:cNvSpPr/>
-          <p:nvPr/>
-        </p:nvSpPr>
-        <p:spPr>
-          <a:xfrm>
             <a:off x="406301" y="4434929"/>
             <a:ext cx="8498026" cy="213271"/>
           </a:xfrm>
@@ -2475,7 +2778,7 @@
                 <a:ea typeface="Georgia" pitchFamily="34" charset="-122"/>
                 <a:cs typeface="Georgia" pitchFamily="34" charset="-120"/>
               </a:rPr>
-              <a:t>Homework</a:t>
+              <a:t>Core (20 min) (cont.)</a:t>
             </a:r>
             <a:endParaRPr lang="en-US" sz="1800" dirty="0"/>
           </a:p>
@@ -2489,8 +2792,8 @@
         </p:nvSpPr>
         <p:spPr>
           <a:xfrm>
-            <a:off x="406301" y="870942"/>
-            <a:ext cx="8498026" cy="426541"/>
+            <a:off x="634901" y="883593"/>
+            <a:ext cx="8102798" cy="693241"/>
           </a:xfrm>
           <a:prstGeom prst="rect">
             <a:avLst/>
@@ -2502,13 +2805,31 @@
           <a:bodyPr wrap="square" lIns="0" tIns="0" rIns="0" bIns="0" rtlCol="0" anchor="t"/>
           <a:lstStyle/>
           <a:p>
-            <a:pPr algn="l" indent="0" marL="0">
-              <a:lnSpc>
-                <a:spcPts val="1680"/>
-              </a:lnSpc>
-              <a:spcBef>
-                <a:spcPts val="300"/>
-              </a:spcBef>
+            <a:pPr algn="l" marL="342900" indent="-342900">
+              <a:lnSpc>
+                <a:spcPts val="1620"/>
+              </a:lnSpc>
+              <a:spcAft>
+                <a:spcPts val="300"/>
+              </a:spcAft>
+              <a:buSzPct val="100000"/>
+              <a:buChar char="•"/>
+            </a:pPr>
+            <a:r>
+              <a:rPr lang="en-US" sz="1200" b="1" dirty="0">
+                <a:solidFill>
+                  <a:srgbClr val="1C2833"/>
+                </a:solidFill>
+                <a:latin typeface="Arial" pitchFamily="34" charset="0"/>
+                <a:ea typeface="Arial" pitchFamily="34" charset="-122"/>
+                <a:cs typeface="Arial" pitchFamily="34" charset="-120"/>
+              </a:rPr>
+              <a:t>Where the phrase has lived.</a:t>
+            </a:r>
+            <a:pPr algn="l" indent="0" marL="0">
+              <a:lnSpc>
+                <a:spcPts val="1620"/>
+              </a:lnSpc>
               <a:spcAft>
                 <a:spcPts val="300"/>
               </a:spcAft>
@@ -2523,15 +2844,12 @@
                 <a:ea typeface="Arial" pitchFamily="34" charset="-122"/>
                 <a:cs typeface="Arial" pitchFamily="34" charset="-120"/>
               </a:rPr>
-              <a:t>– Add three more sticky-note items to your "extended family" list at home. They must be things you have </a:t>
-            </a:r>
-            <a:pPr algn="l" indent="0" marL="0">
-              <a:lnSpc>
-                <a:spcPts val="1680"/>
-              </a:lnSpc>
-              <a:spcBef>
-                <a:spcPts val="300"/>
-              </a:spcBef>
+              <a:t> The same idea appears in the </a:t>
+            </a:r>
+            <a:pPr algn="l" indent="0" marL="0">
+              <a:lnSpc>
+                <a:spcPts val="1620"/>
+              </a:lnSpc>
               <a:spcAft>
                 <a:spcPts val="300"/>
               </a:spcAft>
@@ -2546,15 +2864,12 @@
                 <a:ea typeface="Arial" pitchFamily="34" charset="-122"/>
                 <a:cs typeface="Arial" pitchFamily="34" charset="-120"/>
               </a:rPr>
-              <a:t>personally</a:t>
-            </a:r>
-            <a:pPr algn="l" indent="0" marL="0">
-              <a:lnSpc>
-                <a:spcPts val="1680"/>
-              </a:lnSpc>
-              <a:spcBef>
-                <a:spcPts val="300"/>
-              </a:spcBef>
+              <a:t>Pañcatantra</a:t>
+            </a:r>
+            <a:pPr algn="l" indent="0" marL="0">
+              <a:lnSpc>
+                <a:spcPts val="1620"/>
+              </a:lnSpc>
               <a:spcAft>
                 <a:spcPts val="300"/>
               </a:spcAft>
@@ -2569,7 +2884,47 @@
                 <a:ea typeface="Arial" pitchFamily="34" charset="-122"/>
                 <a:cs typeface="Arial" pitchFamily="34" charset="-120"/>
               </a:rPr>
-              <a:t> encountered today. Bring the list tomorrow.</a:t>
+              <a:t> prologue and the </a:t>
+            </a:r>
+            <a:pPr algn="l" indent="0" marL="0">
+              <a:lnSpc>
+                <a:spcPts val="1620"/>
+              </a:lnSpc>
+              <a:spcAft>
+                <a:spcPts val="300"/>
+              </a:spcAft>
+              <a:buNone/>
+            </a:pPr>
+            <a:r>
+              <a:rPr lang="en-US" sz="1200" i="1" dirty="0">
+                <a:solidFill>
+                  <a:srgbClr val="1C2833"/>
+                </a:solidFill>
+                <a:latin typeface="Arial" pitchFamily="34" charset="0"/>
+                <a:ea typeface="Arial" pitchFamily="34" charset="-122"/>
+                <a:cs typeface="Arial" pitchFamily="34" charset="-120"/>
+              </a:rPr>
+              <a:t>Hitopadeśa</a:t>
+            </a:r>
+            <a:pPr algn="l" indent="0" marL="0">
+              <a:lnSpc>
+                <a:spcPts val="1620"/>
+              </a:lnSpc>
+              <a:spcAft>
+                <a:spcPts val="300"/>
+              </a:spcAft>
+              <a:buNone/>
+            </a:pPr>
+            <a:r>
+              <a:rPr lang="en-US" sz="1200" dirty="0">
+                <a:solidFill>
+                  <a:srgbClr val="1C2833"/>
+                </a:solidFill>
+                <a:latin typeface="Arial" pitchFamily="34" charset="0"/>
+                <a:ea typeface="Arial" pitchFamily="34" charset="-122"/>
+                <a:cs typeface="Arial" pitchFamily="34" charset="-120"/>
+              </a:rPr>
+              <a:t> as a quoted line; the Mahā Upaniṣad is the older scriptural source. The phrase has been adopted as the motto of the Indian Parliament's entrance hall, and India used it as the theme of the G20 presidency in 2023. It travels well.</a:t>
             </a:r>
             <a:endParaRPr lang="en-US" sz="1200" dirty="0"/>
           </a:p>
@@ -2727,7 +3082,7 @@
                 <a:ea typeface="Georgia" pitchFamily="34" charset="-122"/>
                 <a:cs typeface="Georgia" pitchFamily="34" charset="-120"/>
               </a:rPr>
-              <a:t>Differentiation</a:t>
+              <a:t>Core (20 min) (cont.)</a:t>
             </a:r>
             <a:endParaRPr lang="en-US" sz="1800" dirty="0"/>
           </a:p>
@@ -2742,7 +3097,7 @@
         <p:spPr>
           <a:xfrm>
             <a:off x="634901" y="883593"/>
-            <a:ext cx="8102798" cy="937022"/>
+            <a:ext cx="8102798" cy="693241"/>
           </a:xfrm>
           <a:prstGeom prst="rect">
             <a:avLst/>
@@ -2773,7 +3128,7 @@
                 <a:ea typeface="Arial" pitchFamily="34" charset="-122"/>
                 <a:cs typeface="Arial" pitchFamily="34" charset="-120"/>
               </a:rPr>
-              <a:t>One tier up:</a:t>
+              <a:t>The historical caveat — don't oversell.</a:t>
             </a:r>
             <a:pPr algn="l" indent="0" marL="0">
               <a:lnSpc>
@@ -2793,7 +3148,7 @@
                 <a:ea typeface="Arial" pitchFamily="34" charset="-122"/>
                 <a:cs typeface="Arial" pitchFamily="34" charset="-120"/>
               </a:rPr>
-              <a:t> Compare </a:t>
+              <a:t> Plenty of pre-modern Indian rulers cleared forests, drained tanks, and treated land as something to extract from. The phrase is an </a:t>
             </a:r>
             <a:pPr algn="l" indent="0" marL="0">
               <a:lnSpc>
@@ -2813,7 +3168,7 @@
                 <a:ea typeface="Arial" pitchFamily="34" charset="-122"/>
                 <a:cs typeface="Arial" pitchFamily="34" charset="-120"/>
               </a:rPr>
-              <a:t>vasudhaiva kuṭumbakam</a:t>
+              <a:t>ideal</a:t>
             </a:r>
             <a:pPr algn="l" indent="0" marL="0">
               <a:lnSpc>
@@ -2833,171 +3188,7 @@
                 <a:ea typeface="Arial" pitchFamily="34" charset="-122"/>
                 <a:cs typeface="Arial" pitchFamily="34" charset="-120"/>
               </a:rPr>
-              <a:t> with the modern environmental phrase "Earth is our common home" (used by international NGOs and Pope Francis's 2015 encyclical </a:t>
-            </a:r>
-            <a:pPr algn="l" indent="0" marL="0">
-              <a:lnSpc>
-                <a:spcPts val="1620"/>
-              </a:lnSpc>
-              <a:spcAft>
-                <a:spcPts val="300"/>
-              </a:spcAft>
-              <a:buNone/>
-            </a:pPr>
-            <a:r>
-              <a:rPr lang="en-US" sz="1200" i="1" dirty="0">
-                <a:solidFill>
-                  <a:srgbClr val="1C2833"/>
-                </a:solidFill>
-                <a:latin typeface="Arial" pitchFamily="34" charset="0"/>
-                <a:ea typeface="Arial" pitchFamily="34" charset="-122"/>
-                <a:cs typeface="Arial" pitchFamily="34" charset="-120"/>
-              </a:rPr>
-              <a:t>Laudato si'</a:t>
-            </a:r>
-            <a:pPr algn="l" indent="0" marL="0">
-              <a:lnSpc>
-                <a:spcPts val="1620"/>
-              </a:lnSpc>
-              <a:spcAft>
-                <a:spcPts val="300"/>
-              </a:spcAft>
-              <a:buNone/>
-            </a:pPr>
-            <a:r>
-              <a:rPr lang="en-US" sz="1200" dirty="0">
-                <a:solidFill>
-                  <a:srgbClr val="1C2833"/>
-                </a:solidFill>
-                <a:latin typeface="Arial" pitchFamily="34" charset="0"/>
-                <a:ea typeface="Arial" pitchFamily="34" charset="-122"/>
-                <a:cs typeface="Arial" pitchFamily="34" charset="-120"/>
-              </a:rPr>
-              <a:t>). Are they saying the same thing? What does each emphasise that the other doesn't?</a:t>
-            </a:r>
-            <a:endParaRPr lang="en-US" sz="1200" dirty="0"/>
-          </a:p>
-          <a:p>
-            <a:pPr algn="l" marL="342900" indent="-342900">
-              <a:lnSpc>
-                <a:spcPts val="1620"/>
-              </a:lnSpc>
-              <a:spcAft>
-                <a:spcPts val="300"/>
-              </a:spcAft>
-              <a:buSzPct val="100000"/>
-              <a:buChar char="•"/>
-            </a:pPr>
-            <a:r>
-              <a:rPr lang="en-US" sz="1200" b="1" dirty="0">
-                <a:solidFill>
-                  <a:srgbClr val="1C2833"/>
-                </a:solidFill>
-                <a:latin typeface="Arial" pitchFamily="34" charset="0"/>
-                <a:ea typeface="Arial" pitchFamily="34" charset="-122"/>
-                <a:cs typeface="Arial" pitchFamily="34" charset="-120"/>
-              </a:rPr>
-              <a:t>One tier down:</a:t>
-            </a:r>
-            <a:pPr algn="l" indent="0" marL="0">
-              <a:lnSpc>
-                <a:spcPts val="1620"/>
-              </a:lnSpc>
-              <a:spcAft>
-                <a:spcPts val="300"/>
-              </a:spcAft>
-              <a:buNone/>
-            </a:pPr>
-            <a:r>
-              <a:rPr lang="en-US" sz="1200" dirty="0">
-                <a:solidFill>
-                  <a:srgbClr val="1C2833"/>
-                </a:solidFill>
-                <a:latin typeface="Arial" pitchFamily="34" charset="0"/>
-                <a:ea typeface="Arial" pitchFamily="34" charset="-122"/>
-                <a:cs typeface="Arial" pitchFamily="34" charset="-120"/>
-              </a:rPr>
-              <a:t> Focus on memorising </a:t>
-            </a:r>
-            <a:pPr algn="l" indent="0" marL="0">
-              <a:lnSpc>
-                <a:spcPts val="1620"/>
-              </a:lnSpc>
-              <a:spcAft>
-                <a:spcPts val="300"/>
-              </a:spcAft>
-              <a:buNone/>
-            </a:pPr>
-            <a:r>
-              <a:rPr lang="en-US" sz="1200" i="1" dirty="0">
-                <a:solidFill>
-                  <a:srgbClr val="1C2833"/>
-                </a:solidFill>
-                <a:latin typeface="Arial" pitchFamily="34" charset="0"/>
-                <a:ea typeface="Arial" pitchFamily="34" charset="-122"/>
-                <a:cs typeface="Arial" pitchFamily="34" charset="-120"/>
-              </a:rPr>
-              <a:t>vasudhā</a:t>
-            </a:r>
-            <a:pPr algn="l" indent="0" marL="0">
-              <a:lnSpc>
-                <a:spcPts val="1620"/>
-              </a:lnSpc>
-              <a:spcAft>
-                <a:spcPts val="300"/>
-              </a:spcAft>
-              <a:buNone/>
-            </a:pPr>
-            <a:r>
-              <a:rPr lang="en-US" sz="1200" dirty="0">
-                <a:solidFill>
-                  <a:srgbClr val="1C2833"/>
-                </a:solidFill>
-                <a:latin typeface="Arial" pitchFamily="34" charset="0"/>
-                <a:ea typeface="Arial" pitchFamily="34" charset="-122"/>
-                <a:cs typeface="Arial" pitchFamily="34" charset="-120"/>
-              </a:rPr>
-              <a:t> (earth) and </a:t>
-            </a:r>
-            <a:pPr algn="l" indent="0" marL="0">
-              <a:lnSpc>
-                <a:spcPts val="1620"/>
-              </a:lnSpc>
-              <a:spcAft>
-                <a:spcPts val="300"/>
-              </a:spcAft>
-              <a:buNone/>
-            </a:pPr>
-            <a:r>
-              <a:rPr lang="en-US" sz="1200" i="1" dirty="0">
-                <a:solidFill>
-                  <a:srgbClr val="1C2833"/>
-                </a:solidFill>
-                <a:latin typeface="Arial" pitchFamily="34" charset="0"/>
-                <a:ea typeface="Arial" pitchFamily="34" charset="-122"/>
-                <a:cs typeface="Arial" pitchFamily="34" charset="-120"/>
-              </a:rPr>
-              <a:t>kuṭumba</a:t>
-            </a:r>
-            <a:pPr algn="l" indent="0" marL="0">
-              <a:lnSpc>
-                <a:spcPts val="1620"/>
-              </a:lnSpc>
-              <a:spcAft>
-                <a:spcPts val="300"/>
-              </a:spcAft>
-              <a:buNone/>
-            </a:pPr>
-            <a:r>
-              <a:rPr lang="en-US" sz="1200" dirty="0">
-                <a:solidFill>
-                  <a:srgbClr val="1C2833"/>
-                </a:solidFill>
-                <a:latin typeface="Arial" pitchFamily="34" charset="0"/>
-                <a:ea typeface="Arial" pitchFamily="34" charset="-122"/>
-                <a:cs typeface="Arial" pitchFamily="34" charset="-120"/>
-              </a:rPr>
-              <a:t> (family). The whole sentence can come on Day 2.</a:t>
+              <a:t> the tradition put forward, not a description of how everyone actually behaved. We'll keep this honest throughout the module.</a:t>
             </a:r>
             <a:endParaRPr lang="en-US" sz="1200" dirty="0"/>
           </a:p>
@@ -3155,7 +3346,7 @@
                 <a:ea typeface="Georgia" pitchFamily="34" charset="-122"/>
                 <a:cs typeface="Georgia" pitchFamily="34" charset="-120"/>
               </a:rPr>
-              <a:t>Teacher notes</a:t>
+              <a:t>Activity (15 min) — The "extended family" chart</a:t>
             </a:r>
             <a:endParaRPr lang="en-US" sz="1800" dirty="0"/>
           </a:p>
@@ -3169,8 +3360,8 @@
         </p:nvSpPr>
         <p:spPr>
           <a:xfrm>
-            <a:off x="406301" y="870942"/>
-            <a:ext cx="8498026" cy="1279624"/>
+            <a:off x="634901" y="883593"/>
+            <a:ext cx="8102798" cy="1630263"/>
           </a:xfrm>
           <a:prstGeom prst="rect">
             <a:avLst/>
@@ -3182,17 +3373,15 @@
           <a:bodyPr wrap="square" lIns="0" tIns="0" rIns="0" bIns="0" rtlCol="0" anchor="t"/>
           <a:lstStyle/>
           <a:p>
-            <a:pPr algn="l" indent="0" marL="0">
-              <a:lnSpc>
-                <a:spcPts val="1680"/>
-              </a:lnSpc>
-              <a:spcBef>
-                <a:spcPts val="300"/>
-              </a:spcBef>
-              <a:spcAft>
-                <a:spcPts val="300"/>
-              </a:spcAft>
-              <a:buNone/>
+            <a:pPr algn="l" marL="342900" indent="-342900">
+              <a:lnSpc>
+                <a:spcPts val="1620"/>
+              </a:lnSpc>
+              <a:spcAft>
+                <a:spcPts val="300"/>
+              </a:spcAft>
+              <a:buSzPct val="100000"/>
+              <a:buChar char="•"/>
             </a:pPr>
             <a:r>
               <a:rPr lang="en-US" sz="1200" dirty="0">
@@ -3203,15 +3392,36 @@
                 <a:ea typeface="Arial" pitchFamily="34" charset="-122"/>
                 <a:cs typeface="Arial" pitchFamily="34" charset="-120"/>
               </a:rPr>
-              <a:t>– Some students will say "but my cat IS family." Good — affirm that. The verse extends what they already feel. We are not introducing a new feeling; we're naming one. – Some students will say "this is just a religious idea — does it count?" Good — name it. Tell them: the verse is religious </a:t>
-            </a:r>
-            <a:pPr algn="l" indent="0" marL="0">
-              <a:lnSpc>
-                <a:spcPts val="1680"/>
-              </a:lnSpc>
-              <a:spcBef>
-                <a:spcPts val="300"/>
-              </a:spcBef>
+              <a:t>Pairs work together. Each pair gets a fresh sticky-note pad.</a:t>
+            </a:r>
+            <a:endParaRPr lang="en-US" sz="1200" dirty="0"/>
+          </a:p>
+          <a:p>
+            <a:pPr algn="l" marL="342900" indent="-342900">
+              <a:lnSpc>
+                <a:spcPts val="1620"/>
+              </a:lnSpc>
+              <a:spcAft>
+                <a:spcPts val="300"/>
+              </a:spcAft>
+              <a:buSzPct val="100000"/>
+              <a:buChar char="•"/>
+            </a:pPr>
+            <a:r>
+              <a:rPr lang="en-US" sz="1200" dirty="0">
+                <a:solidFill>
+                  <a:srgbClr val="1C2833"/>
+                </a:solidFill>
+                <a:latin typeface="Arial" pitchFamily="34" charset="0"/>
+                <a:ea typeface="Arial" pitchFamily="34" charset="-122"/>
+                <a:cs typeface="Arial" pitchFamily="34" charset="-120"/>
+              </a:rPr>
+              <a:t>Prompt: </a:t>
+            </a:r>
+            <a:pPr algn="l" indent="0" marL="0">
+              <a:lnSpc>
+                <a:spcPts val="1620"/>
+              </a:lnSpc>
               <a:spcAft>
                 <a:spcPts val="300"/>
               </a:spcAft>
@@ -3226,19 +3436,20 @@
                 <a:ea typeface="Arial" pitchFamily="34" charset="-122"/>
                 <a:cs typeface="Arial" pitchFamily="34" charset="-120"/>
               </a:rPr>
-              <a:t>in origin</a:t>
-            </a:r>
-            <a:pPr algn="l" indent="0" marL="0">
-              <a:lnSpc>
-                <a:spcPts val="1680"/>
-              </a:lnSpc>
-              <a:spcBef>
-                <a:spcPts val="300"/>
-              </a:spcBef>
-              <a:spcAft>
-                <a:spcPts val="300"/>
-              </a:spcAft>
-              <a:buNone/>
+              <a:t>"Add 5 non-human things to the family chart — but only ones you have personally encountered. Not 'the Amazon rainforest' if you haven't been there. The neem tree by the gate counts. The mango you ate at lunch counts. The pigeon on your roof counts."</a:t>
+            </a:r>
+            <a:endParaRPr lang="en-US" sz="1200" dirty="0"/>
+          </a:p>
+          <a:p>
+            <a:pPr algn="l" marL="342900" indent="-342900">
+              <a:lnSpc>
+                <a:spcPts val="1620"/>
+              </a:lnSpc>
+              <a:spcAft>
+                <a:spcPts val="300"/>
+              </a:spcAft>
+              <a:buSzPct val="100000"/>
+              <a:buChar char="•"/>
             </a:pPr>
             <a:r>
               <a:rPr lang="en-US" sz="1200" dirty="0">
@@ -3249,7 +3460,91 @@
                 <a:ea typeface="Arial" pitchFamily="34" charset="-122"/>
                 <a:cs typeface="Arial" pitchFamily="34" charset="-120"/>
               </a:rPr>
-              <a:t>, but the ethic it carries doesn't require religious agreement. Many cultures have a version of this idea. The lesson is the ethic, not a conversion. – Don't say "ancient Indians invented this and the West later borrowed it." That's bad history. Multiple cultures arrived at versions of this ethic independently. Indic thought put it in particularly elegant words.</a:t>
+              <a:t>After 5 min, each pair sticks their notes on the chart. The chart now has ~70–80 sticky notes, mostly non-human.</a:t>
+            </a:r>
+            <a:endParaRPr lang="en-US" sz="1200" dirty="0"/>
+          </a:p>
+          <a:p>
+            <a:pPr algn="l" marL="342900" indent="-342900">
+              <a:lnSpc>
+                <a:spcPts val="1620"/>
+              </a:lnSpc>
+              <a:spcAft>
+                <a:spcPts val="300"/>
+              </a:spcAft>
+              <a:buSzPct val="100000"/>
+              <a:buChar char="•"/>
+            </a:pPr>
+            <a:r>
+              <a:rPr lang="en-US" sz="1200" b="1" dirty="0">
+                <a:solidFill>
+                  <a:srgbClr val="1C2833"/>
+                </a:solidFill>
+                <a:latin typeface="Arial" pitchFamily="34" charset="0"/>
+                <a:ea typeface="Arial" pitchFamily="34" charset="-122"/>
+                <a:cs typeface="Arial" pitchFamily="34" charset="-120"/>
+              </a:rPr>
+              <a:t>Discussion (5 min):</a:t>
+            </a:r>
+            <a:pPr algn="l" indent="0" marL="0">
+              <a:lnSpc>
+                <a:spcPts val="1620"/>
+              </a:lnSpc>
+              <a:spcAft>
+                <a:spcPts val="300"/>
+              </a:spcAft>
+              <a:buNone/>
+            </a:pPr>
+            <a:r>
+              <a:rPr lang="en-US" sz="1200" dirty="0">
+                <a:solidFill>
+                  <a:srgbClr val="1C2833"/>
+                </a:solidFill>
+                <a:latin typeface="Arial" pitchFamily="34" charset="0"/>
+                <a:ea typeface="Arial" pitchFamily="34" charset="-122"/>
+                <a:cs typeface="Arial" pitchFamily="34" charset="-120"/>
+              </a:rPr>
+              <a:t> </a:t>
+            </a:r>
+            <a:pPr algn="l" indent="0" marL="0">
+              <a:lnSpc>
+                <a:spcPts val="1620"/>
+              </a:lnSpc>
+              <a:spcAft>
+                <a:spcPts val="300"/>
+              </a:spcAft>
+              <a:buNone/>
+            </a:pPr>
+            <a:r>
+              <a:rPr lang="en-US" sz="1200" i="1" dirty="0">
+                <a:solidFill>
+                  <a:srgbClr val="1C2833"/>
+                </a:solidFill>
+                <a:latin typeface="Arial" pitchFamily="34" charset="0"/>
+                <a:ea typeface="Arial" pitchFamily="34" charset="-122"/>
+                <a:cs typeface="Arial" pitchFamily="34" charset="-120"/>
+              </a:rPr>
+              <a:t>"Look at this chart. If treating these as 'family' is what the verse asks, what would change about how you behave?"</a:t>
+            </a:r>
+            <a:pPr algn="l" indent="0" marL="0">
+              <a:lnSpc>
+                <a:spcPts val="1620"/>
+              </a:lnSpc>
+              <a:spcAft>
+                <a:spcPts val="300"/>
+              </a:spcAft>
+              <a:buNone/>
+            </a:pPr>
+            <a:r>
+              <a:rPr lang="en-US" sz="1200" dirty="0">
+                <a:solidFill>
+                  <a:srgbClr val="1C2833"/>
+                </a:solidFill>
+                <a:latin typeface="Arial" pitchFamily="34" charset="0"/>
+                <a:ea typeface="Arial" pitchFamily="34" charset="-122"/>
+                <a:cs typeface="Arial" pitchFamily="34" charset="-120"/>
+              </a:rPr>
+              <a:t> (Sample answers: not littering, not killing things for no reason, knowing names, paying attention.)</a:t>
             </a:r>
             <a:endParaRPr lang="en-US" sz="1200" dirty="0"/>
           </a:p>
@@ -3407,7 +3702,7 @@
                 <a:ea typeface="Georgia" pitchFamily="34" charset="-122"/>
                 <a:cs typeface="Georgia" pitchFamily="34" charset="-120"/>
               </a:rPr>
-              <a:t>Citation(s) used in this lesson</a:t>
+              <a:t>Wrap-up (5 min)</a:t>
             </a:r>
             <a:endParaRPr lang="en-US" sz="1800" dirty="0"/>
           </a:p>
@@ -3422,7 +3717,7 @@
         <p:spPr>
           <a:xfrm>
             <a:off x="634901" y="883593"/>
-            <a:ext cx="8102798" cy="281880"/>
+            <a:ext cx="8102798" cy="731341"/>
           </a:xfrm>
           <a:prstGeom prst="rect">
             <a:avLst/>
@@ -3445,15 +3740,15 @@
               <a:buChar char="•"/>
             </a:pPr>
             <a:r>
-              <a:rPr lang="en-US" sz="1200" b="1" dirty="0">
-                <a:solidFill>
-                  <a:srgbClr val="1C2833"/>
-                </a:solidFill>
-                <a:latin typeface="Arial" pitchFamily="34" charset="0"/>
-                <a:ea typeface="Arial" pitchFamily="34" charset="-122"/>
-                <a:cs typeface="Arial" pitchFamily="34" charset="-120"/>
-              </a:rPr>
-              <a:t>Mahā Upaniṣad 6.71–73</a:t>
+              <a:rPr lang="en-US" sz="1200" dirty="0">
+                <a:solidFill>
+                  <a:srgbClr val="1C2833"/>
+                </a:solidFill>
+                <a:latin typeface="Arial" pitchFamily="34" charset="0"/>
+                <a:ea typeface="Arial" pitchFamily="34" charset="-122"/>
+                <a:cs typeface="Arial" pitchFamily="34" charset="-120"/>
+              </a:rPr>
+              <a:t>One-sentence exit ticket on a slip of paper: </a:t>
             </a:r>
             <a:pPr algn="l" indent="0" marL="0">
               <a:lnSpc>
@@ -3465,6 +3760,30 @@
               <a:buNone/>
             </a:pPr>
             <a:r>
+              <a:rPr lang="en-US" sz="1200" i="1" dirty="0">
+                <a:solidFill>
+                  <a:srgbClr val="1C2833"/>
+                </a:solidFill>
+                <a:latin typeface="Arial" pitchFamily="34" charset="0"/>
+                <a:ea typeface="Arial" pitchFamily="34" charset="-122"/>
+                <a:cs typeface="Arial" pitchFamily="34" charset="-120"/>
+              </a:rPr>
+              <a:t>"Write one non-human thing you now consider part of your extended family — and one specific behaviour that will change because of that."</a:t>
+            </a:r>
+            <a:endParaRPr lang="en-US" sz="1200" dirty="0"/>
+          </a:p>
+          <a:p>
+            <a:pPr algn="l" marL="342900" indent="-342900">
+              <a:lnSpc>
+                <a:spcPts val="1620"/>
+              </a:lnSpc>
+              <a:spcAft>
+                <a:spcPts val="300"/>
+              </a:spcAft>
+              <a:buSzPct val="100000"/>
+              <a:buChar char="•"/>
+            </a:pPr>
+            <a:r>
               <a:rPr lang="en-US" sz="1200" dirty="0">
                 <a:solidFill>
                   <a:srgbClr val="1C2833"/>
@@ -3473,47 +3792,7 @@
                 <a:ea typeface="Arial" pitchFamily="34" charset="-122"/>
                 <a:cs typeface="Arial" pitchFamily="34" charset="-120"/>
               </a:rPr>
-              <a:t> — </a:t>
-            </a:r>
-            <a:pPr algn="l" indent="0" marL="0">
-              <a:lnSpc>
-                <a:spcPts val="1620"/>
-              </a:lnSpc>
-              <a:spcAft>
-                <a:spcPts val="300"/>
-              </a:spcAft>
-              <a:buNone/>
-            </a:pPr>
-            <a:r>
-              <a:rPr lang="en-US" sz="1200" i="1" dirty="0">
-                <a:solidFill>
-                  <a:srgbClr val="1C2833"/>
-                </a:solidFill>
-                <a:latin typeface="Arial" pitchFamily="34" charset="0"/>
-                <a:ea typeface="Arial" pitchFamily="34" charset="-122"/>
-                <a:cs typeface="Arial" pitchFamily="34" charset="-120"/>
-              </a:rPr>
-              <a:t>vasudhaiva kuṭumbakam</a:t>
-            </a:r>
-            <a:pPr algn="l" indent="0" marL="0">
-              <a:lnSpc>
-                <a:spcPts val="1620"/>
-              </a:lnSpc>
-              <a:spcAft>
-                <a:spcPts val="300"/>
-              </a:spcAft>
-              <a:buNone/>
-            </a:pPr>
-            <a:r>
-              <a:rPr lang="en-US" sz="1200" dirty="0">
-                <a:solidFill>
-                  <a:srgbClr val="1C2833"/>
-                </a:solidFill>
-                <a:latin typeface="Arial" pitchFamily="34" charset="0"/>
-                <a:ea typeface="Arial" pitchFamily="34" charset="-122"/>
-                <a:cs typeface="Arial" pitchFamily="34" charset="-120"/>
-              </a:rPr>
-              <a:t> verse. Full Sanskrit text per the Adyar Library edition.</a:t>
+              <a:t>Collect the slips. Read 3–4 anonymously at the start of Day 2.</a:t>
             </a:r>
             <a:endParaRPr lang="en-US" sz="1200" dirty="0"/>
           </a:p>
@@ -3527,8 +3806,8 @@
         </p:nvSpPr>
         <p:spPr>
           <a:xfrm>
-            <a:off x="406301" y="1254323"/>
-            <a:ext cx="8498026" cy="222796"/>
+            <a:off x="406301" y="4434929"/>
+            <a:ext cx="8498026" cy="213271"/>
           </a:xfrm>
           <a:prstGeom prst="rect">
             <a:avLst/>
@@ -3561,8 +3840,643 @@
                 <a:ea typeface="Arial" pitchFamily="34" charset="-122"/>
                 <a:cs typeface="Arial" pitchFamily="34" charset="-120"/>
               </a:rPr>
-              <a:t>– See </a:t>
-            </a:r>
+              <a:t>Middle ·  · IKS Curriculum</a:t>
+            </a:r>
+            <a:endParaRPr lang="en-US" sz="1200" dirty="0"/>
+          </a:p>
+        </p:txBody>
+      </p:sp>
+    </p:spTree>
+  </p:cSld>
+  <p:clrMapOvr>
+    <a:masterClrMapping/>
+  </p:clrMapOvr>
+</p:sld>
+</file>
+
+<file path=ppt/slides/slide14.xml><?xml version="1.0" encoding="utf-8"?>
+<p:sld xmlns:a="http://schemas.openxmlformats.org/drawingml/2006/main" xmlns:r="http://schemas.openxmlformats.org/officeDocument/2006/relationships" xmlns:p="http://schemas.openxmlformats.org/presentationml/2006/main">
+  <p:cSld name="Slide 14">
+    <p:bg>
+      <p:bgPr>
+        <a:solidFill>
+          <a:srgbClr val="FFFFFF"/>
+        </a:solidFill>
+      </p:bgPr>
+    </p:bg>
+    <p:spTree>
+      <p:nvGrpSpPr>
+        <p:cNvPr id="1" name=""/>
+        <p:cNvGrpSpPr/>
+        <p:nvPr/>
+      </p:nvGrpSpPr>
+      <p:grpSpPr>
+        <a:xfrm>
+          <a:off x="0" y="0"/>
+          <a:ext cx="0" cy="0"/>
+          <a:chOff x="0" y="0"/>
+          <a:chExt cx="0" cy="0"/>
+        </a:xfrm>
+      </p:grpSpPr>
+      <p:sp>
+        <p:nvSpPr>
+          <p:cNvPr id="2" name="Text 0"/>
+          <p:cNvSpPr/>
+          <p:nvPr/>
+        </p:nvSpPr>
+        <p:spPr>
+          <a:xfrm>
+            <a:off x="0" y="0"/>
+            <a:ext cx="9144000" cy="101501"/>
+          </a:xfrm>
+          <a:prstGeom prst="rect">
+            <a:avLst/>
+          </a:prstGeom>
+          <a:solidFill>
+            <a:srgbClr val="277884"/>
+          </a:solidFill>
+          <a:ln/>
+        </p:spPr>
+        <p:txBody>
+          <a:bodyPr wrap="square" rtlCol="0" anchor="ctr"/>
+          <a:lstStyle/>
+          <a:p>
+            <a:pPr indent="0" marL="0">
+              <a:buNone/>
+            </a:pPr>
+            <a:endParaRPr lang="en-US" dirty="0"/>
+          </a:p>
+        </p:txBody>
+      </p:sp>
+      <p:sp>
+        <p:nvSpPr>
+          <p:cNvPr id="3" name="Text 1"/>
+          <p:cNvSpPr/>
+          <p:nvPr/>
+        </p:nvSpPr>
+        <p:spPr>
+          <a:xfrm>
+            <a:off x="406301" y="457051"/>
+            <a:ext cx="8498026" cy="274290"/>
+          </a:xfrm>
+          <a:prstGeom prst="rect">
+            <a:avLst/>
+          </a:prstGeom>
+          <a:noFill/>
+          <a:ln/>
+        </p:spPr>
+        <p:txBody>
+          <a:bodyPr wrap="square" lIns="0" tIns="0" rIns="0" bIns="0" rtlCol="0" anchor="t"/>
+          <a:lstStyle/>
+          <a:p>
+            <a:pPr algn="l" indent="0" marL="0">
+              <a:lnSpc>
+                <a:spcPts val="2160"/>
+              </a:lnSpc>
+              <a:spcBef>
+                <a:spcPts val="600"/>
+              </a:spcBef>
+              <a:spcAft>
+                <a:spcPts val="800"/>
+              </a:spcAft>
+              <a:buNone/>
+            </a:pPr>
+            <a:r>
+              <a:rPr lang="en-US" sz="1800" b="1" dirty="0">
+                <a:solidFill>
+                  <a:srgbClr val="FE4447"/>
+                </a:solidFill>
+                <a:latin typeface="Georgia" pitchFamily="34" charset="0"/>
+                <a:ea typeface="Georgia" pitchFamily="34" charset="-122"/>
+                <a:cs typeface="Georgia" pitchFamily="34" charset="-120"/>
+              </a:rPr>
+              <a:t>Student-facing content</a:t>
+            </a:r>
+            <a:endParaRPr lang="en-US" sz="1800" dirty="0"/>
+          </a:p>
+        </p:txBody>
+      </p:sp>
+      <p:sp>
+        <p:nvSpPr>
+          <p:cNvPr id="4" name="Text 2"/>
+          <p:cNvSpPr/>
+          <p:nvPr/>
+        </p:nvSpPr>
+        <p:spPr>
+          <a:xfrm>
+            <a:off x="406301" y="883593"/>
+            <a:ext cx="8331398" cy="2843213"/>
+          </a:xfrm>
+          <a:prstGeom prst="rect">
+            <a:avLst/>
+          </a:prstGeom>
+          <a:solidFill>
+            <a:srgbClr val="F4F8F9"/>
+          </a:solidFill>
+          <a:ln/>
+        </p:spPr>
+        <p:txBody>
+          <a:bodyPr wrap="square" rtlCol="0" anchor="ctr"/>
+          <a:lstStyle/>
+          <a:p>
+            <a:pPr indent="0" marL="0">
+              <a:buNone/>
+            </a:pPr>
+            <a:endParaRPr lang="en-US" dirty="0"/>
+          </a:p>
+        </p:txBody>
+      </p:sp>
+      <p:sp>
+        <p:nvSpPr>
+          <p:cNvPr id="5" name="Shape 3"/>
+          <p:cNvSpPr/>
+          <p:nvPr/>
+        </p:nvSpPr>
+        <p:spPr>
+          <a:xfrm>
+            <a:off x="434876" y="883593"/>
+            <a:ext cx="0" cy="2843213"/>
+          </a:xfrm>
+          <a:prstGeom prst="line">
+            <a:avLst/>
+          </a:prstGeom>
+          <a:noFill/>
+          <a:ln w="57150">
+            <a:solidFill>
+              <a:srgbClr val="FE4447"/>
+            </a:solidFill>
+            <a:prstDash val="solid"/>
+          </a:ln>
+        </p:spPr>
+      </p:sp>
+      <p:sp>
+        <p:nvSpPr>
+          <p:cNvPr id="6" name="Text 4"/>
+          <p:cNvSpPr/>
+          <p:nvPr/>
+        </p:nvSpPr>
+        <p:spPr>
+          <a:xfrm>
+            <a:off x="692051" y="1074093"/>
+            <a:ext cx="7973389" cy="230981"/>
+          </a:xfrm>
+          <a:prstGeom prst="rect">
+            <a:avLst/>
+          </a:prstGeom>
+          <a:noFill/>
+          <a:ln/>
+        </p:spPr>
+        <p:txBody>
+          <a:bodyPr wrap="square" lIns="0" tIns="0" rIns="0" bIns="0" rtlCol="0" anchor="t"/>
+          <a:lstStyle/>
+          <a:p>
+            <a:pPr algn="l" indent="0" marL="0">
+              <a:lnSpc>
+                <a:spcPts val="1820"/>
+              </a:lnSpc>
+              <a:spcBef>
+                <a:spcPts val="300"/>
+              </a:spcBef>
+              <a:spcAft>
+                <a:spcPts val="300"/>
+              </a:spcAft>
+              <a:buNone/>
+            </a:pPr>
+            <a:r>
+              <a:rPr lang="en-US" sz="1300" b="1" i="1" dirty="0">
+                <a:solidFill>
+                  <a:srgbClr val="1C2833"/>
+                </a:solidFill>
+                <a:latin typeface="Georgia" pitchFamily="34" charset="0"/>
+                <a:ea typeface="Georgia" pitchFamily="34" charset="-122"/>
+                <a:cs typeface="Georgia" pitchFamily="34" charset="-120"/>
+              </a:rPr>
+              <a:t>Vasudhaiva Kuṭumbakam</a:t>
+            </a:r>
+            <a:pPr algn="l" indent="0" marL="0">
+              <a:lnSpc>
+                <a:spcPts val="1820"/>
+              </a:lnSpc>
+              <a:spcBef>
+                <a:spcPts val="300"/>
+              </a:spcBef>
+              <a:spcAft>
+                <a:spcPts val="300"/>
+              </a:spcAft>
+              <a:buNone/>
+            </a:pPr>
+            <a:r>
+              <a:rPr lang="en-US" sz="1300" dirty="0">
+                <a:solidFill>
+                  <a:srgbClr val="1C2833"/>
+                </a:solidFill>
+                <a:latin typeface="Georgia" pitchFamily="34" charset="0"/>
+                <a:ea typeface="Georgia" pitchFamily="34" charset="-122"/>
+                <a:cs typeface="Georgia" pitchFamily="34" charset="-120"/>
+              </a:rPr>
+              <a:t> — "the Earth itself is one family."</a:t>
+            </a:r>
+            <a:endParaRPr lang="en-US" sz="1300" dirty="0"/>
+          </a:p>
+        </p:txBody>
+      </p:sp>
+      <p:sp>
+        <p:nvSpPr>
+          <p:cNvPr id="7" name="Text 5"/>
+          <p:cNvSpPr/>
+          <p:nvPr/>
+        </p:nvSpPr>
+        <p:spPr>
+          <a:xfrm>
+            <a:off x="692051" y="1343174"/>
+            <a:ext cx="7973389" cy="692944"/>
+          </a:xfrm>
+          <a:prstGeom prst="rect">
+            <a:avLst/>
+          </a:prstGeom>
+          <a:noFill/>
+          <a:ln/>
+        </p:spPr>
+        <p:txBody>
+          <a:bodyPr wrap="square" lIns="0" tIns="0" rIns="0" bIns="0" rtlCol="0" anchor="t"/>
+          <a:lstStyle/>
+          <a:p>
+            <a:pPr algn="l" indent="0" marL="0">
+              <a:lnSpc>
+                <a:spcPts val="1820"/>
+              </a:lnSpc>
+              <a:spcBef>
+                <a:spcPts val="300"/>
+              </a:spcBef>
+              <a:spcAft>
+                <a:spcPts val="300"/>
+              </a:spcAft>
+              <a:buNone/>
+            </a:pPr>
+            <a:r>
+              <a:rPr lang="en-US" sz="1300" dirty="0">
+                <a:solidFill>
+                  <a:srgbClr val="1C2833"/>
+                </a:solidFill>
+                <a:latin typeface="Georgia" pitchFamily="34" charset="0"/>
+                <a:ea typeface="Georgia" pitchFamily="34" charset="-122"/>
+                <a:cs typeface="Georgia" pitchFamily="34" charset="-120"/>
+              </a:rPr>
+              <a:t>A line from the </a:t>
+            </a:r>
+            <a:pPr algn="l" indent="0" marL="0">
+              <a:lnSpc>
+                <a:spcPts val="1820"/>
+              </a:lnSpc>
+              <a:spcBef>
+                <a:spcPts val="300"/>
+              </a:spcBef>
+              <a:spcAft>
+                <a:spcPts val="300"/>
+              </a:spcAft>
+              <a:buNone/>
+            </a:pPr>
+            <a:r>
+              <a:rPr lang="en-US" sz="1300" i="1" dirty="0">
+                <a:solidFill>
+                  <a:srgbClr val="1C2833"/>
+                </a:solidFill>
+                <a:latin typeface="Georgia" pitchFamily="34" charset="0"/>
+                <a:ea typeface="Georgia" pitchFamily="34" charset="-122"/>
+                <a:cs typeface="Georgia" pitchFamily="34" charset="-120"/>
+              </a:rPr>
+              <a:t>Mahā Upaniṣad</a:t>
+            </a:r>
+            <a:pPr algn="l" indent="0" marL="0">
+              <a:lnSpc>
+                <a:spcPts val="1820"/>
+              </a:lnSpc>
+              <a:spcBef>
+                <a:spcPts val="300"/>
+              </a:spcBef>
+              <a:spcAft>
+                <a:spcPts val="300"/>
+              </a:spcAft>
+              <a:buNone/>
+            </a:pPr>
+            <a:r>
+              <a:rPr lang="en-US" sz="1300" dirty="0">
+                <a:solidFill>
+                  <a:srgbClr val="1C2833"/>
+                </a:solidFill>
+                <a:latin typeface="Georgia" pitchFamily="34" charset="0"/>
+                <a:ea typeface="Georgia" pitchFamily="34" charset="-122"/>
+                <a:cs typeface="Georgia" pitchFamily="34" charset="-120"/>
+              </a:rPr>
+              <a:t> (chapter 6, verses 71–73). It is also quoted in the </a:t>
+            </a:r>
+            <a:pPr algn="l" indent="0" marL="0">
+              <a:lnSpc>
+                <a:spcPts val="1820"/>
+              </a:lnSpc>
+              <a:spcBef>
+                <a:spcPts val="300"/>
+              </a:spcBef>
+              <a:spcAft>
+                <a:spcPts val="300"/>
+              </a:spcAft>
+              <a:buNone/>
+            </a:pPr>
+            <a:r>
+              <a:rPr lang="en-US" sz="1300" i="1" dirty="0">
+                <a:solidFill>
+                  <a:srgbClr val="1C2833"/>
+                </a:solidFill>
+                <a:latin typeface="Georgia" pitchFamily="34" charset="0"/>
+                <a:ea typeface="Georgia" pitchFamily="34" charset="-122"/>
+                <a:cs typeface="Georgia" pitchFamily="34" charset="-120"/>
+              </a:rPr>
+              <a:t>Pañcatantra</a:t>
+            </a:r>
+            <a:pPr algn="l" indent="0" marL="0">
+              <a:lnSpc>
+                <a:spcPts val="1820"/>
+              </a:lnSpc>
+              <a:spcBef>
+                <a:spcPts val="300"/>
+              </a:spcBef>
+              <a:spcAft>
+                <a:spcPts val="300"/>
+              </a:spcAft>
+              <a:buNone/>
+            </a:pPr>
+            <a:r>
+              <a:rPr lang="en-US" sz="1300" dirty="0">
+                <a:solidFill>
+                  <a:srgbClr val="1C2833"/>
+                </a:solidFill>
+                <a:latin typeface="Georgia" pitchFamily="34" charset="0"/>
+                <a:ea typeface="Georgia" pitchFamily="34" charset="-122"/>
+                <a:cs typeface="Georgia" pitchFamily="34" charset="-120"/>
+              </a:rPr>
+              <a:t> and the </a:t>
+            </a:r>
+            <a:pPr algn="l" indent="0" marL="0">
+              <a:lnSpc>
+                <a:spcPts val="1820"/>
+              </a:lnSpc>
+              <a:spcBef>
+                <a:spcPts val="300"/>
+              </a:spcBef>
+              <a:spcAft>
+                <a:spcPts val="300"/>
+              </a:spcAft>
+              <a:buNone/>
+            </a:pPr>
+            <a:r>
+              <a:rPr lang="en-US" sz="1300" i="1" dirty="0">
+                <a:solidFill>
+                  <a:srgbClr val="1C2833"/>
+                </a:solidFill>
+                <a:latin typeface="Georgia" pitchFamily="34" charset="0"/>
+                <a:ea typeface="Georgia" pitchFamily="34" charset="-122"/>
+                <a:cs typeface="Georgia" pitchFamily="34" charset="-120"/>
+              </a:rPr>
+              <a:t>Hitopadeśa</a:t>
+            </a:r>
+            <a:pPr algn="l" indent="0" marL="0">
+              <a:lnSpc>
+                <a:spcPts val="1820"/>
+              </a:lnSpc>
+              <a:spcBef>
+                <a:spcPts val="300"/>
+              </a:spcBef>
+              <a:spcAft>
+                <a:spcPts val="300"/>
+              </a:spcAft>
+              <a:buNone/>
+            </a:pPr>
+            <a:r>
+              <a:rPr lang="en-US" sz="1300" dirty="0">
+                <a:solidFill>
+                  <a:srgbClr val="1C2833"/>
+                </a:solidFill>
+                <a:latin typeface="Georgia" pitchFamily="34" charset="0"/>
+                <a:ea typeface="Georgia" pitchFamily="34" charset="-122"/>
+                <a:cs typeface="Georgia" pitchFamily="34" charset="-120"/>
+              </a:rPr>
+              <a:t>. It became the motto of India's Parliament hall and the theme of the country's G20 presidency in 2023.</a:t>
+            </a:r>
+            <a:endParaRPr lang="en-US" sz="1300" dirty="0"/>
+          </a:p>
+        </p:txBody>
+      </p:sp>
+      <p:sp>
+        <p:nvSpPr>
+          <p:cNvPr id="8" name="Text 6"/>
+          <p:cNvSpPr/>
+          <p:nvPr/>
+        </p:nvSpPr>
+        <p:spPr>
+          <a:xfrm>
+            <a:off x="692051" y="2074218"/>
+            <a:ext cx="7973389" cy="230981"/>
+          </a:xfrm>
+          <a:prstGeom prst="rect">
+            <a:avLst/>
+          </a:prstGeom>
+          <a:noFill/>
+          <a:ln/>
+        </p:spPr>
+        <p:txBody>
+          <a:bodyPr wrap="square" lIns="0" tIns="0" rIns="0" bIns="0" rtlCol="0" anchor="t"/>
+          <a:lstStyle/>
+          <a:p>
+            <a:pPr algn="l" indent="0" marL="0">
+              <a:lnSpc>
+                <a:spcPts val="1820"/>
+              </a:lnSpc>
+              <a:spcBef>
+                <a:spcPts val="300"/>
+              </a:spcBef>
+              <a:spcAft>
+                <a:spcPts val="300"/>
+              </a:spcAft>
+              <a:buNone/>
+            </a:pPr>
+            <a:r>
+              <a:rPr lang="en-US" sz="1300" i="1" dirty="0">
+                <a:solidFill>
+                  <a:srgbClr val="1C2833"/>
+                </a:solidFill>
+                <a:latin typeface="Georgia" pitchFamily="34" charset="0"/>
+                <a:ea typeface="Georgia" pitchFamily="34" charset="-122"/>
+                <a:cs typeface="Georgia" pitchFamily="34" charset="-120"/>
+              </a:rPr>
+              <a:t>The full half-verse:</a:t>
+            </a:r>
+            <a:endParaRPr lang="en-US" sz="1300" dirty="0"/>
+          </a:p>
+        </p:txBody>
+      </p:sp>
+      <p:sp>
+        <p:nvSpPr>
+          <p:cNvPr id="9" name="Text 7"/>
+          <p:cNvSpPr/>
+          <p:nvPr/>
+        </p:nvSpPr>
+        <p:spPr>
+          <a:xfrm>
+            <a:off x="692051" y="2343299"/>
+            <a:ext cx="7973389" cy="461963"/>
+          </a:xfrm>
+          <a:prstGeom prst="rect">
+            <a:avLst/>
+          </a:prstGeom>
+          <a:noFill/>
+          <a:ln/>
+        </p:spPr>
+        <p:txBody>
+          <a:bodyPr wrap="square" lIns="0" tIns="0" rIns="0" bIns="0" rtlCol="0" anchor="t"/>
+          <a:lstStyle/>
+          <a:p>
+            <a:pPr algn="l" indent="0" marL="0">
+              <a:lnSpc>
+                <a:spcPts val="1820"/>
+              </a:lnSpc>
+              <a:spcBef>
+                <a:spcPts val="300"/>
+              </a:spcBef>
+              <a:spcAft>
+                <a:spcPts val="300"/>
+              </a:spcAft>
+              <a:buNone/>
+            </a:pPr>
+            <a:r>
+              <a:rPr lang="en-US" sz="1300" i="1" dirty="0">
+                <a:solidFill>
+                  <a:srgbClr val="1C2833"/>
+                </a:solidFill>
+                <a:latin typeface="Georgia" pitchFamily="34" charset="0"/>
+                <a:ea typeface="Georgia" pitchFamily="34" charset="-122"/>
+                <a:cs typeface="Georgia" pitchFamily="34" charset="-120"/>
+              </a:rPr>
+              <a:t>&gt; "This is mine, that is theirs — such reckoning is for the small-minded. &gt; For those whose conduct is large, the whole earth is one family."</a:t>
+            </a:r>
+            <a:endParaRPr lang="en-US" sz="1300" dirty="0"/>
+          </a:p>
+        </p:txBody>
+      </p:sp>
+      <p:sp>
+        <p:nvSpPr>
+          <p:cNvPr id="10" name="Text 8"/>
+          <p:cNvSpPr/>
+          <p:nvPr/>
+        </p:nvSpPr>
+        <p:spPr>
+          <a:xfrm>
+            <a:off x="692051" y="2843361"/>
+            <a:ext cx="7973389" cy="692944"/>
+          </a:xfrm>
+          <a:prstGeom prst="rect">
+            <a:avLst/>
+          </a:prstGeom>
+          <a:noFill/>
+          <a:ln/>
+        </p:spPr>
+        <p:txBody>
+          <a:bodyPr wrap="square" lIns="0" tIns="0" rIns="0" bIns="0" rtlCol="0" anchor="t"/>
+          <a:lstStyle/>
+          <a:p>
+            <a:pPr algn="l" indent="0" marL="0">
+              <a:lnSpc>
+                <a:spcPts val="1820"/>
+              </a:lnSpc>
+              <a:spcBef>
+                <a:spcPts val="300"/>
+              </a:spcBef>
+              <a:spcAft>
+                <a:spcPts val="300"/>
+              </a:spcAft>
+              <a:buNone/>
+            </a:pPr>
+            <a:r>
+              <a:rPr lang="en-US" sz="1300" dirty="0">
+                <a:solidFill>
+                  <a:srgbClr val="1C2833"/>
+                </a:solidFill>
+                <a:latin typeface="Georgia" pitchFamily="34" charset="0"/>
+                <a:ea typeface="Georgia" pitchFamily="34" charset="-122"/>
+                <a:cs typeface="Georgia" pitchFamily="34" charset="-120"/>
+              </a:rPr>
+              <a:t>The verse is an </a:t>
+            </a:r>
+            <a:pPr algn="l" indent="0" marL="0">
+              <a:lnSpc>
+                <a:spcPts val="1820"/>
+              </a:lnSpc>
+              <a:spcBef>
+                <a:spcPts val="300"/>
+              </a:spcBef>
+              <a:spcAft>
+                <a:spcPts val="300"/>
+              </a:spcAft>
+              <a:buNone/>
+            </a:pPr>
+            <a:r>
+              <a:rPr lang="en-US" sz="1300" b="1" i="1" dirty="0">
+                <a:solidFill>
+                  <a:srgbClr val="1C2833"/>
+                </a:solidFill>
+                <a:latin typeface="Georgia" pitchFamily="34" charset="0"/>
+                <a:ea typeface="Georgia" pitchFamily="34" charset="-122"/>
+                <a:cs typeface="Georgia" pitchFamily="34" charset="-120"/>
+              </a:rPr>
+              <a:t>ethic</a:t>
+            </a:r>
+            <a:pPr algn="l" indent="0" marL="0">
+              <a:lnSpc>
+                <a:spcPts val="1820"/>
+              </a:lnSpc>
+              <a:spcBef>
+                <a:spcPts val="300"/>
+              </a:spcBef>
+              <a:spcAft>
+                <a:spcPts val="300"/>
+              </a:spcAft>
+              <a:buNone/>
+            </a:pPr>
+            <a:r>
+              <a:rPr lang="en-US" sz="1300" dirty="0">
+                <a:solidFill>
+                  <a:srgbClr val="1C2833"/>
+                </a:solidFill>
+                <a:latin typeface="Georgia" pitchFamily="34" charset="0"/>
+                <a:ea typeface="Georgia" pitchFamily="34" charset="-122"/>
+                <a:cs typeface="Georgia" pitchFamily="34" charset="-120"/>
+              </a:rPr>
+              <a:t>, not a biological claim. It tells you what to do, not what is. The next nine days are about what an ecological ethic of "family" actually looks like in practice — in your river, in your trees, in your habits.</a:t>
+            </a:r>
+            <a:endParaRPr lang="en-US" sz="1300" dirty="0"/>
+          </a:p>
+        </p:txBody>
+      </p:sp>
+      <p:sp>
+        <p:nvSpPr>
+          <p:cNvPr id="11" name="Text 9"/>
+          <p:cNvSpPr/>
+          <p:nvPr/>
+        </p:nvSpPr>
+        <p:spPr>
+          <a:xfrm>
+            <a:off x="406301" y="4434929"/>
+            <a:ext cx="8498026" cy="213271"/>
+          </a:xfrm>
+          <a:prstGeom prst="rect">
+            <a:avLst/>
+          </a:prstGeom>
+          <a:noFill/>
+          <a:ln/>
+        </p:spPr>
+        <p:txBody>
+          <a:bodyPr wrap="square" lIns="0" tIns="0" rIns="0" bIns="0" rtlCol="0" anchor="t"/>
+          <a:lstStyle/>
+          <a:p>
             <a:pPr algn="l" indent="0" marL="0">
               <a:lnSpc>
                 <a:spcPts val="1680"/>
@@ -3584,15 +4498,1236 @@
                 <a:ea typeface="Arial" pitchFamily="34" charset="-122"/>
                 <a:cs typeface="Arial" pitchFamily="34" charset="-120"/>
               </a:rPr>
+              <a:t>Middle ·  · IKS Curriculum</a:t>
+            </a:r>
+            <a:endParaRPr lang="en-US" sz="1200" dirty="0"/>
+          </a:p>
+        </p:txBody>
+      </p:sp>
+    </p:spTree>
+  </p:cSld>
+  <p:clrMapOvr>
+    <a:masterClrMapping/>
+  </p:clrMapOvr>
+</p:sld>
+</file>
+
+<file path=ppt/slides/slide15.xml><?xml version="1.0" encoding="utf-8"?>
+<p:sld xmlns:a="http://schemas.openxmlformats.org/drawingml/2006/main" xmlns:r="http://schemas.openxmlformats.org/officeDocument/2006/relationships" xmlns:p="http://schemas.openxmlformats.org/presentationml/2006/main">
+  <p:cSld name="Slide 15">
+    <p:bg>
+      <p:bgPr>
+        <a:solidFill>
+          <a:srgbClr val="FFFFFF"/>
+        </a:solidFill>
+      </p:bgPr>
+    </p:bg>
+    <p:spTree>
+      <p:nvGrpSpPr>
+        <p:cNvPr id="1" name=""/>
+        <p:cNvGrpSpPr/>
+        <p:nvPr/>
+      </p:nvGrpSpPr>
+      <p:grpSpPr>
+        <a:xfrm>
+          <a:off x="0" y="0"/>
+          <a:ext cx="0" cy="0"/>
+          <a:chOff x="0" y="0"/>
+          <a:chExt cx="0" cy="0"/>
+        </a:xfrm>
+      </p:grpSpPr>
+      <p:sp>
+        <p:nvSpPr>
+          <p:cNvPr id="2" name="Text 0"/>
+          <p:cNvSpPr/>
+          <p:nvPr/>
+        </p:nvSpPr>
+        <p:spPr>
+          <a:xfrm>
+            <a:off x="0" y="0"/>
+            <a:ext cx="9144000" cy="101501"/>
+          </a:xfrm>
+          <a:prstGeom prst="rect">
+            <a:avLst/>
+          </a:prstGeom>
+          <a:solidFill>
+            <a:srgbClr val="277884"/>
+          </a:solidFill>
+          <a:ln/>
+        </p:spPr>
+        <p:txBody>
+          <a:bodyPr wrap="square" rtlCol="0" anchor="ctr"/>
+          <a:lstStyle/>
+          <a:p>
+            <a:pPr indent="0" marL="0">
+              <a:buNone/>
+            </a:pPr>
+            <a:endParaRPr lang="en-US" dirty="0"/>
+          </a:p>
+        </p:txBody>
+      </p:sp>
+      <p:sp>
+        <p:nvSpPr>
+          <p:cNvPr id="3" name="Text 1"/>
+          <p:cNvSpPr/>
+          <p:nvPr/>
+        </p:nvSpPr>
+        <p:spPr>
+          <a:xfrm>
+            <a:off x="406301" y="457051"/>
+            <a:ext cx="8498026" cy="274290"/>
+          </a:xfrm>
+          <a:prstGeom prst="rect">
+            <a:avLst/>
+          </a:prstGeom>
+          <a:noFill/>
+          <a:ln/>
+        </p:spPr>
+        <p:txBody>
+          <a:bodyPr wrap="square" lIns="0" tIns="0" rIns="0" bIns="0" rtlCol="0" anchor="t"/>
+          <a:lstStyle/>
+          <a:p>
+            <a:pPr algn="l" indent="0" marL="0">
+              <a:lnSpc>
+                <a:spcPts val="2160"/>
+              </a:lnSpc>
+              <a:spcBef>
+                <a:spcPts val="600"/>
+              </a:spcBef>
+              <a:spcAft>
+                <a:spcPts val="800"/>
+              </a:spcAft>
+              <a:buNone/>
+            </a:pPr>
+            <a:r>
+              <a:rPr lang="en-US" sz="1800" b="1" dirty="0">
+                <a:solidFill>
+                  <a:srgbClr val="FE4447"/>
+                </a:solidFill>
+                <a:latin typeface="Georgia" pitchFamily="34" charset="0"/>
+                <a:ea typeface="Georgia" pitchFamily="34" charset="-122"/>
+                <a:cs typeface="Georgia" pitchFamily="34" charset="-120"/>
+              </a:rPr>
+              <a:t>Homework</a:t>
+            </a:r>
+            <a:endParaRPr lang="en-US" sz="1800" dirty="0"/>
+          </a:p>
+        </p:txBody>
+      </p:sp>
+      <p:sp>
+        <p:nvSpPr>
+          <p:cNvPr id="4" name="Text 2"/>
+          <p:cNvSpPr/>
+          <p:nvPr/>
+        </p:nvSpPr>
+        <p:spPr>
+          <a:xfrm>
+            <a:off x="634901" y="883593"/>
+            <a:ext cx="8102798" cy="487561"/>
+          </a:xfrm>
+          <a:prstGeom prst="rect">
+            <a:avLst/>
+          </a:prstGeom>
+          <a:noFill/>
+          <a:ln/>
+        </p:spPr>
+        <p:txBody>
+          <a:bodyPr wrap="square" lIns="0" tIns="0" rIns="0" bIns="0" rtlCol="0" anchor="t"/>
+          <a:lstStyle/>
+          <a:p>
+            <a:pPr algn="l" marL="342900" indent="-342900">
+              <a:lnSpc>
+                <a:spcPts val="1620"/>
+              </a:lnSpc>
+              <a:spcAft>
+                <a:spcPts val="300"/>
+              </a:spcAft>
+              <a:buSzPct val="100000"/>
+              <a:buChar char="•"/>
+            </a:pPr>
+            <a:r>
+              <a:rPr lang="en-US" sz="1200" dirty="0">
+                <a:solidFill>
+                  <a:srgbClr val="1C2833"/>
+                </a:solidFill>
+                <a:latin typeface="Arial" pitchFamily="34" charset="0"/>
+                <a:ea typeface="Arial" pitchFamily="34" charset="-122"/>
+                <a:cs typeface="Arial" pitchFamily="34" charset="-120"/>
+              </a:rPr>
+              <a:t>Add three more sticky-note items to your "extended family" list at home. They must be things you have </a:t>
+            </a:r>
+            <a:pPr algn="l" indent="0" marL="0">
+              <a:lnSpc>
+                <a:spcPts val="1620"/>
+              </a:lnSpc>
+              <a:spcAft>
+                <a:spcPts val="300"/>
+              </a:spcAft>
+              <a:buNone/>
+            </a:pPr>
+            <a:r>
+              <a:rPr lang="en-US" sz="1200" i="1" dirty="0">
+                <a:solidFill>
+                  <a:srgbClr val="1C2833"/>
+                </a:solidFill>
+                <a:latin typeface="Arial" pitchFamily="34" charset="0"/>
+                <a:ea typeface="Arial" pitchFamily="34" charset="-122"/>
+                <a:cs typeface="Arial" pitchFamily="34" charset="-120"/>
+              </a:rPr>
+              <a:t>personally</a:t>
+            </a:r>
+            <a:pPr algn="l" indent="0" marL="0">
+              <a:lnSpc>
+                <a:spcPts val="1620"/>
+              </a:lnSpc>
+              <a:spcAft>
+                <a:spcPts val="300"/>
+              </a:spcAft>
+              <a:buNone/>
+            </a:pPr>
+            <a:r>
+              <a:rPr lang="en-US" sz="1200" dirty="0">
+                <a:solidFill>
+                  <a:srgbClr val="1C2833"/>
+                </a:solidFill>
+                <a:latin typeface="Arial" pitchFamily="34" charset="0"/>
+                <a:ea typeface="Arial" pitchFamily="34" charset="-122"/>
+                <a:cs typeface="Arial" pitchFamily="34" charset="-120"/>
+              </a:rPr>
+              <a:t> encountered today. Bring the list tomorrow.</a:t>
+            </a:r>
+            <a:endParaRPr lang="en-US" sz="1200" dirty="0"/>
+          </a:p>
+        </p:txBody>
+      </p:sp>
+      <p:sp>
+        <p:nvSpPr>
+          <p:cNvPr id="5" name="Text 3"/>
+          <p:cNvSpPr/>
+          <p:nvPr/>
+        </p:nvSpPr>
+        <p:spPr>
+          <a:xfrm>
+            <a:off x="406301" y="4434929"/>
+            <a:ext cx="8498026" cy="213271"/>
+          </a:xfrm>
+          <a:prstGeom prst="rect">
+            <a:avLst/>
+          </a:prstGeom>
+          <a:noFill/>
+          <a:ln/>
+        </p:spPr>
+        <p:txBody>
+          <a:bodyPr wrap="square" lIns="0" tIns="0" rIns="0" bIns="0" rtlCol="0" anchor="t"/>
+          <a:lstStyle/>
+          <a:p>
+            <a:pPr algn="l" indent="0" marL="0">
+              <a:lnSpc>
+                <a:spcPts val="1680"/>
+              </a:lnSpc>
+              <a:spcBef>
+                <a:spcPts val="300"/>
+              </a:spcBef>
+              <a:spcAft>
+                <a:spcPts val="300"/>
+              </a:spcAft>
+              <a:buNone/>
+            </a:pPr>
+            <a:r>
+              <a:rPr lang="en-US" sz="1200" dirty="0">
+                <a:solidFill>
+                  <a:srgbClr val="1C2833"/>
+                </a:solidFill>
+                <a:latin typeface="Arial" pitchFamily="34" charset="0"/>
+                <a:ea typeface="Arial" pitchFamily="34" charset="-122"/>
+                <a:cs typeface="Arial" pitchFamily="34" charset="-120"/>
+              </a:rPr>
+              <a:t>Middle ·  · IKS Curriculum</a:t>
+            </a:r>
+            <a:endParaRPr lang="en-US" sz="1200" dirty="0"/>
+          </a:p>
+        </p:txBody>
+      </p:sp>
+    </p:spTree>
+  </p:cSld>
+  <p:clrMapOvr>
+    <a:masterClrMapping/>
+  </p:clrMapOvr>
+</p:sld>
+</file>
+
+<file path=ppt/slides/slide16.xml><?xml version="1.0" encoding="utf-8"?>
+<p:sld xmlns:a="http://schemas.openxmlformats.org/drawingml/2006/main" xmlns:r="http://schemas.openxmlformats.org/officeDocument/2006/relationships" xmlns:p="http://schemas.openxmlformats.org/presentationml/2006/main">
+  <p:cSld name="Slide 16">
+    <p:bg>
+      <p:bgPr>
+        <a:solidFill>
+          <a:srgbClr val="FFFFFF"/>
+        </a:solidFill>
+      </p:bgPr>
+    </p:bg>
+    <p:spTree>
+      <p:nvGrpSpPr>
+        <p:cNvPr id="1" name=""/>
+        <p:cNvGrpSpPr/>
+        <p:nvPr/>
+      </p:nvGrpSpPr>
+      <p:grpSpPr>
+        <a:xfrm>
+          <a:off x="0" y="0"/>
+          <a:ext cx="0" cy="0"/>
+          <a:chOff x="0" y="0"/>
+          <a:chExt cx="0" cy="0"/>
+        </a:xfrm>
+      </p:grpSpPr>
+      <p:sp>
+        <p:nvSpPr>
+          <p:cNvPr id="2" name="Text 0"/>
+          <p:cNvSpPr/>
+          <p:nvPr/>
+        </p:nvSpPr>
+        <p:spPr>
+          <a:xfrm>
+            <a:off x="0" y="0"/>
+            <a:ext cx="9144000" cy="101501"/>
+          </a:xfrm>
+          <a:prstGeom prst="rect">
+            <a:avLst/>
+          </a:prstGeom>
+          <a:solidFill>
+            <a:srgbClr val="277884"/>
+          </a:solidFill>
+          <a:ln/>
+        </p:spPr>
+        <p:txBody>
+          <a:bodyPr wrap="square" rtlCol="0" anchor="ctr"/>
+          <a:lstStyle/>
+          <a:p>
+            <a:pPr indent="0" marL="0">
+              <a:buNone/>
+            </a:pPr>
+            <a:endParaRPr lang="en-US" dirty="0"/>
+          </a:p>
+        </p:txBody>
+      </p:sp>
+      <p:sp>
+        <p:nvSpPr>
+          <p:cNvPr id="3" name="Text 1"/>
+          <p:cNvSpPr/>
+          <p:nvPr/>
+        </p:nvSpPr>
+        <p:spPr>
+          <a:xfrm>
+            <a:off x="406301" y="457051"/>
+            <a:ext cx="8498026" cy="274290"/>
+          </a:xfrm>
+          <a:prstGeom prst="rect">
+            <a:avLst/>
+          </a:prstGeom>
+          <a:noFill/>
+          <a:ln/>
+        </p:spPr>
+        <p:txBody>
+          <a:bodyPr wrap="square" lIns="0" tIns="0" rIns="0" bIns="0" rtlCol="0" anchor="t"/>
+          <a:lstStyle/>
+          <a:p>
+            <a:pPr algn="l" indent="0" marL="0">
+              <a:lnSpc>
+                <a:spcPts val="2160"/>
+              </a:lnSpc>
+              <a:spcBef>
+                <a:spcPts val="600"/>
+              </a:spcBef>
+              <a:spcAft>
+                <a:spcPts val="800"/>
+              </a:spcAft>
+              <a:buNone/>
+            </a:pPr>
+            <a:r>
+              <a:rPr lang="en-US" sz="1800" b="1" dirty="0">
+                <a:solidFill>
+                  <a:srgbClr val="FE4447"/>
+                </a:solidFill>
+                <a:latin typeface="Georgia" pitchFamily="34" charset="0"/>
+                <a:ea typeface="Georgia" pitchFamily="34" charset="-122"/>
+                <a:cs typeface="Georgia" pitchFamily="34" charset="-120"/>
+              </a:rPr>
+              <a:t>Differentiation</a:t>
+            </a:r>
+            <a:endParaRPr lang="en-US" sz="1800" dirty="0"/>
+          </a:p>
+        </p:txBody>
+      </p:sp>
+      <p:sp>
+        <p:nvSpPr>
+          <p:cNvPr id="4" name="Text 2"/>
+          <p:cNvSpPr/>
+          <p:nvPr/>
+        </p:nvSpPr>
+        <p:spPr>
+          <a:xfrm>
+            <a:off x="634901" y="883593"/>
+            <a:ext cx="8102798" cy="937022"/>
+          </a:xfrm>
+          <a:prstGeom prst="rect">
+            <a:avLst/>
+          </a:prstGeom>
+          <a:noFill/>
+          <a:ln/>
+        </p:spPr>
+        <p:txBody>
+          <a:bodyPr wrap="square" lIns="0" tIns="0" rIns="0" bIns="0" rtlCol="0" anchor="t"/>
+          <a:lstStyle/>
+          <a:p>
+            <a:pPr algn="l" marL="342900" indent="-342900">
+              <a:lnSpc>
+                <a:spcPts val="1620"/>
+              </a:lnSpc>
+              <a:spcAft>
+                <a:spcPts val="300"/>
+              </a:spcAft>
+              <a:buSzPct val="100000"/>
+              <a:buChar char="•"/>
+            </a:pPr>
+            <a:r>
+              <a:rPr lang="en-US" sz="1200" b="1" dirty="0">
+                <a:solidFill>
+                  <a:srgbClr val="1C2833"/>
+                </a:solidFill>
+                <a:latin typeface="Arial" pitchFamily="34" charset="0"/>
+                <a:ea typeface="Arial" pitchFamily="34" charset="-122"/>
+                <a:cs typeface="Arial" pitchFamily="34" charset="-120"/>
+              </a:rPr>
+              <a:t>One tier up:</a:t>
+            </a:r>
+            <a:pPr algn="l" indent="0" marL="0">
+              <a:lnSpc>
+                <a:spcPts val="1620"/>
+              </a:lnSpc>
+              <a:spcAft>
+                <a:spcPts val="300"/>
+              </a:spcAft>
+              <a:buNone/>
+            </a:pPr>
+            <a:r>
+              <a:rPr lang="en-US" sz="1200" dirty="0">
+                <a:solidFill>
+                  <a:srgbClr val="1C2833"/>
+                </a:solidFill>
+                <a:latin typeface="Arial" pitchFamily="34" charset="0"/>
+                <a:ea typeface="Arial" pitchFamily="34" charset="-122"/>
+                <a:cs typeface="Arial" pitchFamily="34" charset="-120"/>
+              </a:rPr>
+              <a:t> Compare </a:t>
+            </a:r>
+            <a:pPr algn="l" indent="0" marL="0">
+              <a:lnSpc>
+                <a:spcPts val="1620"/>
+              </a:lnSpc>
+              <a:spcAft>
+                <a:spcPts val="300"/>
+              </a:spcAft>
+              <a:buNone/>
+            </a:pPr>
+            <a:r>
+              <a:rPr lang="en-US" sz="1200" i="1" dirty="0">
+                <a:solidFill>
+                  <a:srgbClr val="1C2833"/>
+                </a:solidFill>
+                <a:latin typeface="Arial" pitchFamily="34" charset="0"/>
+                <a:ea typeface="Arial" pitchFamily="34" charset="-122"/>
+                <a:cs typeface="Arial" pitchFamily="34" charset="-120"/>
+              </a:rPr>
+              <a:t>vasudhaiva kuṭumbakam</a:t>
+            </a:r>
+            <a:pPr algn="l" indent="0" marL="0">
+              <a:lnSpc>
+                <a:spcPts val="1620"/>
+              </a:lnSpc>
+              <a:spcAft>
+                <a:spcPts val="300"/>
+              </a:spcAft>
+              <a:buNone/>
+            </a:pPr>
+            <a:r>
+              <a:rPr lang="en-US" sz="1200" dirty="0">
+                <a:solidFill>
+                  <a:srgbClr val="1C2833"/>
+                </a:solidFill>
+                <a:latin typeface="Arial" pitchFamily="34" charset="0"/>
+                <a:ea typeface="Arial" pitchFamily="34" charset="-122"/>
+                <a:cs typeface="Arial" pitchFamily="34" charset="-120"/>
+              </a:rPr>
+              <a:t> with the modern environmental phrase "Earth is our common home" (used by international NGOs and Pope Francis's 2015 encyclical </a:t>
+            </a:r>
+            <a:pPr algn="l" indent="0" marL="0">
+              <a:lnSpc>
+                <a:spcPts val="1620"/>
+              </a:lnSpc>
+              <a:spcAft>
+                <a:spcPts val="300"/>
+              </a:spcAft>
+              <a:buNone/>
+            </a:pPr>
+            <a:r>
+              <a:rPr lang="en-US" sz="1200" i="1" dirty="0">
+                <a:solidFill>
+                  <a:srgbClr val="1C2833"/>
+                </a:solidFill>
+                <a:latin typeface="Arial" pitchFamily="34" charset="0"/>
+                <a:ea typeface="Arial" pitchFamily="34" charset="-122"/>
+                <a:cs typeface="Arial" pitchFamily="34" charset="-120"/>
+              </a:rPr>
+              <a:t>Laudato si'</a:t>
+            </a:r>
+            <a:pPr algn="l" indent="0" marL="0">
+              <a:lnSpc>
+                <a:spcPts val="1620"/>
+              </a:lnSpc>
+              <a:spcAft>
+                <a:spcPts val="300"/>
+              </a:spcAft>
+              <a:buNone/>
+            </a:pPr>
+            <a:r>
+              <a:rPr lang="en-US" sz="1200" dirty="0">
+                <a:solidFill>
+                  <a:srgbClr val="1C2833"/>
+                </a:solidFill>
+                <a:latin typeface="Arial" pitchFamily="34" charset="0"/>
+                <a:ea typeface="Arial" pitchFamily="34" charset="-122"/>
+                <a:cs typeface="Arial" pitchFamily="34" charset="-120"/>
+              </a:rPr>
+              <a:t>). Are they saying the same thing? What does each emphasise that the other doesn't?</a:t>
+            </a:r>
+            <a:endParaRPr lang="en-US" sz="1200" dirty="0"/>
+          </a:p>
+          <a:p>
+            <a:pPr algn="l" marL="342900" indent="-342900">
+              <a:lnSpc>
+                <a:spcPts val="1620"/>
+              </a:lnSpc>
+              <a:spcAft>
+                <a:spcPts val="300"/>
+              </a:spcAft>
+              <a:buSzPct val="100000"/>
+              <a:buChar char="•"/>
+            </a:pPr>
+            <a:r>
+              <a:rPr lang="en-US" sz="1200" b="1" dirty="0">
+                <a:solidFill>
+                  <a:srgbClr val="1C2833"/>
+                </a:solidFill>
+                <a:latin typeface="Arial" pitchFamily="34" charset="0"/>
+                <a:ea typeface="Arial" pitchFamily="34" charset="-122"/>
+                <a:cs typeface="Arial" pitchFamily="34" charset="-120"/>
+              </a:rPr>
+              <a:t>One tier down:</a:t>
+            </a:r>
+            <a:pPr algn="l" indent="0" marL="0">
+              <a:lnSpc>
+                <a:spcPts val="1620"/>
+              </a:lnSpc>
+              <a:spcAft>
+                <a:spcPts val="300"/>
+              </a:spcAft>
+              <a:buNone/>
+            </a:pPr>
+            <a:r>
+              <a:rPr lang="en-US" sz="1200" dirty="0">
+                <a:solidFill>
+                  <a:srgbClr val="1C2833"/>
+                </a:solidFill>
+                <a:latin typeface="Arial" pitchFamily="34" charset="0"/>
+                <a:ea typeface="Arial" pitchFamily="34" charset="-122"/>
+                <a:cs typeface="Arial" pitchFamily="34" charset="-120"/>
+              </a:rPr>
+              <a:t> Focus on memorising </a:t>
+            </a:r>
+            <a:pPr algn="l" indent="0" marL="0">
+              <a:lnSpc>
+                <a:spcPts val="1620"/>
+              </a:lnSpc>
+              <a:spcAft>
+                <a:spcPts val="300"/>
+              </a:spcAft>
+              <a:buNone/>
+            </a:pPr>
+            <a:r>
+              <a:rPr lang="en-US" sz="1200" i="1" dirty="0">
+                <a:solidFill>
+                  <a:srgbClr val="1C2833"/>
+                </a:solidFill>
+                <a:latin typeface="Arial" pitchFamily="34" charset="0"/>
+                <a:ea typeface="Arial" pitchFamily="34" charset="-122"/>
+                <a:cs typeface="Arial" pitchFamily="34" charset="-120"/>
+              </a:rPr>
+              <a:t>vasudhā</a:t>
+            </a:r>
+            <a:pPr algn="l" indent="0" marL="0">
+              <a:lnSpc>
+                <a:spcPts val="1620"/>
+              </a:lnSpc>
+              <a:spcAft>
+                <a:spcPts val="300"/>
+              </a:spcAft>
+              <a:buNone/>
+            </a:pPr>
+            <a:r>
+              <a:rPr lang="en-US" sz="1200" dirty="0">
+                <a:solidFill>
+                  <a:srgbClr val="1C2833"/>
+                </a:solidFill>
+                <a:latin typeface="Arial" pitchFamily="34" charset="0"/>
+                <a:ea typeface="Arial" pitchFamily="34" charset="-122"/>
+                <a:cs typeface="Arial" pitchFamily="34" charset="-120"/>
+              </a:rPr>
+              <a:t> (earth) and </a:t>
+            </a:r>
+            <a:pPr algn="l" indent="0" marL="0">
+              <a:lnSpc>
+                <a:spcPts val="1620"/>
+              </a:lnSpc>
+              <a:spcAft>
+                <a:spcPts val="300"/>
+              </a:spcAft>
+              <a:buNone/>
+            </a:pPr>
+            <a:r>
+              <a:rPr lang="en-US" sz="1200" i="1" dirty="0">
+                <a:solidFill>
+                  <a:srgbClr val="1C2833"/>
+                </a:solidFill>
+                <a:latin typeface="Arial" pitchFamily="34" charset="0"/>
+                <a:ea typeface="Arial" pitchFamily="34" charset="-122"/>
+                <a:cs typeface="Arial" pitchFamily="34" charset="-120"/>
+              </a:rPr>
+              <a:t>kuṭumba</a:t>
+            </a:r>
+            <a:pPr algn="l" indent="0" marL="0">
+              <a:lnSpc>
+                <a:spcPts val="1620"/>
+              </a:lnSpc>
+              <a:spcAft>
+                <a:spcPts val="300"/>
+              </a:spcAft>
+              <a:buNone/>
+            </a:pPr>
+            <a:r>
+              <a:rPr lang="en-US" sz="1200" dirty="0">
+                <a:solidFill>
+                  <a:srgbClr val="1C2833"/>
+                </a:solidFill>
+                <a:latin typeface="Arial" pitchFamily="34" charset="0"/>
+                <a:ea typeface="Arial" pitchFamily="34" charset="-122"/>
+                <a:cs typeface="Arial" pitchFamily="34" charset="-120"/>
+              </a:rPr>
+              <a:t> (family). The whole sentence can come on Day 2.</a:t>
+            </a:r>
+            <a:endParaRPr lang="en-US" sz="1200" dirty="0"/>
+          </a:p>
+        </p:txBody>
+      </p:sp>
+      <p:sp>
+        <p:nvSpPr>
+          <p:cNvPr id="5" name="Text 3"/>
+          <p:cNvSpPr/>
+          <p:nvPr/>
+        </p:nvSpPr>
+        <p:spPr>
+          <a:xfrm>
+            <a:off x="406301" y="4434929"/>
+            <a:ext cx="8498026" cy="213271"/>
+          </a:xfrm>
+          <a:prstGeom prst="rect">
+            <a:avLst/>
+          </a:prstGeom>
+          <a:noFill/>
+          <a:ln/>
+        </p:spPr>
+        <p:txBody>
+          <a:bodyPr wrap="square" lIns="0" tIns="0" rIns="0" bIns="0" rtlCol="0" anchor="t"/>
+          <a:lstStyle/>
+          <a:p>
+            <a:pPr algn="l" indent="0" marL="0">
+              <a:lnSpc>
+                <a:spcPts val="1680"/>
+              </a:lnSpc>
+              <a:spcBef>
+                <a:spcPts val="300"/>
+              </a:spcBef>
+              <a:spcAft>
+                <a:spcPts val="300"/>
+              </a:spcAft>
+              <a:buNone/>
+            </a:pPr>
+            <a:r>
+              <a:rPr lang="en-US" sz="1200" dirty="0">
+                <a:solidFill>
+                  <a:srgbClr val="1C2833"/>
+                </a:solidFill>
+                <a:latin typeface="Arial" pitchFamily="34" charset="0"/>
+                <a:ea typeface="Arial" pitchFamily="34" charset="-122"/>
+                <a:cs typeface="Arial" pitchFamily="34" charset="-120"/>
+              </a:rPr>
+              <a:t>Middle ·  · IKS Curriculum</a:t>
+            </a:r>
+            <a:endParaRPr lang="en-US" sz="1200" dirty="0"/>
+          </a:p>
+        </p:txBody>
+      </p:sp>
+    </p:spTree>
+  </p:cSld>
+  <p:clrMapOvr>
+    <a:masterClrMapping/>
+  </p:clrMapOvr>
+</p:sld>
+</file>
+
+<file path=ppt/slides/slide17.xml><?xml version="1.0" encoding="utf-8"?>
+<p:sld xmlns:a="http://schemas.openxmlformats.org/drawingml/2006/main" xmlns:r="http://schemas.openxmlformats.org/officeDocument/2006/relationships" xmlns:p="http://schemas.openxmlformats.org/presentationml/2006/main">
+  <p:cSld name="Slide 17">
+    <p:bg>
+      <p:bgPr>
+        <a:solidFill>
+          <a:srgbClr val="FFFFFF"/>
+        </a:solidFill>
+      </p:bgPr>
+    </p:bg>
+    <p:spTree>
+      <p:nvGrpSpPr>
+        <p:cNvPr id="1" name=""/>
+        <p:cNvGrpSpPr/>
+        <p:nvPr/>
+      </p:nvGrpSpPr>
+      <p:grpSpPr>
+        <a:xfrm>
+          <a:off x="0" y="0"/>
+          <a:ext cx="0" cy="0"/>
+          <a:chOff x="0" y="0"/>
+          <a:chExt cx="0" cy="0"/>
+        </a:xfrm>
+      </p:grpSpPr>
+      <p:sp>
+        <p:nvSpPr>
+          <p:cNvPr id="2" name="Text 0"/>
+          <p:cNvSpPr/>
+          <p:nvPr/>
+        </p:nvSpPr>
+        <p:spPr>
+          <a:xfrm>
+            <a:off x="0" y="0"/>
+            <a:ext cx="9144000" cy="101501"/>
+          </a:xfrm>
+          <a:prstGeom prst="rect">
+            <a:avLst/>
+          </a:prstGeom>
+          <a:solidFill>
+            <a:srgbClr val="277884"/>
+          </a:solidFill>
+          <a:ln/>
+        </p:spPr>
+        <p:txBody>
+          <a:bodyPr wrap="square" rtlCol="0" anchor="ctr"/>
+          <a:lstStyle/>
+          <a:p>
+            <a:pPr indent="0" marL="0">
+              <a:buNone/>
+            </a:pPr>
+            <a:endParaRPr lang="en-US" dirty="0"/>
+          </a:p>
+        </p:txBody>
+      </p:sp>
+      <p:sp>
+        <p:nvSpPr>
+          <p:cNvPr id="3" name="Text 1"/>
+          <p:cNvSpPr/>
+          <p:nvPr/>
+        </p:nvSpPr>
+        <p:spPr>
+          <a:xfrm>
+            <a:off x="406301" y="457051"/>
+            <a:ext cx="8498026" cy="274290"/>
+          </a:xfrm>
+          <a:prstGeom prst="rect">
+            <a:avLst/>
+          </a:prstGeom>
+          <a:noFill/>
+          <a:ln/>
+        </p:spPr>
+        <p:txBody>
+          <a:bodyPr wrap="square" lIns="0" tIns="0" rIns="0" bIns="0" rtlCol="0" anchor="t"/>
+          <a:lstStyle/>
+          <a:p>
+            <a:pPr algn="l" indent="0" marL="0">
+              <a:lnSpc>
+                <a:spcPts val="2160"/>
+              </a:lnSpc>
+              <a:spcBef>
+                <a:spcPts val="600"/>
+              </a:spcBef>
+              <a:spcAft>
+                <a:spcPts val="800"/>
+              </a:spcAft>
+              <a:buNone/>
+            </a:pPr>
+            <a:r>
+              <a:rPr lang="en-US" sz="1800" b="1" dirty="0">
+                <a:solidFill>
+                  <a:srgbClr val="FE4447"/>
+                </a:solidFill>
+                <a:latin typeface="Georgia" pitchFamily="34" charset="0"/>
+                <a:ea typeface="Georgia" pitchFamily="34" charset="-122"/>
+                <a:cs typeface="Georgia" pitchFamily="34" charset="-120"/>
+              </a:rPr>
+              <a:t>Teacher notes</a:t>
+            </a:r>
+            <a:endParaRPr lang="en-US" sz="1800" dirty="0"/>
+          </a:p>
+        </p:txBody>
+      </p:sp>
+      <p:sp>
+        <p:nvSpPr>
+          <p:cNvPr id="4" name="Text 2"/>
+          <p:cNvSpPr/>
+          <p:nvPr/>
+        </p:nvSpPr>
+        <p:spPr>
+          <a:xfrm>
+            <a:off x="634901" y="883593"/>
+            <a:ext cx="8102798" cy="1592163"/>
+          </a:xfrm>
+          <a:prstGeom prst="rect">
+            <a:avLst/>
+          </a:prstGeom>
+          <a:noFill/>
+          <a:ln/>
+        </p:spPr>
+        <p:txBody>
+          <a:bodyPr wrap="square" lIns="0" tIns="0" rIns="0" bIns="0" rtlCol="0" anchor="t"/>
+          <a:lstStyle/>
+          <a:p>
+            <a:pPr algn="l" marL="342900" indent="-342900">
+              <a:lnSpc>
+                <a:spcPts val="1620"/>
+              </a:lnSpc>
+              <a:spcAft>
+                <a:spcPts val="300"/>
+              </a:spcAft>
+              <a:buSzPct val="100000"/>
+              <a:buChar char="•"/>
+            </a:pPr>
+            <a:r>
+              <a:rPr lang="en-US" sz="1200" dirty="0">
+                <a:solidFill>
+                  <a:srgbClr val="1C2833"/>
+                </a:solidFill>
+                <a:latin typeface="Arial" pitchFamily="34" charset="0"/>
+                <a:ea typeface="Arial" pitchFamily="34" charset="-122"/>
+                <a:cs typeface="Arial" pitchFamily="34" charset="-120"/>
+              </a:rPr>
+              <a:t>Some students will say "but my cat IS family." Good — affirm that. The verse extends what they already feel. We are not introducing a new feeling; we're naming one.</a:t>
+            </a:r>
+            <a:endParaRPr lang="en-US" sz="1200" dirty="0"/>
+          </a:p>
+          <a:p>
+            <a:pPr algn="l" marL="342900" indent="-342900">
+              <a:lnSpc>
+                <a:spcPts val="1620"/>
+              </a:lnSpc>
+              <a:spcAft>
+                <a:spcPts val="300"/>
+              </a:spcAft>
+              <a:buSzPct val="100000"/>
+              <a:buChar char="•"/>
+            </a:pPr>
+            <a:r>
+              <a:rPr lang="en-US" sz="1200" dirty="0">
+                <a:solidFill>
+                  <a:srgbClr val="1C2833"/>
+                </a:solidFill>
+                <a:latin typeface="Arial" pitchFamily="34" charset="0"/>
+                <a:ea typeface="Arial" pitchFamily="34" charset="-122"/>
+                <a:cs typeface="Arial" pitchFamily="34" charset="-120"/>
+              </a:rPr>
+              <a:t>Some students will say "this is just a religious idea — does it count?" Good — name it. Tell them: the verse is religious </a:t>
+            </a:r>
+            <a:pPr algn="l" indent="0" marL="0">
+              <a:lnSpc>
+                <a:spcPts val="1620"/>
+              </a:lnSpc>
+              <a:spcAft>
+                <a:spcPts val="300"/>
+              </a:spcAft>
+              <a:buNone/>
+            </a:pPr>
+            <a:r>
+              <a:rPr lang="en-US" sz="1200" i="1" dirty="0">
+                <a:solidFill>
+                  <a:srgbClr val="1C2833"/>
+                </a:solidFill>
+                <a:latin typeface="Arial" pitchFamily="34" charset="0"/>
+                <a:ea typeface="Arial" pitchFamily="34" charset="-122"/>
+                <a:cs typeface="Arial" pitchFamily="34" charset="-120"/>
+              </a:rPr>
+              <a:t>in origin</a:t>
+            </a:r>
+            <a:pPr algn="l" indent="0" marL="0">
+              <a:lnSpc>
+                <a:spcPts val="1620"/>
+              </a:lnSpc>
+              <a:spcAft>
+                <a:spcPts val="300"/>
+              </a:spcAft>
+              <a:buNone/>
+            </a:pPr>
+            <a:r>
+              <a:rPr lang="en-US" sz="1200" dirty="0">
+                <a:solidFill>
+                  <a:srgbClr val="1C2833"/>
+                </a:solidFill>
+                <a:latin typeface="Arial" pitchFamily="34" charset="0"/>
+                <a:ea typeface="Arial" pitchFamily="34" charset="-122"/>
+                <a:cs typeface="Arial" pitchFamily="34" charset="-120"/>
+              </a:rPr>
+              <a:t>, but the ethic it carries doesn't require religious agreement. Many cultures have a version of this idea. The lesson is the ethic, not a conversion.</a:t>
+            </a:r>
+            <a:endParaRPr lang="en-US" sz="1200" dirty="0"/>
+          </a:p>
+          <a:p>
+            <a:pPr algn="l" marL="342900" indent="-342900">
+              <a:lnSpc>
+                <a:spcPts val="1620"/>
+              </a:lnSpc>
+              <a:spcAft>
+                <a:spcPts val="300"/>
+              </a:spcAft>
+              <a:buSzPct val="100000"/>
+              <a:buChar char="•"/>
+            </a:pPr>
+            <a:r>
+              <a:rPr lang="en-US" sz="1200" dirty="0">
+                <a:solidFill>
+                  <a:srgbClr val="1C2833"/>
+                </a:solidFill>
+                <a:latin typeface="Arial" pitchFamily="34" charset="0"/>
+                <a:ea typeface="Arial" pitchFamily="34" charset="-122"/>
+                <a:cs typeface="Arial" pitchFamily="34" charset="-120"/>
+              </a:rPr>
+              <a:t>Don't say "ancient Indians invented this and the West later borrowed it." That's bad history. Multiple cultures arrived at versions of this ethic independently. Indic thought put it in particularly elegant words.</a:t>
+            </a:r>
+            <a:endParaRPr lang="en-US" sz="1200" dirty="0"/>
+          </a:p>
+        </p:txBody>
+      </p:sp>
+      <p:sp>
+        <p:nvSpPr>
+          <p:cNvPr id="5" name="Text 3"/>
+          <p:cNvSpPr/>
+          <p:nvPr/>
+        </p:nvSpPr>
+        <p:spPr>
+          <a:xfrm>
+            <a:off x="406301" y="4434929"/>
+            <a:ext cx="8498026" cy="213271"/>
+          </a:xfrm>
+          <a:prstGeom prst="rect">
+            <a:avLst/>
+          </a:prstGeom>
+          <a:noFill/>
+          <a:ln/>
+        </p:spPr>
+        <p:txBody>
+          <a:bodyPr wrap="square" lIns="0" tIns="0" rIns="0" bIns="0" rtlCol="0" anchor="t"/>
+          <a:lstStyle/>
+          <a:p>
+            <a:pPr algn="l" indent="0" marL="0">
+              <a:lnSpc>
+                <a:spcPts val="1680"/>
+              </a:lnSpc>
+              <a:spcBef>
+                <a:spcPts val="300"/>
+              </a:spcBef>
+              <a:spcAft>
+                <a:spcPts val="300"/>
+              </a:spcAft>
+              <a:buNone/>
+            </a:pPr>
+            <a:r>
+              <a:rPr lang="en-US" sz="1200" dirty="0">
+                <a:solidFill>
+                  <a:srgbClr val="1C2833"/>
+                </a:solidFill>
+                <a:latin typeface="Arial" pitchFamily="34" charset="0"/>
+                <a:ea typeface="Arial" pitchFamily="34" charset="-122"/>
+                <a:cs typeface="Arial" pitchFamily="34" charset="-120"/>
+              </a:rPr>
+              <a:t>Middle ·  · IKS Curriculum</a:t>
+            </a:r>
+            <a:endParaRPr lang="en-US" sz="1200" dirty="0"/>
+          </a:p>
+        </p:txBody>
+      </p:sp>
+    </p:spTree>
+  </p:cSld>
+  <p:clrMapOvr>
+    <a:masterClrMapping/>
+  </p:clrMapOvr>
+</p:sld>
+</file>
+
+<file path=ppt/slides/slide18.xml><?xml version="1.0" encoding="utf-8"?>
+<p:sld xmlns:a="http://schemas.openxmlformats.org/drawingml/2006/main" xmlns:r="http://schemas.openxmlformats.org/officeDocument/2006/relationships" xmlns:p="http://schemas.openxmlformats.org/presentationml/2006/main">
+  <p:cSld name="Slide 18">
+    <p:bg>
+      <p:bgPr>
+        <a:solidFill>
+          <a:srgbClr val="FFFFFF"/>
+        </a:solidFill>
+      </p:bgPr>
+    </p:bg>
+    <p:spTree>
+      <p:nvGrpSpPr>
+        <p:cNvPr id="1" name=""/>
+        <p:cNvGrpSpPr/>
+        <p:nvPr/>
+      </p:nvGrpSpPr>
+      <p:grpSpPr>
+        <a:xfrm>
+          <a:off x="0" y="0"/>
+          <a:ext cx="0" cy="0"/>
+          <a:chOff x="0" y="0"/>
+          <a:chExt cx="0" cy="0"/>
+        </a:xfrm>
+      </p:grpSpPr>
+      <p:sp>
+        <p:nvSpPr>
+          <p:cNvPr id="2" name="Text 0"/>
+          <p:cNvSpPr/>
+          <p:nvPr/>
+        </p:nvSpPr>
+        <p:spPr>
+          <a:xfrm>
+            <a:off x="0" y="0"/>
+            <a:ext cx="9144000" cy="101501"/>
+          </a:xfrm>
+          <a:prstGeom prst="rect">
+            <a:avLst/>
+          </a:prstGeom>
+          <a:solidFill>
+            <a:srgbClr val="277884"/>
+          </a:solidFill>
+          <a:ln/>
+        </p:spPr>
+        <p:txBody>
+          <a:bodyPr wrap="square" rtlCol="0" anchor="ctr"/>
+          <a:lstStyle/>
+          <a:p>
+            <a:pPr indent="0" marL="0">
+              <a:buNone/>
+            </a:pPr>
+            <a:endParaRPr lang="en-US" dirty="0"/>
+          </a:p>
+        </p:txBody>
+      </p:sp>
+      <p:sp>
+        <p:nvSpPr>
+          <p:cNvPr id="3" name="Text 1"/>
+          <p:cNvSpPr/>
+          <p:nvPr/>
+        </p:nvSpPr>
+        <p:spPr>
+          <a:xfrm>
+            <a:off x="406301" y="457051"/>
+            <a:ext cx="8498026" cy="274290"/>
+          </a:xfrm>
+          <a:prstGeom prst="rect">
+            <a:avLst/>
+          </a:prstGeom>
+          <a:noFill/>
+          <a:ln/>
+        </p:spPr>
+        <p:txBody>
+          <a:bodyPr wrap="square" lIns="0" tIns="0" rIns="0" bIns="0" rtlCol="0" anchor="t"/>
+          <a:lstStyle/>
+          <a:p>
+            <a:pPr algn="l" indent="0" marL="0">
+              <a:lnSpc>
+                <a:spcPts val="2160"/>
+              </a:lnSpc>
+              <a:spcBef>
+                <a:spcPts val="600"/>
+              </a:spcBef>
+              <a:spcAft>
+                <a:spcPts val="800"/>
+              </a:spcAft>
+              <a:buNone/>
+            </a:pPr>
+            <a:r>
+              <a:rPr lang="en-US" sz="1800" b="1" dirty="0">
+                <a:solidFill>
+                  <a:srgbClr val="FE4447"/>
+                </a:solidFill>
+                <a:latin typeface="Georgia" pitchFamily="34" charset="0"/>
+                <a:ea typeface="Georgia" pitchFamily="34" charset="-122"/>
+                <a:cs typeface="Georgia" pitchFamily="34" charset="-120"/>
+              </a:rPr>
+              <a:t>Citation(s) used in this lesson</a:t>
+            </a:r>
+            <a:endParaRPr lang="en-US" sz="1800" dirty="0"/>
+          </a:p>
+        </p:txBody>
+      </p:sp>
+      <p:sp>
+        <p:nvSpPr>
+          <p:cNvPr id="4" name="Text 2"/>
+          <p:cNvSpPr/>
+          <p:nvPr/>
+        </p:nvSpPr>
+        <p:spPr>
+          <a:xfrm>
+            <a:off x="634901" y="883593"/>
+            <a:ext cx="8102798" cy="544711"/>
+          </a:xfrm>
+          <a:prstGeom prst="rect">
+            <a:avLst/>
+          </a:prstGeom>
+          <a:noFill/>
+          <a:ln/>
+        </p:spPr>
+        <p:txBody>
+          <a:bodyPr wrap="square" lIns="0" tIns="0" rIns="0" bIns="0" rtlCol="0" anchor="t"/>
+          <a:lstStyle/>
+          <a:p>
+            <a:pPr algn="l" marL="342900" indent="-342900">
+              <a:lnSpc>
+                <a:spcPts val="1620"/>
+              </a:lnSpc>
+              <a:spcAft>
+                <a:spcPts val="300"/>
+              </a:spcAft>
+              <a:buSzPct val="100000"/>
+              <a:buChar char="•"/>
+            </a:pPr>
+            <a:r>
+              <a:rPr lang="en-US" sz="1200" b="1" dirty="0">
+                <a:solidFill>
+                  <a:srgbClr val="1C2833"/>
+                </a:solidFill>
+                <a:latin typeface="Arial" pitchFamily="34" charset="0"/>
+                <a:ea typeface="Arial" pitchFamily="34" charset="-122"/>
+                <a:cs typeface="Arial" pitchFamily="34" charset="-120"/>
+              </a:rPr>
+              <a:t>Mahā Upaniṣad 6.71–73</a:t>
+            </a:r>
+            <a:pPr algn="l" indent="0" marL="0">
+              <a:lnSpc>
+                <a:spcPts val="1620"/>
+              </a:lnSpc>
+              <a:spcAft>
+                <a:spcPts val="300"/>
+              </a:spcAft>
+              <a:buNone/>
+            </a:pPr>
+            <a:r>
+              <a:rPr lang="en-US" sz="1200" dirty="0">
+                <a:solidFill>
+                  <a:srgbClr val="1C2833"/>
+                </a:solidFill>
+                <a:latin typeface="Arial" pitchFamily="34" charset="0"/>
+                <a:ea typeface="Arial" pitchFamily="34" charset="-122"/>
+                <a:cs typeface="Arial" pitchFamily="34" charset="-120"/>
+              </a:rPr>
+              <a:t> — </a:t>
+            </a:r>
+            <a:pPr algn="l" indent="0" marL="0">
+              <a:lnSpc>
+                <a:spcPts val="1620"/>
+              </a:lnSpc>
+              <a:spcAft>
+                <a:spcPts val="300"/>
+              </a:spcAft>
+              <a:buNone/>
+            </a:pPr>
+            <a:r>
+              <a:rPr lang="en-US" sz="1200" i="1" dirty="0">
+                <a:solidFill>
+                  <a:srgbClr val="1C2833"/>
+                </a:solidFill>
+                <a:latin typeface="Arial" pitchFamily="34" charset="0"/>
+                <a:ea typeface="Arial" pitchFamily="34" charset="-122"/>
+                <a:cs typeface="Arial" pitchFamily="34" charset="-120"/>
+              </a:rPr>
+              <a:t>vasudhaiva kuṭumbakam</a:t>
+            </a:r>
+            <a:pPr algn="l" indent="0" marL="0">
+              <a:lnSpc>
+                <a:spcPts val="1620"/>
+              </a:lnSpc>
+              <a:spcAft>
+                <a:spcPts val="300"/>
+              </a:spcAft>
+              <a:buNone/>
+            </a:pPr>
+            <a:r>
+              <a:rPr lang="en-US" sz="1200" dirty="0">
+                <a:solidFill>
+                  <a:srgbClr val="1C2833"/>
+                </a:solidFill>
+                <a:latin typeface="Arial" pitchFamily="34" charset="0"/>
+                <a:ea typeface="Arial" pitchFamily="34" charset="-122"/>
+                <a:cs typeface="Arial" pitchFamily="34" charset="-120"/>
+              </a:rPr>
+              <a:t> verse. Full Sanskrit text per the Adyar Library edition.</a:t>
+            </a:r>
+            <a:endParaRPr lang="en-US" sz="1200" dirty="0"/>
+          </a:p>
+          <a:p>
+            <a:pPr algn="l" marL="342900" indent="-342900">
+              <a:lnSpc>
+                <a:spcPts val="1620"/>
+              </a:lnSpc>
+              <a:spcAft>
+                <a:spcPts val="300"/>
+              </a:spcAft>
+              <a:buSzPct val="100000"/>
+              <a:buChar char="•"/>
+            </a:pPr>
+            <a:r>
+              <a:rPr lang="en-US" sz="1200" dirty="0">
+                <a:solidFill>
+                  <a:srgbClr val="1C2833"/>
+                </a:solidFill>
+                <a:latin typeface="Arial" pitchFamily="34" charset="0"/>
+                <a:ea typeface="Arial" pitchFamily="34" charset="-122"/>
+                <a:cs typeface="Arial" pitchFamily="34" charset="-120"/>
+              </a:rPr>
+              <a:t>See </a:t>
+            </a:r>
+            <a:pPr algn="l" indent="0" marL="0">
+              <a:lnSpc>
+                <a:spcPts val="1620"/>
+              </a:lnSpc>
+              <a:spcAft>
+                <a:spcPts val="300"/>
+              </a:spcAft>
+              <a:buNone/>
+            </a:pPr>
+            <a:r>
+              <a:rPr lang="en-US" sz="1200" dirty="0">
+                <a:solidFill>
+                  <a:srgbClr val="1C2833"/>
+                </a:solidFill>
+                <a:latin typeface="Arial" pitchFamily="34" charset="0"/>
+                <a:ea typeface="Arial" pitchFamily="34" charset="-122"/>
+                <a:cs typeface="Arial" pitchFamily="34" charset="-120"/>
+              </a:rPr>
               <a:t>sources.md</a:t>
             </a:r>
             <a:pPr algn="l" indent="0" marL="0">
               <a:lnSpc>
-                <a:spcPts val="1680"/>
-              </a:lnSpc>
-              <a:spcBef>
-                <a:spcPts val="300"/>
-              </a:spcBef>
+                <a:spcPts val="1620"/>
+              </a:lnSpc>
               <a:spcAft>
                 <a:spcPts val="300"/>
               </a:spcAft>
@@ -3615,7 +5750,7 @@
       </p:sp>
       <p:sp>
         <p:nvSpPr>
-          <p:cNvPr id="6" name="Text 4"/>
+          <p:cNvPr id="5" name="Text 3"/>
           <p:cNvSpPr/>
           <p:nvPr/>
         </p:nvSpPr>
@@ -3765,7 +5900,7 @@
                 <a:ea typeface="Georgia" pitchFamily="34" charset="-122"/>
                 <a:cs typeface="Georgia" pitchFamily="34" charset="-120"/>
               </a:rPr>
-              <a:t>Materials</a:t>
+              <a:t>Learning objective</a:t>
             </a:r>
             <a:endParaRPr lang="en-US" sz="1800" dirty="0"/>
           </a:p>
@@ -3780,7 +5915,7 @@
         <p:spPr>
           <a:xfrm>
             <a:off x="406301" y="870942"/>
-            <a:ext cx="8498026" cy="426541"/>
+            <a:ext cx="8498026" cy="639812"/>
           </a:xfrm>
           <a:prstGeom prst="rect">
             <a:avLst/>
@@ -3813,7 +5948,53 @@
                 <a:ea typeface="Arial" pitchFamily="34" charset="-122"/>
                 <a:cs typeface="Arial" pitchFamily="34" charset="-120"/>
               </a:rPr>
-              <a:t>– Whiteboard with the phrase pre-written in Devanāgarī and IAST – Printed handout: the half-verse with translation (one per pair) – Sticky notes (10 per student) – A large sheet of chart paper labelled "Family" in the centre</a:t>
+              <a:t>By the end of this lesson, students will recite the phrase </a:t>
+            </a:r>
+            <a:pPr algn="l" indent="0" marL="0">
+              <a:lnSpc>
+                <a:spcPts val="1680"/>
+              </a:lnSpc>
+              <a:spcBef>
+                <a:spcPts val="300"/>
+              </a:spcBef>
+              <a:spcAft>
+                <a:spcPts val="300"/>
+              </a:spcAft>
+              <a:buNone/>
+            </a:pPr>
+            <a:r>
+              <a:rPr lang="en-US" sz="1200" i="1" dirty="0">
+                <a:solidFill>
+                  <a:srgbClr val="1C2833"/>
+                </a:solidFill>
+                <a:latin typeface="Arial" pitchFamily="34" charset="0"/>
+                <a:ea typeface="Arial" pitchFamily="34" charset="-122"/>
+                <a:cs typeface="Arial" pitchFamily="34" charset="-120"/>
+              </a:rPr>
+              <a:t>vasudhaiva kuṭumbakam</a:t>
+            </a:r>
+            <a:pPr algn="l" indent="0" marL="0">
+              <a:lnSpc>
+                <a:spcPts val="1680"/>
+              </a:lnSpc>
+              <a:spcBef>
+                <a:spcPts val="300"/>
+              </a:spcBef>
+              <a:spcAft>
+                <a:spcPts val="300"/>
+              </a:spcAft>
+              <a:buNone/>
+            </a:pPr>
+            <a:r>
+              <a:rPr lang="en-US" sz="1200" dirty="0">
+                <a:solidFill>
+                  <a:srgbClr val="1C2833"/>
+                </a:solidFill>
+                <a:latin typeface="Arial" pitchFamily="34" charset="0"/>
+                <a:ea typeface="Arial" pitchFamily="34" charset="-122"/>
+                <a:cs typeface="Arial" pitchFamily="34" charset="-120"/>
+              </a:rPr>
+              <a:t> with its meaning, name its source (Mahā Upaniṣad 6.71–73), and give one concrete example of "treating something non-human as family" that they have actually seen.</a:t>
             </a:r>
             <a:endParaRPr lang="en-US" sz="1200" dirty="0"/>
           </a:p>
@@ -3971,7 +6152,7 @@
                 <a:ea typeface="Georgia" pitchFamily="34" charset="-122"/>
                 <a:cs typeface="Georgia" pitchFamily="34" charset="-120"/>
               </a:rPr>
-              <a:t>Vocabulary introduced today</a:t>
+              <a:t>Materials</a:t>
             </a:r>
             <a:endParaRPr lang="en-US" sz="1800" dirty="0"/>
           </a:p>
@@ -4009,26 +6190,6 @@
               <a:buChar char="•"/>
             </a:pPr>
             <a:r>
-              <a:rPr lang="en-US" sz="1200" i="1" dirty="0">
-                <a:solidFill>
-                  <a:srgbClr val="1C2833"/>
-                </a:solidFill>
-                <a:latin typeface="Arial" pitchFamily="34" charset="0"/>
-                <a:ea typeface="Arial" pitchFamily="34" charset="-122"/>
-                <a:cs typeface="Arial" pitchFamily="34" charset="-120"/>
-              </a:rPr>
-              <a:t>vasudhā</a:t>
-            </a:r>
-            <a:pPr algn="l" indent="0" marL="0">
-              <a:lnSpc>
-                <a:spcPts val="1620"/>
-              </a:lnSpc>
-              <a:spcAft>
-                <a:spcPts val="300"/>
-              </a:spcAft>
-              <a:buNone/>
-            </a:pPr>
-            <a:r>
               <a:rPr lang="en-US" sz="1200" dirty="0">
                 <a:solidFill>
                   <a:srgbClr val="1C2833"/>
@@ -4037,7 +6198,7 @@
                 <a:ea typeface="Arial" pitchFamily="34" charset="-122"/>
                 <a:cs typeface="Arial" pitchFamily="34" charset="-120"/>
               </a:rPr>
-              <a:t> (IAST: vasudhā; lit. "the wealth-holder, the earth") — the Earth as the bearer of all things.</a:t>
+              <a:t>Whiteboard with the phrase pre-written in Devanāgarī and IAST</a:t>
             </a:r>
             <a:endParaRPr lang="en-US" sz="1200" dirty="0"/>
           </a:p>
@@ -4053,26 +6214,6 @@
               <a:buChar char="•"/>
             </a:pPr>
             <a:r>
-              <a:rPr lang="en-US" sz="1200" i="1" dirty="0">
-                <a:solidFill>
-                  <a:srgbClr val="1C2833"/>
-                </a:solidFill>
-                <a:latin typeface="Arial" pitchFamily="34" charset="0"/>
-                <a:ea typeface="Arial" pitchFamily="34" charset="-122"/>
-                <a:cs typeface="Arial" pitchFamily="34" charset="-120"/>
-              </a:rPr>
-              <a:t>eva</a:t>
-            </a:r>
-            <a:pPr algn="l" indent="0" marL="0">
-              <a:lnSpc>
-                <a:spcPts val="1620"/>
-              </a:lnSpc>
-              <a:spcAft>
-                <a:spcPts val="300"/>
-              </a:spcAft>
-              <a:buNone/>
-            </a:pPr>
-            <a:r>
               <a:rPr lang="en-US" sz="1200" dirty="0">
                 <a:solidFill>
                   <a:srgbClr val="1C2833"/>
@@ -4081,7 +6222,7 @@
                 <a:ea typeface="Arial" pitchFamily="34" charset="-122"/>
                 <a:cs typeface="Arial" pitchFamily="34" charset="-120"/>
               </a:rPr>
-              <a:t> (IAST: eva) — "indeed, itself."</a:t>
+              <a:t>Printed handout: the half-verse with translation (one per pair)</a:t>
             </a:r>
             <a:endParaRPr lang="en-US" sz="1200" dirty="0"/>
           </a:p>
@@ -4097,26 +6238,6 @@
               <a:buChar char="•"/>
             </a:pPr>
             <a:r>
-              <a:rPr lang="en-US" sz="1200" i="1" dirty="0">
-                <a:solidFill>
-                  <a:srgbClr val="1C2833"/>
-                </a:solidFill>
-                <a:latin typeface="Arial" pitchFamily="34" charset="0"/>
-                <a:ea typeface="Arial" pitchFamily="34" charset="-122"/>
-                <a:cs typeface="Arial" pitchFamily="34" charset="-120"/>
-              </a:rPr>
-              <a:t>kuṭumba</a:t>
-            </a:r>
-            <a:pPr algn="l" indent="0" marL="0">
-              <a:lnSpc>
-                <a:spcPts val="1620"/>
-              </a:lnSpc>
-              <a:spcAft>
-                <a:spcPts val="300"/>
-              </a:spcAft>
-              <a:buNone/>
-            </a:pPr>
-            <a:r>
               <a:rPr lang="en-US" sz="1200" dirty="0">
                 <a:solidFill>
                   <a:srgbClr val="1C2833"/>
@@ -4125,7 +6246,7 @@
                 <a:ea typeface="Arial" pitchFamily="34" charset="-122"/>
                 <a:cs typeface="Arial" pitchFamily="34" charset="-120"/>
               </a:rPr>
-              <a:t> (IAST: kuṭumba; lit. "household, family") — a family unit, including extended members.</a:t>
+              <a:t>Sticky notes (10 per student)</a:t>
             </a:r>
             <a:endParaRPr lang="en-US" sz="1200" dirty="0"/>
           </a:p>
@@ -4141,26 +6262,6 @@
               <a:buChar char="•"/>
             </a:pPr>
             <a:r>
-              <a:rPr lang="en-US" sz="1200" i="1" dirty="0">
-                <a:solidFill>
-                  <a:srgbClr val="1C2833"/>
-                </a:solidFill>
-                <a:latin typeface="Arial" pitchFamily="34" charset="0"/>
-                <a:ea typeface="Arial" pitchFamily="34" charset="-122"/>
-                <a:cs typeface="Arial" pitchFamily="34" charset="-120"/>
-              </a:rPr>
-              <a:t>kam</a:t>
-            </a:r>
-            <a:pPr algn="l" indent="0" marL="0">
-              <a:lnSpc>
-                <a:spcPts val="1620"/>
-              </a:lnSpc>
-              <a:spcAft>
-                <a:spcPts val="300"/>
-              </a:spcAft>
-              <a:buNone/>
-            </a:pPr>
-            <a:r>
               <a:rPr lang="en-US" sz="1200" dirty="0">
                 <a:solidFill>
                   <a:srgbClr val="1C2833"/>
@@ -4169,47 +6270,7 @@
                 <a:ea typeface="Arial" pitchFamily="34" charset="-122"/>
                 <a:cs typeface="Arial" pitchFamily="34" charset="-120"/>
               </a:rPr>
-              <a:t> — neuter ending; </a:t>
-            </a:r>
-            <a:pPr algn="l" indent="0" marL="0">
-              <a:lnSpc>
-                <a:spcPts val="1620"/>
-              </a:lnSpc>
-              <a:spcAft>
-                <a:spcPts val="300"/>
-              </a:spcAft>
-              <a:buNone/>
-            </a:pPr>
-            <a:r>
-              <a:rPr lang="en-US" sz="1200" i="1" dirty="0">
-                <a:solidFill>
-                  <a:srgbClr val="1C2833"/>
-                </a:solidFill>
-                <a:latin typeface="Arial" pitchFamily="34" charset="0"/>
-                <a:ea typeface="Arial" pitchFamily="34" charset="-122"/>
-                <a:cs typeface="Arial" pitchFamily="34" charset="-120"/>
-              </a:rPr>
-              <a:t>kuṭumbakam</a:t>
-            </a:r>
-            <a:pPr algn="l" indent="0" marL="0">
-              <a:lnSpc>
-                <a:spcPts val="1620"/>
-              </a:lnSpc>
-              <a:spcAft>
-                <a:spcPts val="300"/>
-              </a:spcAft>
-              <a:buNone/>
-            </a:pPr>
-            <a:r>
-              <a:rPr lang="en-US" sz="1200" dirty="0">
-                <a:solidFill>
-                  <a:srgbClr val="1C2833"/>
-                </a:solidFill>
-                <a:latin typeface="Arial" pitchFamily="34" charset="0"/>
-                <a:ea typeface="Arial" pitchFamily="34" charset="-122"/>
-                <a:cs typeface="Arial" pitchFamily="34" charset="-120"/>
-              </a:rPr>
-              <a:t> = "a family" (the same word with diminutive / endearing tone).</a:t>
+              <a:t>A large sheet of chart paper labelled "Family" in the centre</a:t>
             </a:r>
             <a:endParaRPr lang="en-US" sz="1200" dirty="0"/>
           </a:p>
@@ -4218,100 +6279,6 @@
       <p:sp>
         <p:nvSpPr>
           <p:cNvPr id="5" name="Text 3"/>
-          <p:cNvSpPr/>
-          <p:nvPr/>
-        </p:nvSpPr>
-        <p:spPr>
-          <a:xfrm>
-            <a:off x="406301" y="1985665"/>
-            <a:ext cx="8498026" cy="213271"/>
-          </a:xfrm>
-          <a:prstGeom prst="rect">
-            <a:avLst/>
-          </a:prstGeom>
-          <a:noFill/>
-          <a:ln/>
-        </p:spPr>
-        <p:txBody>
-          <a:bodyPr wrap="square" lIns="0" tIns="0" rIns="0" bIns="0" rtlCol="0" anchor="t"/>
-          <a:lstStyle/>
-          <a:p>
-            <a:pPr algn="l" indent="0" marL="0">
-              <a:lnSpc>
-                <a:spcPts val="1680"/>
-              </a:lnSpc>
-              <a:spcBef>
-                <a:spcPts val="300"/>
-              </a:spcBef>
-              <a:spcAft>
-                <a:spcPts val="300"/>
-              </a:spcAft>
-              <a:buNone/>
-            </a:pPr>
-            <a:r>
-              <a:rPr lang="en-US" sz="1200" dirty="0">
-                <a:solidFill>
-                  <a:srgbClr val="1C2833"/>
-                </a:solidFill>
-                <a:latin typeface="Arial" pitchFamily="34" charset="0"/>
-                <a:ea typeface="Arial" pitchFamily="34" charset="-122"/>
-                <a:cs typeface="Arial" pitchFamily="34" charset="-120"/>
-              </a:rPr>
-              <a:t>– Combined: </a:t>
-            </a:r>
-            <a:pPr algn="l" indent="0" marL="0">
-              <a:lnSpc>
-                <a:spcPts val="1680"/>
-              </a:lnSpc>
-              <a:spcBef>
-                <a:spcPts val="300"/>
-              </a:spcBef>
-              <a:spcAft>
-                <a:spcPts val="300"/>
-              </a:spcAft>
-              <a:buNone/>
-            </a:pPr>
-            <a:r>
-              <a:rPr lang="en-US" sz="1200" i="1" dirty="0">
-                <a:solidFill>
-                  <a:srgbClr val="1C2833"/>
-                </a:solidFill>
-                <a:latin typeface="Arial" pitchFamily="34" charset="0"/>
-                <a:ea typeface="Arial" pitchFamily="34" charset="-122"/>
-                <a:cs typeface="Arial" pitchFamily="34" charset="-120"/>
-              </a:rPr>
-              <a:t>vasudhaiva kuṭumbakam</a:t>
-            </a:r>
-            <a:pPr algn="l" indent="0" marL="0">
-              <a:lnSpc>
-                <a:spcPts val="1680"/>
-              </a:lnSpc>
-              <a:spcBef>
-                <a:spcPts val="300"/>
-              </a:spcBef>
-              <a:spcAft>
-                <a:spcPts val="300"/>
-              </a:spcAft>
-              <a:buNone/>
-            </a:pPr>
-            <a:r>
-              <a:rPr lang="en-US" sz="1200" dirty="0">
-                <a:solidFill>
-                  <a:srgbClr val="1C2833"/>
-                </a:solidFill>
-                <a:latin typeface="Arial" pitchFamily="34" charset="0"/>
-                <a:ea typeface="Arial" pitchFamily="34" charset="-122"/>
-                <a:cs typeface="Arial" pitchFamily="34" charset="-120"/>
-              </a:rPr>
-              <a:t> — "the Earth herself is one family."</a:t>
-            </a:r>
-            <a:endParaRPr lang="en-US" sz="1200" dirty="0"/>
-          </a:p>
-        </p:txBody>
-      </p:sp>
-      <p:sp>
-        <p:nvSpPr>
-          <p:cNvPr id="6" name="Text 4"/>
           <p:cNvSpPr/>
           <p:nvPr/>
         </p:nvSpPr>
@@ -4461,7 +6428,7 @@
                 <a:ea typeface="Georgia" pitchFamily="34" charset="-122"/>
                 <a:cs typeface="Georgia" pitchFamily="34" charset="-120"/>
               </a:rPr>
-              <a:t>Lesson flow</a:t>
+              <a:t>Vocabulary introduced today</a:t>
             </a:r>
             <a:endParaRPr lang="en-US" sz="1800" dirty="0"/>
           </a:p>
@@ -4470,6 +6437,308 @@
       <p:sp>
         <p:nvSpPr>
           <p:cNvPr id="4" name="Text 2"/>
+          <p:cNvSpPr/>
+          <p:nvPr/>
+        </p:nvSpPr>
+        <p:spPr>
+          <a:xfrm>
+            <a:off x="634901" y="883593"/>
+            <a:ext cx="8102798" cy="1257002"/>
+          </a:xfrm>
+          <a:prstGeom prst="rect">
+            <a:avLst/>
+          </a:prstGeom>
+          <a:noFill/>
+          <a:ln/>
+        </p:spPr>
+        <p:txBody>
+          <a:bodyPr wrap="square" lIns="0" tIns="0" rIns="0" bIns="0" rtlCol="0" anchor="t"/>
+          <a:lstStyle/>
+          <a:p>
+            <a:pPr algn="l" marL="342900" indent="-342900">
+              <a:lnSpc>
+                <a:spcPts val="1620"/>
+              </a:lnSpc>
+              <a:spcAft>
+                <a:spcPts val="300"/>
+              </a:spcAft>
+              <a:buSzPct val="100000"/>
+              <a:buChar char="•"/>
+            </a:pPr>
+            <a:r>
+              <a:rPr lang="en-US" sz="1200" i="1" dirty="0">
+                <a:solidFill>
+                  <a:srgbClr val="1C2833"/>
+                </a:solidFill>
+                <a:latin typeface="Arial" pitchFamily="34" charset="0"/>
+                <a:ea typeface="Arial" pitchFamily="34" charset="-122"/>
+                <a:cs typeface="Arial" pitchFamily="34" charset="-120"/>
+              </a:rPr>
+              <a:t>vasudhā</a:t>
+            </a:r>
+            <a:pPr algn="l" indent="0" marL="0">
+              <a:lnSpc>
+                <a:spcPts val="1620"/>
+              </a:lnSpc>
+              <a:spcAft>
+                <a:spcPts val="300"/>
+              </a:spcAft>
+              <a:buNone/>
+            </a:pPr>
+            <a:r>
+              <a:rPr lang="en-US" sz="1200" dirty="0">
+                <a:solidFill>
+                  <a:srgbClr val="1C2833"/>
+                </a:solidFill>
+                <a:latin typeface="Arial" pitchFamily="34" charset="0"/>
+                <a:ea typeface="Arial" pitchFamily="34" charset="-122"/>
+                <a:cs typeface="Arial" pitchFamily="34" charset="-120"/>
+              </a:rPr>
+              <a:t> (IAST: vasudhā; lit. "the wealth-holder, the earth") — the Earth as the bearer of all things.</a:t>
+            </a:r>
+            <a:endParaRPr lang="en-US" sz="1200" dirty="0"/>
+          </a:p>
+          <a:p>
+            <a:pPr algn="l" marL="342900" indent="-342900">
+              <a:lnSpc>
+                <a:spcPts val="1620"/>
+              </a:lnSpc>
+              <a:spcAft>
+                <a:spcPts val="300"/>
+              </a:spcAft>
+              <a:buSzPct val="100000"/>
+              <a:buChar char="•"/>
+            </a:pPr>
+            <a:r>
+              <a:rPr lang="en-US" sz="1200" i="1" dirty="0">
+                <a:solidFill>
+                  <a:srgbClr val="1C2833"/>
+                </a:solidFill>
+                <a:latin typeface="Arial" pitchFamily="34" charset="0"/>
+                <a:ea typeface="Arial" pitchFamily="34" charset="-122"/>
+                <a:cs typeface="Arial" pitchFamily="34" charset="-120"/>
+              </a:rPr>
+              <a:t>eva</a:t>
+            </a:r>
+            <a:pPr algn="l" indent="0" marL="0">
+              <a:lnSpc>
+                <a:spcPts val="1620"/>
+              </a:lnSpc>
+              <a:spcAft>
+                <a:spcPts val="300"/>
+              </a:spcAft>
+              <a:buNone/>
+            </a:pPr>
+            <a:r>
+              <a:rPr lang="en-US" sz="1200" dirty="0">
+                <a:solidFill>
+                  <a:srgbClr val="1C2833"/>
+                </a:solidFill>
+                <a:latin typeface="Arial" pitchFamily="34" charset="0"/>
+                <a:ea typeface="Arial" pitchFamily="34" charset="-122"/>
+                <a:cs typeface="Arial" pitchFamily="34" charset="-120"/>
+              </a:rPr>
+              <a:t> (IAST: eva) — "indeed, itself."</a:t>
+            </a:r>
+            <a:endParaRPr lang="en-US" sz="1200" dirty="0"/>
+          </a:p>
+          <a:p>
+            <a:pPr algn="l" marL="342900" indent="-342900">
+              <a:lnSpc>
+                <a:spcPts val="1620"/>
+              </a:lnSpc>
+              <a:spcAft>
+                <a:spcPts val="300"/>
+              </a:spcAft>
+              <a:buSzPct val="100000"/>
+              <a:buChar char="•"/>
+            </a:pPr>
+            <a:r>
+              <a:rPr lang="en-US" sz="1200" i="1" dirty="0">
+                <a:solidFill>
+                  <a:srgbClr val="1C2833"/>
+                </a:solidFill>
+                <a:latin typeface="Arial" pitchFamily="34" charset="0"/>
+                <a:ea typeface="Arial" pitchFamily="34" charset="-122"/>
+                <a:cs typeface="Arial" pitchFamily="34" charset="-120"/>
+              </a:rPr>
+              <a:t>kuṭumba</a:t>
+            </a:r>
+            <a:pPr algn="l" indent="0" marL="0">
+              <a:lnSpc>
+                <a:spcPts val="1620"/>
+              </a:lnSpc>
+              <a:spcAft>
+                <a:spcPts val="300"/>
+              </a:spcAft>
+              <a:buNone/>
+            </a:pPr>
+            <a:r>
+              <a:rPr lang="en-US" sz="1200" dirty="0">
+                <a:solidFill>
+                  <a:srgbClr val="1C2833"/>
+                </a:solidFill>
+                <a:latin typeface="Arial" pitchFamily="34" charset="0"/>
+                <a:ea typeface="Arial" pitchFamily="34" charset="-122"/>
+                <a:cs typeface="Arial" pitchFamily="34" charset="-120"/>
+              </a:rPr>
+              <a:t> (IAST: kuṭumba; lit. "household, family") — a family unit, including extended members.</a:t>
+            </a:r>
+            <a:endParaRPr lang="en-US" sz="1200" dirty="0"/>
+          </a:p>
+          <a:p>
+            <a:pPr algn="l" marL="342900" indent="-342900">
+              <a:lnSpc>
+                <a:spcPts val="1620"/>
+              </a:lnSpc>
+              <a:spcAft>
+                <a:spcPts val="300"/>
+              </a:spcAft>
+              <a:buSzPct val="100000"/>
+              <a:buChar char="•"/>
+            </a:pPr>
+            <a:r>
+              <a:rPr lang="en-US" sz="1200" i="1" dirty="0">
+                <a:solidFill>
+                  <a:srgbClr val="1C2833"/>
+                </a:solidFill>
+                <a:latin typeface="Arial" pitchFamily="34" charset="0"/>
+                <a:ea typeface="Arial" pitchFamily="34" charset="-122"/>
+                <a:cs typeface="Arial" pitchFamily="34" charset="-120"/>
+              </a:rPr>
+              <a:t>kam</a:t>
+            </a:r>
+            <a:pPr algn="l" indent="0" marL="0">
+              <a:lnSpc>
+                <a:spcPts val="1620"/>
+              </a:lnSpc>
+              <a:spcAft>
+                <a:spcPts val="300"/>
+              </a:spcAft>
+              <a:buNone/>
+            </a:pPr>
+            <a:r>
+              <a:rPr lang="en-US" sz="1200" dirty="0">
+                <a:solidFill>
+                  <a:srgbClr val="1C2833"/>
+                </a:solidFill>
+                <a:latin typeface="Arial" pitchFamily="34" charset="0"/>
+                <a:ea typeface="Arial" pitchFamily="34" charset="-122"/>
+                <a:cs typeface="Arial" pitchFamily="34" charset="-120"/>
+              </a:rPr>
+              <a:t> — neuter ending; </a:t>
+            </a:r>
+            <a:pPr algn="l" indent="0" marL="0">
+              <a:lnSpc>
+                <a:spcPts val="1620"/>
+              </a:lnSpc>
+              <a:spcAft>
+                <a:spcPts val="300"/>
+              </a:spcAft>
+              <a:buNone/>
+            </a:pPr>
+            <a:r>
+              <a:rPr lang="en-US" sz="1200" i="1" dirty="0">
+                <a:solidFill>
+                  <a:srgbClr val="1C2833"/>
+                </a:solidFill>
+                <a:latin typeface="Arial" pitchFamily="34" charset="0"/>
+                <a:ea typeface="Arial" pitchFamily="34" charset="-122"/>
+                <a:cs typeface="Arial" pitchFamily="34" charset="-120"/>
+              </a:rPr>
+              <a:t>kuṭumbakam</a:t>
+            </a:r>
+            <a:pPr algn="l" indent="0" marL="0">
+              <a:lnSpc>
+                <a:spcPts val="1620"/>
+              </a:lnSpc>
+              <a:spcAft>
+                <a:spcPts val="300"/>
+              </a:spcAft>
+              <a:buNone/>
+            </a:pPr>
+            <a:r>
+              <a:rPr lang="en-US" sz="1200" dirty="0">
+                <a:solidFill>
+                  <a:srgbClr val="1C2833"/>
+                </a:solidFill>
+                <a:latin typeface="Arial" pitchFamily="34" charset="0"/>
+                <a:ea typeface="Arial" pitchFamily="34" charset="-122"/>
+                <a:cs typeface="Arial" pitchFamily="34" charset="-120"/>
+              </a:rPr>
+              <a:t> = "a family" (the same word with diminutive / endearing tone).</a:t>
+            </a:r>
+            <a:endParaRPr lang="en-US" sz="1200" dirty="0"/>
+          </a:p>
+          <a:p>
+            <a:pPr algn="l" marL="342900" indent="-342900">
+              <a:lnSpc>
+                <a:spcPts val="1620"/>
+              </a:lnSpc>
+              <a:spcAft>
+                <a:spcPts val="300"/>
+              </a:spcAft>
+              <a:buSzPct val="100000"/>
+              <a:buChar char="•"/>
+            </a:pPr>
+            <a:r>
+              <a:rPr lang="en-US" sz="1200" dirty="0">
+                <a:solidFill>
+                  <a:srgbClr val="1C2833"/>
+                </a:solidFill>
+                <a:latin typeface="Arial" pitchFamily="34" charset="0"/>
+                <a:ea typeface="Arial" pitchFamily="34" charset="-122"/>
+                <a:cs typeface="Arial" pitchFamily="34" charset="-120"/>
+              </a:rPr>
+              <a:t>Combined: </a:t>
+            </a:r>
+            <a:pPr algn="l" indent="0" marL="0">
+              <a:lnSpc>
+                <a:spcPts val="1620"/>
+              </a:lnSpc>
+              <a:spcAft>
+                <a:spcPts val="300"/>
+              </a:spcAft>
+              <a:buNone/>
+            </a:pPr>
+            <a:r>
+              <a:rPr lang="en-US" sz="1200" i="1" dirty="0">
+                <a:solidFill>
+                  <a:srgbClr val="1C2833"/>
+                </a:solidFill>
+                <a:latin typeface="Arial" pitchFamily="34" charset="0"/>
+                <a:ea typeface="Arial" pitchFamily="34" charset="-122"/>
+                <a:cs typeface="Arial" pitchFamily="34" charset="-120"/>
+              </a:rPr>
+              <a:t>vasudhaiva kuṭumbakam</a:t>
+            </a:r>
+            <a:pPr algn="l" indent="0" marL="0">
+              <a:lnSpc>
+                <a:spcPts val="1620"/>
+              </a:lnSpc>
+              <a:spcAft>
+                <a:spcPts val="300"/>
+              </a:spcAft>
+              <a:buNone/>
+            </a:pPr>
+            <a:r>
+              <a:rPr lang="en-US" sz="1200" dirty="0">
+                <a:solidFill>
+                  <a:srgbClr val="1C2833"/>
+                </a:solidFill>
+                <a:latin typeface="Arial" pitchFamily="34" charset="0"/>
+                <a:ea typeface="Arial" pitchFamily="34" charset="-122"/>
+                <a:cs typeface="Arial" pitchFamily="34" charset="-120"/>
+              </a:rPr>
+              <a:t> — "the Earth herself is one family."</a:t>
+            </a:r>
+            <a:endParaRPr lang="en-US" sz="1200" dirty="0"/>
+          </a:p>
+        </p:txBody>
+      </p:sp>
+      <p:sp>
+        <p:nvSpPr>
+          <p:cNvPr id="5" name="Text 3"/>
           <p:cNvSpPr/>
           <p:nvPr/>
         </p:nvSpPr>
@@ -4619,7 +6888,7 @@
                 <a:ea typeface="Georgia" pitchFamily="34" charset="-122"/>
                 <a:cs typeface="Georgia" pitchFamily="34" charset="-120"/>
               </a:rPr>
-              <a:t>Warm-up (5 min)</a:t>
+              <a:t>Lesson flow</a:t>
             </a:r>
             <a:endParaRPr lang="en-US" sz="1800" dirty="0"/>
           </a:p>
@@ -4628,146 +6897,6 @@
       <p:sp>
         <p:nvSpPr>
           <p:cNvPr id="4" name="Text 2"/>
-          <p:cNvSpPr/>
-          <p:nvPr/>
-        </p:nvSpPr>
-        <p:spPr>
-          <a:xfrm>
-            <a:off x="406301" y="870942"/>
-            <a:ext cx="8498026" cy="853083"/>
-          </a:xfrm>
-          <a:prstGeom prst="rect">
-            <a:avLst/>
-          </a:prstGeom>
-          <a:noFill/>
-          <a:ln/>
-        </p:spPr>
-        <p:txBody>
-          <a:bodyPr wrap="square" lIns="0" tIns="0" rIns="0" bIns="0" rtlCol="0" anchor="t"/>
-          <a:lstStyle/>
-          <a:p>
-            <a:pPr algn="l" indent="0" marL="0">
-              <a:lnSpc>
-                <a:spcPts val="1680"/>
-              </a:lnSpc>
-              <a:spcBef>
-                <a:spcPts val="300"/>
-              </a:spcBef>
-              <a:spcAft>
-                <a:spcPts val="300"/>
-              </a:spcAft>
-              <a:buNone/>
-            </a:pPr>
-            <a:r>
-              <a:rPr lang="en-US" sz="1200" dirty="0">
-                <a:solidFill>
-                  <a:srgbClr val="1C2833"/>
-                </a:solidFill>
-                <a:latin typeface="Arial" pitchFamily="34" charset="0"/>
-                <a:ea typeface="Arial" pitchFamily="34" charset="-122"/>
-                <a:cs typeface="Arial" pitchFamily="34" charset="-120"/>
-              </a:rPr>
-              <a:t>– On the chart paper labelled "Family," ask each student to write </a:t>
-            </a:r>
-            <a:pPr algn="l" indent="0" marL="0">
-              <a:lnSpc>
-                <a:spcPts val="1680"/>
-              </a:lnSpc>
-              <a:spcBef>
-                <a:spcPts val="300"/>
-              </a:spcBef>
-              <a:spcAft>
-                <a:spcPts val="300"/>
-              </a:spcAft>
-              <a:buNone/>
-            </a:pPr>
-            <a:r>
-              <a:rPr lang="en-US" sz="1200" i="1" dirty="0">
-                <a:solidFill>
-                  <a:srgbClr val="1C2833"/>
-                </a:solidFill>
-                <a:latin typeface="Arial" pitchFamily="34" charset="0"/>
-                <a:ea typeface="Arial" pitchFamily="34" charset="-122"/>
-                <a:cs typeface="Arial" pitchFamily="34" charset="-120"/>
-              </a:rPr>
-              <a:t>one</a:t>
-            </a:r>
-            <a:pPr algn="l" indent="0" marL="0">
-              <a:lnSpc>
-                <a:spcPts val="1680"/>
-              </a:lnSpc>
-              <a:spcBef>
-                <a:spcPts val="300"/>
-              </a:spcBef>
-              <a:spcAft>
-                <a:spcPts val="300"/>
-              </a:spcAft>
-              <a:buNone/>
-            </a:pPr>
-            <a:r>
-              <a:rPr lang="en-US" sz="1200" dirty="0">
-                <a:solidFill>
-                  <a:srgbClr val="1C2833"/>
-                </a:solidFill>
-                <a:latin typeface="Arial" pitchFamily="34" charset="0"/>
-                <a:ea typeface="Arial" pitchFamily="34" charset="-122"/>
-                <a:cs typeface="Arial" pitchFamily="34" charset="-120"/>
-              </a:rPr>
-              <a:t> name on a sticky note — someone they consider family — and stick it on the chart. – After a minute, ask: </a:t>
-            </a:r>
-            <a:pPr algn="l" indent="0" marL="0">
-              <a:lnSpc>
-                <a:spcPts val="1680"/>
-              </a:lnSpc>
-              <a:spcBef>
-                <a:spcPts val="300"/>
-              </a:spcBef>
-              <a:spcAft>
-                <a:spcPts val="300"/>
-              </a:spcAft>
-              <a:buNone/>
-            </a:pPr>
-            <a:r>
-              <a:rPr lang="en-US" sz="1200" i="1" dirty="0">
-                <a:solidFill>
-                  <a:srgbClr val="1C2833"/>
-                </a:solidFill>
-                <a:latin typeface="Arial" pitchFamily="34" charset="0"/>
-                <a:ea typeface="Arial" pitchFamily="34" charset="-122"/>
-                <a:cs typeface="Arial" pitchFamily="34" charset="-120"/>
-              </a:rPr>
-              <a:t>"How many of these are humans? Anyone include a pet? A grandparent's tree? A river? A god? A toy?"</a:t>
-            </a:r>
-            <a:pPr algn="l" indent="0" marL="0">
-              <a:lnSpc>
-                <a:spcPts val="1680"/>
-              </a:lnSpc>
-              <a:spcBef>
-                <a:spcPts val="300"/>
-              </a:spcBef>
-              <a:spcAft>
-                <a:spcPts val="300"/>
-              </a:spcAft>
-              <a:buNone/>
-            </a:pPr>
-            <a:r>
-              <a:rPr lang="en-US" sz="1200" dirty="0">
-                <a:solidFill>
-                  <a:srgbClr val="1C2833"/>
-                </a:solidFill>
-                <a:latin typeface="Arial" pitchFamily="34" charset="0"/>
-                <a:ea typeface="Arial" pitchFamily="34" charset="-122"/>
-                <a:cs typeface="Arial" pitchFamily="34" charset="-120"/>
-              </a:rPr>
-              <a:t> – Read 5–6 of the notes aloud without judgement. Most will be human. That's the data we start with.</a:t>
-            </a:r>
-            <a:endParaRPr lang="en-US" sz="1200" dirty="0"/>
-          </a:p>
-        </p:txBody>
-      </p:sp>
-      <p:sp>
-        <p:nvSpPr>
-          <p:cNvPr id="5" name="Text 3"/>
           <p:cNvSpPr/>
           <p:nvPr/>
         </p:nvSpPr>
@@ -4917,7 +7046,7 @@
                 <a:ea typeface="Georgia" pitchFamily="34" charset="-122"/>
                 <a:cs typeface="Georgia" pitchFamily="34" charset="-120"/>
               </a:rPr>
-              <a:t>Core (20 min)</a:t>
+              <a:t>Warm-up (5 min)</a:t>
             </a:r>
             <a:endParaRPr lang="en-US" sz="1800" dirty="0"/>
           </a:p>
@@ -4932,7 +7061,7 @@
         <p:spPr>
           <a:xfrm>
             <a:off x="634901" y="883593"/>
-            <a:ext cx="8102798" cy="281880"/>
+            <a:ext cx="8102798" cy="1180802"/>
           </a:xfrm>
           <a:prstGeom prst="rect">
             <a:avLst/>
@@ -4955,15 +7084,15 @@
               <a:buChar char="•"/>
             </a:pPr>
             <a:r>
-              <a:rPr lang="en-US" sz="1200" b="1" dirty="0">
-                <a:solidFill>
-                  <a:srgbClr val="1C2833"/>
-                </a:solidFill>
-                <a:latin typeface="Arial" pitchFamily="34" charset="0"/>
-                <a:ea typeface="Arial" pitchFamily="34" charset="-122"/>
-                <a:cs typeface="Arial" pitchFamily="34" charset="-120"/>
-              </a:rPr>
-              <a:t>Write the phrase on the board</a:t>
+              <a:rPr lang="en-US" sz="1200" dirty="0">
+                <a:solidFill>
+                  <a:srgbClr val="1C2833"/>
+                </a:solidFill>
+                <a:latin typeface="Arial" pitchFamily="34" charset="0"/>
+                <a:ea typeface="Arial" pitchFamily="34" charset="-122"/>
+                <a:cs typeface="Arial" pitchFamily="34" charset="-120"/>
+              </a:rPr>
+              <a:t>On the chart paper labelled "Family," ask each student to write </a:t>
             </a:r>
             <a:pPr algn="l" indent="0" marL="0">
               <a:lnSpc>
@@ -4975,6 +7104,26 @@
               <a:buNone/>
             </a:pPr>
             <a:r>
+              <a:rPr lang="en-US" sz="1200" i="1" dirty="0">
+                <a:solidFill>
+                  <a:srgbClr val="1C2833"/>
+                </a:solidFill>
+                <a:latin typeface="Arial" pitchFamily="34" charset="0"/>
+                <a:ea typeface="Arial" pitchFamily="34" charset="-122"/>
+                <a:cs typeface="Arial" pitchFamily="34" charset="-120"/>
+              </a:rPr>
+              <a:t>one</a:t>
+            </a:r>
+            <a:pPr algn="l" indent="0" marL="0">
+              <a:lnSpc>
+                <a:spcPts val="1620"/>
+              </a:lnSpc>
+              <a:spcAft>
+                <a:spcPts val="300"/>
+              </a:spcAft>
+              <a:buNone/>
+            </a:pPr>
+            <a:r>
               <a:rPr lang="en-US" sz="1200" dirty="0">
                 <a:solidFill>
                   <a:srgbClr val="1C2833"/>
@@ -4983,7 +7132,75 @@
                 <a:ea typeface="Arial" pitchFamily="34" charset="-122"/>
                 <a:cs typeface="Arial" pitchFamily="34" charset="-120"/>
               </a:rPr>
-              <a:t> in Devanāgarī, then IAST, then word-by-word translation:</a:t>
+              <a:t> name on a sticky note — someone they consider family — and stick it on the chart.</a:t>
+            </a:r>
+            <a:endParaRPr lang="en-US" sz="1200" dirty="0"/>
+          </a:p>
+          <a:p>
+            <a:pPr algn="l" marL="342900" indent="-342900">
+              <a:lnSpc>
+                <a:spcPts val="1620"/>
+              </a:lnSpc>
+              <a:spcAft>
+                <a:spcPts val="300"/>
+              </a:spcAft>
+              <a:buSzPct val="100000"/>
+              <a:buChar char="•"/>
+            </a:pPr>
+            <a:r>
+              <a:rPr lang="en-US" sz="1200" dirty="0">
+                <a:solidFill>
+                  <a:srgbClr val="1C2833"/>
+                </a:solidFill>
+                <a:latin typeface="Arial" pitchFamily="34" charset="0"/>
+                <a:ea typeface="Arial" pitchFamily="34" charset="-122"/>
+                <a:cs typeface="Arial" pitchFamily="34" charset="-120"/>
+              </a:rPr>
+              <a:t>After a minute, ask: </a:t>
+            </a:r>
+            <a:pPr algn="l" indent="0" marL="0">
+              <a:lnSpc>
+                <a:spcPts val="1620"/>
+              </a:lnSpc>
+              <a:spcAft>
+                <a:spcPts val="300"/>
+              </a:spcAft>
+              <a:buNone/>
+            </a:pPr>
+            <a:r>
+              <a:rPr lang="en-US" sz="1200" i="1" dirty="0">
+                <a:solidFill>
+                  <a:srgbClr val="1C2833"/>
+                </a:solidFill>
+                <a:latin typeface="Arial" pitchFamily="34" charset="0"/>
+                <a:ea typeface="Arial" pitchFamily="34" charset="-122"/>
+                <a:cs typeface="Arial" pitchFamily="34" charset="-120"/>
+              </a:rPr>
+              <a:t>"How many of these are humans? Anyone include a pet? A grandparent's tree? A river? A god? A toy?"</a:t>
+            </a:r>
+            <a:endParaRPr lang="en-US" sz="1200" dirty="0"/>
+          </a:p>
+          <a:p>
+            <a:pPr algn="l" marL="342900" indent="-342900">
+              <a:lnSpc>
+                <a:spcPts val="1620"/>
+              </a:lnSpc>
+              <a:spcAft>
+                <a:spcPts val="300"/>
+              </a:spcAft>
+              <a:buSzPct val="100000"/>
+              <a:buChar char="•"/>
+            </a:pPr>
+            <a:r>
+              <a:rPr lang="en-US" sz="1200" dirty="0">
+                <a:solidFill>
+                  <a:srgbClr val="1C2833"/>
+                </a:solidFill>
+                <a:latin typeface="Arial" pitchFamily="34" charset="0"/>
+                <a:ea typeface="Arial" pitchFamily="34" charset="-122"/>
+                <a:cs typeface="Arial" pitchFamily="34" charset="-120"/>
+              </a:rPr>
+              <a:t>Read 5–6 of the notes aloud without judgement. Most will be human. That's the data we start with.</a:t>
             </a:r>
             <a:endParaRPr lang="en-US" sz="1200" dirty="0"/>
           </a:p>
@@ -4997,739 +7214,7 @@
         </p:nvSpPr>
         <p:spPr>
           <a:xfrm>
-            <a:off x="406301" y="1254323"/>
-            <a:ext cx="8498026" cy="213271"/>
-          </a:xfrm>
-          <a:prstGeom prst="rect">
-            <a:avLst/>
-          </a:prstGeom>
-          <a:noFill/>
-          <a:ln/>
-        </p:spPr>
-        <p:txBody>
-          <a:bodyPr wrap="square" lIns="0" tIns="0" rIns="0" bIns="0" rtlCol="0" anchor="t"/>
-          <a:lstStyle/>
-          <a:p>
-            <a:pPr algn="l" indent="0" marL="0">
-              <a:lnSpc>
-                <a:spcPts val="1680"/>
-              </a:lnSpc>
-              <a:spcBef>
-                <a:spcPts val="300"/>
-              </a:spcBef>
-              <a:spcAft>
-                <a:spcPts val="300"/>
-              </a:spcAft>
-              <a:buNone/>
-            </a:pPr>
-            <a:r>
-              <a:rPr lang="en-US" sz="1200" dirty="0">
-                <a:solidFill>
-                  <a:srgbClr val="1C2833"/>
-                </a:solidFill>
-                <a:latin typeface="Arial" pitchFamily="34" charset="0"/>
-                <a:ea typeface="Arial" pitchFamily="34" charset="-122"/>
-                <a:cs typeface="Arial" pitchFamily="34" charset="-120"/>
-              </a:rPr>
-              <a:t>&gt; वसुधैव कुटुम्बकम् — </a:t>
-            </a:r>
-            <a:pPr algn="l" indent="0" marL="0">
-              <a:lnSpc>
-                <a:spcPts val="1680"/>
-              </a:lnSpc>
-              <a:spcBef>
-                <a:spcPts val="300"/>
-              </a:spcBef>
-              <a:spcAft>
-                <a:spcPts val="300"/>
-              </a:spcAft>
-              <a:buNone/>
-            </a:pPr>
-            <a:r>
-              <a:rPr lang="en-US" sz="1200" i="1" dirty="0">
-                <a:solidFill>
-                  <a:srgbClr val="1C2833"/>
-                </a:solidFill>
-                <a:latin typeface="Arial" pitchFamily="34" charset="0"/>
-                <a:ea typeface="Arial" pitchFamily="34" charset="-122"/>
-                <a:cs typeface="Arial" pitchFamily="34" charset="-120"/>
-              </a:rPr>
-              <a:t>vasudhaiva kuṭumbakam</a:t>
-            </a:r>
-            <a:pPr algn="l" indent="0" marL="0">
-              <a:lnSpc>
-                <a:spcPts val="1680"/>
-              </a:lnSpc>
-              <a:spcBef>
-                <a:spcPts val="300"/>
-              </a:spcBef>
-              <a:spcAft>
-                <a:spcPts val="300"/>
-              </a:spcAft>
-              <a:buNone/>
-            </a:pPr>
-            <a:r>
-              <a:rPr lang="en-US" sz="1200" dirty="0">
-                <a:solidFill>
-                  <a:srgbClr val="1C2833"/>
-                </a:solidFill>
-                <a:latin typeface="Arial" pitchFamily="34" charset="0"/>
-                <a:ea typeface="Arial" pitchFamily="34" charset="-122"/>
-                <a:cs typeface="Arial" pitchFamily="34" charset="-120"/>
-              </a:rPr>
-              <a:t> — "the Earth itself is one family."</a:t>
-            </a:r>
-            <a:endParaRPr lang="en-US" sz="1200" dirty="0"/>
-          </a:p>
-        </p:txBody>
-      </p:sp>
-      <p:sp>
-        <p:nvSpPr>
-          <p:cNvPr id="6" name="Text 4"/>
-          <p:cNvSpPr/>
-          <p:nvPr/>
-        </p:nvSpPr>
-        <p:spPr>
-          <a:xfrm>
-            <a:off x="634901" y="1556445"/>
-            <a:ext cx="8102798" cy="281880"/>
-          </a:xfrm>
-          <a:prstGeom prst="rect">
-            <a:avLst/>
-          </a:prstGeom>
-          <a:noFill/>
-          <a:ln/>
-        </p:spPr>
-        <p:txBody>
-          <a:bodyPr wrap="square" lIns="0" tIns="0" rIns="0" bIns="0" rtlCol="0" anchor="t"/>
-          <a:lstStyle/>
-          <a:p>
-            <a:pPr algn="l" marL="342900" indent="-342900">
-              <a:lnSpc>
-                <a:spcPts val="1620"/>
-              </a:lnSpc>
-              <a:spcAft>
-                <a:spcPts val="300"/>
-              </a:spcAft>
-              <a:buSzPct val="100000"/>
-              <a:buChar char="•"/>
-            </a:pPr>
-            <a:r>
-              <a:rPr lang="en-US" sz="1200" b="1" dirty="0">
-                <a:solidFill>
-                  <a:srgbClr val="1C2833"/>
-                </a:solidFill>
-                <a:latin typeface="Arial" pitchFamily="34" charset="0"/>
-                <a:ea typeface="Arial" pitchFamily="34" charset="-122"/>
-                <a:cs typeface="Arial" pitchFamily="34" charset="-120"/>
-              </a:rPr>
-              <a:t>The fuller verse.</a:t>
-            </a:r>
-            <a:pPr algn="l" indent="0" marL="0">
-              <a:lnSpc>
-                <a:spcPts val="1620"/>
-              </a:lnSpc>
-              <a:spcAft>
-                <a:spcPts val="300"/>
-              </a:spcAft>
-              <a:buNone/>
-            </a:pPr>
-            <a:r>
-              <a:rPr lang="en-US" sz="1200" dirty="0">
-                <a:solidFill>
-                  <a:srgbClr val="1C2833"/>
-                </a:solidFill>
-                <a:latin typeface="Arial" pitchFamily="34" charset="0"/>
-                <a:ea typeface="Arial" pitchFamily="34" charset="-122"/>
-                <a:cs typeface="Arial" pitchFamily="34" charset="-120"/>
-              </a:rPr>
-              <a:t> Read the whole half-verse from the handout:</a:t>
-            </a:r>
-            <a:endParaRPr lang="en-US" sz="1200" dirty="0"/>
-          </a:p>
-        </p:txBody>
-      </p:sp>
-      <p:sp>
-        <p:nvSpPr>
-          <p:cNvPr id="7" name="Text 5"/>
-          <p:cNvSpPr/>
-          <p:nvPr/>
-        </p:nvSpPr>
-        <p:spPr>
-          <a:xfrm>
-            <a:off x="406301" y="1927175"/>
-            <a:ext cx="8498026" cy="639812"/>
-          </a:xfrm>
-          <a:prstGeom prst="rect">
-            <a:avLst/>
-          </a:prstGeom>
-          <a:noFill/>
-          <a:ln/>
-        </p:spPr>
-        <p:txBody>
-          <a:bodyPr wrap="square" lIns="0" tIns="0" rIns="0" bIns="0" rtlCol="0" anchor="t"/>
-          <a:lstStyle/>
-          <a:p>
-            <a:pPr algn="l" indent="0" marL="0">
-              <a:lnSpc>
-                <a:spcPts val="1680"/>
-              </a:lnSpc>
-              <a:spcBef>
-                <a:spcPts val="300"/>
-              </a:spcBef>
-              <a:spcAft>
-                <a:spcPts val="300"/>
-              </a:spcAft>
-              <a:buNone/>
-            </a:pPr>
-            <a:r>
-              <a:rPr lang="en-US" sz="1200" dirty="0">
-                <a:solidFill>
-                  <a:srgbClr val="1C2833"/>
-                </a:solidFill>
-                <a:latin typeface="Arial" pitchFamily="34" charset="0"/>
-                <a:ea typeface="Arial" pitchFamily="34" charset="-122"/>
-                <a:cs typeface="Arial" pitchFamily="34" charset="-120"/>
-              </a:rPr>
-              <a:t>&gt; </a:t>
-            </a:r>
-            <a:pPr algn="l" indent="0" marL="0">
-              <a:lnSpc>
-                <a:spcPts val="1680"/>
-              </a:lnSpc>
-              <a:spcBef>
-                <a:spcPts val="300"/>
-              </a:spcBef>
-              <a:spcAft>
-                <a:spcPts val="300"/>
-              </a:spcAft>
-              <a:buNone/>
-            </a:pPr>
-            <a:r>
-              <a:rPr lang="en-US" sz="1200" i="1" dirty="0">
-                <a:solidFill>
-                  <a:srgbClr val="1C2833"/>
-                </a:solidFill>
-                <a:latin typeface="Arial" pitchFamily="34" charset="0"/>
-                <a:ea typeface="Arial" pitchFamily="34" charset="-122"/>
-                <a:cs typeface="Arial" pitchFamily="34" charset="-120"/>
-              </a:rPr>
-              <a:t>ayaṁ nijaḥ paro veti gaṇanā laghu-cetasām / &gt; udāra-caritānāṁ tu vasudhaiva kuṭumbakam //</a:t>
-            </a:r>
-            <a:pPr algn="l" indent="0" marL="0">
-              <a:lnSpc>
-                <a:spcPts val="1680"/>
-              </a:lnSpc>
-              <a:spcBef>
-                <a:spcPts val="300"/>
-              </a:spcBef>
-              <a:spcAft>
-                <a:spcPts val="300"/>
-              </a:spcAft>
-              <a:buNone/>
-            </a:pPr>
-            <a:r>
-              <a:rPr lang="en-US" sz="1200" dirty="0">
-                <a:solidFill>
-                  <a:srgbClr val="1C2833"/>
-                </a:solidFill>
-                <a:latin typeface="Arial" pitchFamily="34" charset="0"/>
-                <a:ea typeface="Arial" pitchFamily="34" charset="-122"/>
-                <a:cs typeface="Arial" pitchFamily="34" charset="-120"/>
-              </a:rPr>
-              <a:t> &gt; &gt; "This is mine, that is theirs — such reckoning is for the small-minded. &gt; For those whose conduct is large, the whole earth is one family." &gt; — Mahā Upaniṣad 6.71–73</a:t>
-            </a:r>
-            <a:endParaRPr lang="en-US" sz="1200" dirty="0"/>
-          </a:p>
-        </p:txBody>
-      </p:sp>
-      <p:sp>
-        <p:nvSpPr>
-          <p:cNvPr id="8" name="Text 6"/>
-          <p:cNvSpPr/>
-          <p:nvPr/>
-        </p:nvSpPr>
-        <p:spPr>
-          <a:xfrm>
-            <a:off x="634901" y="2655838"/>
-            <a:ext cx="8102798" cy="693241"/>
-          </a:xfrm>
-          <a:prstGeom prst="rect">
-            <a:avLst/>
-          </a:prstGeom>
-          <a:noFill/>
-          <a:ln/>
-        </p:spPr>
-        <p:txBody>
-          <a:bodyPr wrap="square" lIns="0" tIns="0" rIns="0" bIns="0" rtlCol="0" anchor="t"/>
-          <a:lstStyle/>
-          <a:p>
-            <a:pPr algn="l" marL="342900" indent="-342900">
-              <a:lnSpc>
-                <a:spcPts val="1620"/>
-              </a:lnSpc>
-              <a:spcAft>
-                <a:spcPts val="300"/>
-              </a:spcAft>
-              <a:buSzPct val="100000"/>
-              <a:buChar char="•"/>
-            </a:pPr>
-            <a:r>
-              <a:rPr lang="en-US" sz="1200" b="1" dirty="0">
-                <a:solidFill>
-                  <a:srgbClr val="1C2833"/>
-                </a:solidFill>
-                <a:latin typeface="Arial" pitchFamily="34" charset="0"/>
-                <a:ea typeface="Arial" pitchFamily="34" charset="-122"/>
-                <a:cs typeface="Arial" pitchFamily="34" charset="-120"/>
-              </a:rPr>
-              <a:t>Notice the structure.</a:t>
-            </a:r>
-            <a:pPr algn="l" indent="0" marL="0">
-              <a:lnSpc>
-                <a:spcPts val="1620"/>
-              </a:lnSpc>
-              <a:spcAft>
-                <a:spcPts val="300"/>
-              </a:spcAft>
-              <a:buNone/>
-            </a:pPr>
-            <a:r>
-              <a:rPr lang="en-US" sz="1200" dirty="0">
-                <a:solidFill>
-                  <a:srgbClr val="1C2833"/>
-                </a:solidFill>
-                <a:latin typeface="Arial" pitchFamily="34" charset="0"/>
-                <a:ea typeface="Arial" pitchFamily="34" charset="-122"/>
-                <a:cs typeface="Arial" pitchFamily="34" charset="-120"/>
-              </a:rPr>
-              <a:t> It is a </a:t>
-            </a:r>
-            <a:pPr algn="l" indent="0" marL="0">
-              <a:lnSpc>
-                <a:spcPts val="1620"/>
-              </a:lnSpc>
-              <a:spcAft>
-                <a:spcPts val="300"/>
-              </a:spcAft>
-              <a:buNone/>
-            </a:pPr>
-            <a:r>
-              <a:rPr lang="en-US" sz="1200" i="1" dirty="0">
-                <a:solidFill>
-                  <a:srgbClr val="1C2833"/>
-                </a:solidFill>
-                <a:latin typeface="Arial" pitchFamily="34" charset="0"/>
-                <a:ea typeface="Arial" pitchFamily="34" charset="-122"/>
-                <a:cs typeface="Arial" pitchFamily="34" charset="-120"/>
-              </a:rPr>
-              <a:t>comparison</a:t>
-            </a:r>
-            <a:pPr algn="l" indent="0" marL="0">
-              <a:lnSpc>
-                <a:spcPts val="1620"/>
-              </a:lnSpc>
-              <a:spcAft>
-                <a:spcPts val="300"/>
-              </a:spcAft>
-              <a:buNone/>
-            </a:pPr>
-            <a:r>
-              <a:rPr lang="en-US" sz="1200" dirty="0">
-                <a:solidFill>
-                  <a:srgbClr val="1C2833"/>
-                </a:solidFill>
-                <a:latin typeface="Arial" pitchFamily="34" charset="0"/>
-                <a:ea typeface="Arial" pitchFamily="34" charset="-122"/>
-                <a:cs typeface="Arial" pitchFamily="34" charset="-120"/>
-              </a:rPr>
-              <a:t>. The verse is not saying "the Earth IS literally one family" the way "</a:t>
-            </a:r>
-            <a:pPr algn="l" indent="0" marL="0">
-              <a:lnSpc>
-                <a:spcPts val="1620"/>
-              </a:lnSpc>
-              <a:spcAft>
-                <a:spcPts val="300"/>
-              </a:spcAft>
-              <a:buNone/>
-            </a:pPr>
-            <a:r>
-              <a:rPr lang="en-US" sz="1200" i="1" dirty="0">
-                <a:solidFill>
-                  <a:srgbClr val="1C2833"/>
-                </a:solidFill>
-                <a:latin typeface="Arial" pitchFamily="34" charset="0"/>
-                <a:ea typeface="Arial" pitchFamily="34" charset="-122"/>
-                <a:cs typeface="Arial" pitchFamily="34" charset="-120"/>
-              </a:rPr>
-              <a:t>water IS H₂O</a:t>
-            </a:r>
-            <a:pPr algn="l" indent="0" marL="0">
-              <a:lnSpc>
-                <a:spcPts val="1620"/>
-              </a:lnSpc>
-              <a:spcAft>
-                <a:spcPts val="300"/>
-              </a:spcAft>
-              <a:buNone/>
-            </a:pPr>
-            <a:r>
-              <a:rPr lang="en-US" sz="1200" dirty="0">
-                <a:solidFill>
-                  <a:srgbClr val="1C2833"/>
-                </a:solidFill>
-                <a:latin typeface="Arial" pitchFamily="34" charset="0"/>
-                <a:ea typeface="Arial" pitchFamily="34" charset="-122"/>
-                <a:cs typeface="Arial" pitchFamily="34" charset="-120"/>
-              </a:rPr>
-              <a:t>" is a factual claim. It is saying: </a:t>
-            </a:r>
-            <a:pPr algn="l" indent="0" marL="0">
-              <a:lnSpc>
-                <a:spcPts val="1620"/>
-              </a:lnSpc>
-              <a:spcAft>
-                <a:spcPts val="300"/>
-              </a:spcAft>
-              <a:buNone/>
-            </a:pPr>
-            <a:r>
-              <a:rPr lang="en-US" sz="1200" i="1" dirty="0">
-                <a:solidFill>
-                  <a:srgbClr val="1C2833"/>
-                </a:solidFill>
-                <a:latin typeface="Arial" pitchFamily="34" charset="0"/>
-                <a:ea typeface="Arial" pitchFamily="34" charset="-122"/>
-                <a:cs typeface="Arial" pitchFamily="34" charset="-120"/>
-              </a:rPr>
-              <a:t>if</a:t>
-            </a:r>
-            <a:pPr algn="l" indent="0" marL="0">
-              <a:lnSpc>
-                <a:spcPts val="1620"/>
-              </a:lnSpc>
-              <a:spcAft>
-                <a:spcPts val="300"/>
-              </a:spcAft>
-              <a:buNone/>
-            </a:pPr>
-            <a:r>
-              <a:rPr lang="en-US" sz="1200" dirty="0">
-                <a:solidFill>
-                  <a:srgbClr val="1C2833"/>
-                </a:solidFill>
-                <a:latin typeface="Arial" pitchFamily="34" charset="0"/>
-                <a:ea typeface="Arial" pitchFamily="34" charset="-122"/>
-                <a:cs typeface="Arial" pitchFamily="34" charset="-120"/>
-              </a:rPr>
-              <a:t> you live with a big enough sense of belonging, </a:t>
-            </a:r>
-            <a:pPr algn="l" indent="0" marL="0">
-              <a:lnSpc>
-                <a:spcPts val="1620"/>
-              </a:lnSpc>
-              <a:spcAft>
-                <a:spcPts val="300"/>
-              </a:spcAft>
-              <a:buNone/>
-            </a:pPr>
-            <a:r>
-              <a:rPr lang="en-US" sz="1200" i="1" dirty="0">
-                <a:solidFill>
-                  <a:srgbClr val="1C2833"/>
-                </a:solidFill>
-                <a:latin typeface="Arial" pitchFamily="34" charset="0"/>
-                <a:ea typeface="Arial" pitchFamily="34" charset="-122"/>
-                <a:cs typeface="Arial" pitchFamily="34" charset="-120"/>
-              </a:rPr>
-              <a:t>then</a:t>
-            </a:r>
-            <a:pPr algn="l" indent="0" marL="0">
-              <a:lnSpc>
-                <a:spcPts val="1620"/>
-              </a:lnSpc>
-              <a:spcAft>
-                <a:spcPts val="300"/>
-              </a:spcAft>
-              <a:buNone/>
-            </a:pPr>
-            <a:r>
-              <a:rPr lang="en-US" sz="1200" dirty="0">
-                <a:solidFill>
-                  <a:srgbClr val="1C2833"/>
-                </a:solidFill>
-                <a:latin typeface="Arial" pitchFamily="34" charset="0"/>
-                <a:ea typeface="Arial" pitchFamily="34" charset="-122"/>
-                <a:cs typeface="Arial" pitchFamily="34" charset="-120"/>
-              </a:rPr>
-              <a:t> you treat the Earth as a family. The phrase is an ethic, not a biological description.</a:t>
-            </a:r>
-            <a:endParaRPr lang="en-US" sz="1200" dirty="0"/>
-          </a:p>
-        </p:txBody>
-      </p:sp>
-      <p:sp>
-        <p:nvSpPr>
-          <p:cNvPr id="9" name="Text 7"/>
-          <p:cNvSpPr/>
-          <p:nvPr/>
-        </p:nvSpPr>
-        <p:spPr>
-          <a:xfrm>
-            <a:off x="634901" y="3450580"/>
-            <a:ext cx="8102798" cy="693241"/>
-          </a:xfrm>
-          <a:prstGeom prst="rect">
-            <a:avLst/>
-          </a:prstGeom>
-          <a:noFill/>
-          <a:ln/>
-        </p:spPr>
-        <p:txBody>
-          <a:bodyPr wrap="square" lIns="0" tIns="0" rIns="0" bIns="0" rtlCol="0" anchor="t"/>
-          <a:lstStyle/>
-          <a:p>
-            <a:pPr algn="l" marL="342900" indent="-342900">
-              <a:lnSpc>
-                <a:spcPts val="1620"/>
-              </a:lnSpc>
-              <a:spcAft>
-                <a:spcPts val="300"/>
-              </a:spcAft>
-              <a:buSzPct val="100000"/>
-              <a:buChar char="•"/>
-            </a:pPr>
-            <a:r>
-              <a:rPr lang="en-US" sz="1200" b="1" dirty="0">
-                <a:solidFill>
-                  <a:srgbClr val="1C2833"/>
-                </a:solidFill>
-                <a:latin typeface="Arial" pitchFamily="34" charset="0"/>
-                <a:ea typeface="Arial" pitchFamily="34" charset="-122"/>
-                <a:cs typeface="Arial" pitchFamily="34" charset="-120"/>
-              </a:rPr>
-              <a:t>Where the phrase has lived.</a:t>
-            </a:r>
-            <a:pPr algn="l" indent="0" marL="0">
-              <a:lnSpc>
-                <a:spcPts val="1620"/>
-              </a:lnSpc>
-              <a:spcAft>
-                <a:spcPts val="300"/>
-              </a:spcAft>
-              <a:buNone/>
-            </a:pPr>
-            <a:r>
-              <a:rPr lang="en-US" sz="1200" dirty="0">
-                <a:solidFill>
-                  <a:srgbClr val="1C2833"/>
-                </a:solidFill>
-                <a:latin typeface="Arial" pitchFamily="34" charset="0"/>
-                <a:ea typeface="Arial" pitchFamily="34" charset="-122"/>
-                <a:cs typeface="Arial" pitchFamily="34" charset="-120"/>
-              </a:rPr>
-              <a:t> The same idea appears in the </a:t>
-            </a:r>
-            <a:pPr algn="l" indent="0" marL="0">
-              <a:lnSpc>
-                <a:spcPts val="1620"/>
-              </a:lnSpc>
-              <a:spcAft>
-                <a:spcPts val="300"/>
-              </a:spcAft>
-              <a:buNone/>
-            </a:pPr>
-            <a:r>
-              <a:rPr lang="en-US" sz="1200" i="1" dirty="0">
-                <a:solidFill>
-                  <a:srgbClr val="1C2833"/>
-                </a:solidFill>
-                <a:latin typeface="Arial" pitchFamily="34" charset="0"/>
-                <a:ea typeface="Arial" pitchFamily="34" charset="-122"/>
-                <a:cs typeface="Arial" pitchFamily="34" charset="-120"/>
-              </a:rPr>
-              <a:t>Pañcatantra</a:t>
-            </a:r>
-            <a:pPr algn="l" indent="0" marL="0">
-              <a:lnSpc>
-                <a:spcPts val="1620"/>
-              </a:lnSpc>
-              <a:spcAft>
-                <a:spcPts val="300"/>
-              </a:spcAft>
-              <a:buNone/>
-            </a:pPr>
-            <a:r>
-              <a:rPr lang="en-US" sz="1200" dirty="0">
-                <a:solidFill>
-                  <a:srgbClr val="1C2833"/>
-                </a:solidFill>
-                <a:latin typeface="Arial" pitchFamily="34" charset="0"/>
-                <a:ea typeface="Arial" pitchFamily="34" charset="-122"/>
-                <a:cs typeface="Arial" pitchFamily="34" charset="-120"/>
-              </a:rPr>
-              <a:t> prologue and the </a:t>
-            </a:r>
-            <a:pPr algn="l" indent="0" marL="0">
-              <a:lnSpc>
-                <a:spcPts val="1620"/>
-              </a:lnSpc>
-              <a:spcAft>
-                <a:spcPts val="300"/>
-              </a:spcAft>
-              <a:buNone/>
-            </a:pPr>
-            <a:r>
-              <a:rPr lang="en-US" sz="1200" i="1" dirty="0">
-                <a:solidFill>
-                  <a:srgbClr val="1C2833"/>
-                </a:solidFill>
-                <a:latin typeface="Arial" pitchFamily="34" charset="0"/>
-                <a:ea typeface="Arial" pitchFamily="34" charset="-122"/>
-                <a:cs typeface="Arial" pitchFamily="34" charset="-120"/>
-              </a:rPr>
-              <a:t>Hitopadeśa</a:t>
-            </a:r>
-            <a:pPr algn="l" indent="0" marL="0">
-              <a:lnSpc>
-                <a:spcPts val="1620"/>
-              </a:lnSpc>
-              <a:spcAft>
-                <a:spcPts val="300"/>
-              </a:spcAft>
-              <a:buNone/>
-            </a:pPr>
-            <a:r>
-              <a:rPr lang="en-US" sz="1200" dirty="0">
-                <a:solidFill>
-                  <a:srgbClr val="1C2833"/>
-                </a:solidFill>
-                <a:latin typeface="Arial" pitchFamily="34" charset="0"/>
-                <a:ea typeface="Arial" pitchFamily="34" charset="-122"/>
-                <a:cs typeface="Arial" pitchFamily="34" charset="-120"/>
-              </a:rPr>
-              <a:t> as a quoted line; the Mahā Upaniṣad is the older scriptural source. The phrase has been adopted as the motto of the Indian Parliament's entrance hall, and India used it as the theme of the G20 presidency in 2023. It travels well.</a:t>
-            </a:r>
-            <a:endParaRPr lang="en-US" sz="1200" dirty="0"/>
-          </a:p>
-        </p:txBody>
-      </p:sp>
-      <p:sp>
-        <p:nvSpPr>
-          <p:cNvPr id="10" name="Text 8"/>
-          <p:cNvSpPr/>
-          <p:nvPr/>
-        </p:nvSpPr>
-        <p:spPr>
-          <a:xfrm>
-            <a:off x="634901" y="4245322"/>
-            <a:ext cx="8102798" cy="693241"/>
-          </a:xfrm>
-          <a:prstGeom prst="rect">
-            <a:avLst/>
-          </a:prstGeom>
-          <a:noFill/>
-          <a:ln/>
-        </p:spPr>
-        <p:txBody>
-          <a:bodyPr wrap="square" lIns="0" tIns="0" rIns="0" bIns="0" rtlCol="0" anchor="t"/>
-          <a:lstStyle/>
-          <a:p>
-            <a:pPr algn="l" marL="342900" indent="-342900">
-              <a:lnSpc>
-                <a:spcPts val="1620"/>
-              </a:lnSpc>
-              <a:spcAft>
-                <a:spcPts val="300"/>
-              </a:spcAft>
-              <a:buSzPct val="100000"/>
-              <a:buChar char="•"/>
-            </a:pPr>
-            <a:r>
-              <a:rPr lang="en-US" sz="1200" b="1" dirty="0">
-                <a:solidFill>
-                  <a:srgbClr val="1C2833"/>
-                </a:solidFill>
-                <a:latin typeface="Arial" pitchFamily="34" charset="0"/>
-                <a:ea typeface="Arial" pitchFamily="34" charset="-122"/>
-                <a:cs typeface="Arial" pitchFamily="34" charset="-120"/>
-              </a:rPr>
-              <a:t>The historical caveat — don't oversell.</a:t>
-            </a:r>
-            <a:pPr algn="l" indent="0" marL="0">
-              <a:lnSpc>
-                <a:spcPts val="1620"/>
-              </a:lnSpc>
-              <a:spcAft>
-                <a:spcPts val="300"/>
-              </a:spcAft>
-              <a:buNone/>
-            </a:pPr>
-            <a:r>
-              <a:rPr lang="en-US" sz="1200" dirty="0">
-                <a:solidFill>
-                  <a:srgbClr val="1C2833"/>
-                </a:solidFill>
-                <a:latin typeface="Arial" pitchFamily="34" charset="0"/>
-                <a:ea typeface="Arial" pitchFamily="34" charset="-122"/>
-                <a:cs typeface="Arial" pitchFamily="34" charset="-120"/>
-              </a:rPr>
-              <a:t> Plenty of pre-modern Indian rulers cleared forests, drained tanks, and treated land as something to extract from. The phrase is an </a:t>
-            </a:r>
-            <a:pPr algn="l" indent="0" marL="0">
-              <a:lnSpc>
-                <a:spcPts val="1620"/>
-              </a:lnSpc>
-              <a:spcAft>
-                <a:spcPts val="300"/>
-              </a:spcAft>
-              <a:buNone/>
-            </a:pPr>
-            <a:r>
-              <a:rPr lang="en-US" sz="1200" i="1" dirty="0">
-                <a:solidFill>
-                  <a:srgbClr val="1C2833"/>
-                </a:solidFill>
-                <a:latin typeface="Arial" pitchFamily="34" charset="0"/>
-                <a:ea typeface="Arial" pitchFamily="34" charset="-122"/>
-                <a:cs typeface="Arial" pitchFamily="34" charset="-120"/>
-              </a:rPr>
-              <a:t>ideal</a:t>
-            </a:r>
-            <a:pPr algn="l" indent="0" marL="0">
-              <a:lnSpc>
-                <a:spcPts val="1620"/>
-              </a:lnSpc>
-              <a:spcAft>
-                <a:spcPts val="300"/>
-              </a:spcAft>
-              <a:buNone/>
-            </a:pPr>
-            <a:r>
-              <a:rPr lang="en-US" sz="1200" dirty="0">
-                <a:solidFill>
-                  <a:srgbClr val="1C2833"/>
-                </a:solidFill>
-                <a:latin typeface="Arial" pitchFamily="34" charset="0"/>
-                <a:ea typeface="Arial" pitchFamily="34" charset="-122"/>
-                <a:cs typeface="Arial" pitchFamily="34" charset="-120"/>
-              </a:rPr>
-              <a:t> the tradition put forward, not a description of how everyone actually behaved. We'll keep this honest throughout the module.</a:t>
-            </a:r>
-            <a:endParaRPr lang="en-US" sz="1200" dirty="0"/>
-          </a:p>
-        </p:txBody>
-      </p:sp>
-      <p:sp>
-        <p:nvSpPr>
-          <p:cNvPr id="11" name="Text 9"/>
-          <p:cNvSpPr/>
-          <p:nvPr/>
-        </p:nvSpPr>
-        <p:spPr>
-          <a:xfrm>
-            <a:off x="406301" y="5103614"/>
+            <a:off x="406301" y="4434929"/>
             <a:ext cx="8498026" cy="213271"/>
           </a:xfrm>
           <a:prstGeom prst="rect">
@@ -5873,7 +7358,7 @@
                 <a:ea typeface="Georgia" pitchFamily="34" charset="-122"/>
                 <a:cs typeface="Georgia" pitchFamily="34" charset="-120"/>
               </a:rPr>
-              <a:t>Activity (15 min) — The "extended family" chart</a:t>
+              <a:t>Core (20 min)</a:t>
             </a:r>
             <a:endParaRPr lang="en-US" sz="1800" dirty="0"/>
           </a:p>
@@ -5887,8 +7372,8 @@
         </p:nvSpPr>
         <p:spPr>
           <a:xfrm>
-            <a:off x="406301" y="870942"/>
-            <a:ext cx="8498026" cy="853083"/>
+            <a:off x="634901" y="883593"/>
+            <a:ext cx="8102798" cy="281880"/>
           </a:xfrm>
           <a:prstGeom prst="rect">
             <a:avLst/>
@@ -5900,13 +7385,31 @@
           <a:bodyPr wrap="square" lIns="0" tIns="0" rIns="0" bIns="0" rtlCol="0" anchor="t"/>
           <a:lstStyle/>
           <a:p>
-            <a:pPr algn="l" indent="0" marL="0">
-              <a:lnSpc>
-                <a:spcPts val="1680"/>
-              </a:lnSpc>
-              <a:spcBef>
-                <a:spcPts val="300"/>
-              </a:spcBef>
+            <a:pPr algn="l" marL="342900" indent="-342900">
+              <a:lnSpc>
+                <a:spcPts val="1620"/>
+              </a:lnSpc>
+              <a:spcAft>
+                <a:spcPts val="300"/>
+              </a:spcAft>
+              <a:buSzPct val="100000"/>
+              <a:buChar char="•"/>
+            </a:pPr>
+            <a:r>
+              <a:rPr lang="en-US" sz="1200" b="1" dirty="0">
+                <a:solidFill>
+                  <a:srgbClr val="1C2833"/>
+                </a:solidFill>
+                <a:latin typeface="Arial" pitchFamily="34" charset="0"/>
+                <a:ea typeface="Arial" pitchFamily="34" charset="-122"/>
+                <a:cs typeface="Arial" pitchFamily="34" charset="-120"/>
+              </a:rPr>
+              <a:t>Write the phrase on the board</a:t>
+            </a:r>
+            <a:pPr algn="l" indent="0" marL="0">
+              <a:lnSpc>
+                <a:spcPts val="1620"/>
+              </a:lnSpc>
               <a:spcAft>
                 <a:spcPts val="300"/>
               </a:spcAft>
@@ -5921,53 +7424,7 @@
                 <a:ea typeface="Arial" pitchFamily="34" charset="-122"/>
                 <a:cs typeface="Arial" pitchFamily="34" charset="-120"/>
               </a:rPr>
-              <a:t>– Pairs work together. Each pair gets a fresh sticky-note pad. – Prompt: </a:t>
-            </a:r>
-            <a:pPr algn="l" indent="0" marL="0">
-              <a:lnSpc>
-                <a:spcPts val="1680"/>
-              </a:lnSpc>
-              <a:spcBef>
-                <a:spcPts val="300"/>
-              </a:spcBef>
-              <a:spcAft>
-                <a:spcPts val="300"/>
-              </a:spcAft>
-              <a:buNone/>
-            </a:pPr>
-            <a:r>
-              <a:rPr lang="en-US" sz="1200" i="1" dirty="0">
-                <a:solidFill>
-                  <a:srgbClr val="1C2833"/>
-                </a:solidFill>
-                <a:latin typeface="Arial" pitchFamily="34" charset="0"/>
-                <a:ea typeface="Arial" pitchFamily="34" charset="-122"/>
-                <a:cs typeface="Arial" pitchFamily="34" charset="-120"/>
-              </a:rPr>
-              <a:t>"Add 5 non-human things to the family chart — but only ones you have personally encountered. Not 'the Amazon rainforest' if you haven't been there. The neem tree by the gate counts. The mango you ate at lunch counts. The pigeon on your roof counts."</a:t>
-            </a:r>
-            <a:pPr algn="l" indent="0" marL="0">
-              <a:lnSpc>
-                <a:spcPts val="1680"/>
-              </a:lnSpc>
-              <a:spcBef>
-                <a:spcPts val="300"/>
-              </a:spcBef>
-              <a:spcAft>
-                <a:spcPts val="300"/>
-              </a:spcAft>
-              <a:buNone/>
-            </a:pPr>
-            <a:r>
-              <a:rPr lang="en-US" sz="1200" dirty="0">
-                <a:solidFill>
-                  <a:srgbClr val="1C2833"/>
-                </a:solidFill>
-                <a:latin typeface="Arial" pitchFamily="34" charset="0"/>
-                <a:ea typeface="Arial" pitchFamily="34" charset="-122"/>
-                <a:cs typeface="Arial" pitchFamily="34" charset="-120"/>
-              </a:rPr>
-              <a:t> – After 5 min, each pair sticks their notes on the chart. The chart now has ~70–80 sticky notes, mostly non-human.</a:t>
+              <a:t> in Devanāgarī, then IAST, then word-by-word translation:</a:t>
             </a:r>
             <a:endParaRPr lang="en-US" sz="1200" dirty="0"/>
           </a:p>
@@ -5981,8 +7438,61 @@
         </p:nvSpPr>
         <p:spPr>
           <a:xfrm>
-            <a:off x="634901" y="1812875"/>
-            <a:ext cx="8102798" cy="487561"/>
+            <a:off x="406301" y="1266974"/>
+            <a:ext cx="8331398" cy="611981"/>
+          </a:xfrm>
+          <a:prstGeom prst="rect">
+            <a:avLst/>
+          </a:prstGeom>
+          <a:solidFill>
+            <a:srgbClr val="F4F8F9"/>
+          </a:solidFill>
+          <a:ln/>
+        </p:spPr>
+        <p:txBody>
+          <a:bodyPr wrap="square" rtlCol="0" anchor="ctr"/>
+          <a:lstStyle/>
+          <a:p>
+            <a:pPr indent="0" marL="0">
+              <a:buNone/>
+            </a:pPr>
+            <a:endParaRPr lang="en-US" dirty="0"/>
+          </a:p>
+        </p:txBody>
+      </p:sp>
+      <p:sp>
+        <p:nvSpPr>
+          <p:cNvPr id="6" name="Shape 4"/>
+          <p:cNvSpPr/>
+          <p:nvPr/>
+        </p:nvSpPr>
+        <p:spPr>
+          <a:xfrm>
+            <a:off x="434876" y="1266974"/>
+            <a:ext cx="0" cy="611981"/>
+          </a:xfrm>
+          <a:prstGeom prst="line">
+            <a:avLst/>
+          </a:prstGeom>
+          <a:noFill/>
+          <a:ln w="57150">
+            <a:solidFill>
+              <a:srgbClr val="FE4447"/>
+            </a:solidFill>
+            <a:prstDash val="solid"/>
+          </a:ln>
+        </p:spPr>
+      </p:sp>
+      <p:sp>
+        <p:nvSpPr>
+          <p:cNvPr id="7" name="Text 5"/>
+          <p:cNvSpPr/>
+          <p:nvPr/>
+        </p:nvSpPr>
+        <p:spPr>
+          <a:xfrm>
+            <a:off x="692051" y="1457474"/>
+            <a:ext cx="7973389" cy="230981"/>
           </a:xfrm>
           <a:prstGeom prst="rect">
             <a:avLst/>
@@ -5994,6 +7504,100 @@
           <a:bodyPr wrap="square" lIns="0" tIns="0" rIns="0" bIns="0" rtlCol="0" anchor="t"/>
           <a:lstStyle/>
           <a:p>
+            <a:pPr algn="l" indent="0" marL="0">
+              <a:lnSpc>
+                <a:spcPts val="1820"/>
+              </a:lnSpc>
+              <a:spcBef>
+                <a:spcPts val="300"/>
+              </a:spcBef>
+              <a:spcAft>
+                <a:spcPts val="300"/>
+              </a:spcAft>
+              <a:buNone/>
+            </a:pPr>
+            <a:r>
+              <a:rPr lang="en-US" sz="1300" dirty="0">
+                <a:solidFill>
+                  <a:srgbClr val="1C2833"/>
+                </a:solidFill>
+                <a:latin typeface="Georgia" pitchFamily="34" charset="0"/>
+                <a:ea typeface="Georgia" pitchFamily="34" charset="-122"/>
+                <a:cs typeface="Georgia" pitchFamily="34" charset="-120"/>
+              </a:rPr>
+              <a:t>वसुधैव कुटुम्बकम् — </a:t>
+            </a:r>
+            <a:pPr algn="l" indent="0" marL="0">
+              <a:lnSpc>
+                <a:spcPts val="1820"/>
+              </a:lnSpc>
+              <a:spcBef>
+                <a:spcPts val="300"/>
+              </a:spcBef>
+              <a:spcAft>
+                <a:spcPts val="300"/>
+              </a:spcAft>
+              <a:buNone/>
+            </a:pPr>
+            <a:r>
+              <a:rPr lang="en-US" sz="1300" i="1" dirty="0">
+                <a:solidFill>
+                  <a:srgbClr val="1C2833"/>
+                </a:solidFill>
+                <a:latin typeface="Georgia" pitchFamily="34" charset="0"/>
+                <a:ea typeface="Georgia" pitchFamily="34" charset="-122"/>
+                <a:cs typeface="Georgia" pitchFamily="34" charset="-120"/>
+              </a:rPr>
+              <a:t>vasudhaiva kuṭumbakam</a:t>
+            </a:r>
+            <a:pPr algn="l" indent="0" marL="0">
+              <a:lnSpc>
+                <a:spcPts val="1820"/>
+              </a:lnSpc>
+              <a:spcBef>
+                <a:spcPts val="300"/>
+              </a:spcBef>
+              <a:spcAft>
+                <a:spcPts val="300"/>
+              </a:spcAft>
+              <a:buNone/>
+            </a:pPr>
+            <a:r>
+              <a:rPr lang="en-US" sz="1300" dirty="0">
+                <a:solidFill>
+                  <a:srgbClr val="1C2833"/>
+                </a:solidFill>
+                <a:latin typeface="Georgia" pitchFamily="34" charset="0"/>
+                <a:ea typeface="Georgia" pitchFamily="34" charset="-122"/>
+                <a:cs typeface="Georgia" pitchFamily="34" charset="-120"/>
+              </a:rPr>
+              <a:t> — "the Earth itself is one family."</a:t>
+            </a:r>
+            <a:endParaRPr lang="en-US" sz="1300" dirty="0"/>
+          </a:p>
+        </p:txBody>
+      </p:sp>
+      <p:sp>
+        <p:nvSpPr>
+          <p:cNvPr id="8" name="Text 6"/>
+          <p:cNvSpPr/>
+          <p:nvPr/>
+        </p:nvSpPr>
+        <p:spPr>
+          <a:xfrm>
+            <a:off x="634901" y="1980456"/>
+            <a:ext cx="8102798" cy="281880"/>
+          </a:xfrm>
+          <a:prstGeom prst="rect">
+            <a:avLst/>
+          </a:prstGeom>
+          <a:noFill/>
+          <a:ln/>
+        </p:spPr>
+        <p:txBody>
+          <a:bodyPr wrap="square" lIns="0" tIns="0" rIns="0" bIns="0" rtlCol="0" anchor="t"/>
+          <a:lstStyle/>
+          <a:p>
             <a:pPr algn="l" marL="342900" indent="-342900">
               <a:lnSpc>
                 <a:spcPts val="1620"/>
@@ -6013,7 +7617,7 @@
                 <a:ea typeface="Arial" pitchFamily="34" charset="-122"/>
                 <a:cs typeface="Arial" pitchFamily="34" charset="-120"/>
               </a:rPr>
-              <a:t>Discussion (5 min):</a:t>
+              <a:t>The fuller verse.</a:t>
             </a:r>
             <a:pPr algn="l" indent="0" marL="0">
               <a:lnSpc>
@@ -6033,47 +7637,7 @@
                 <a:ea typeface="Arial" pitchFamily="34" charset="-122"/>
                 <a:cs typeface="Arial" pitchFamily="34" charset="-120"/>
               </a:rPr>
-              <a:t> </a:t>
-            </a:r>
-            <a:pPr algn="l" indent="0" marL="0">
-              <a:lnSpc>
-                <a:spcPts val="1620"/>
-              </a:lnSpc>
-              <a:spcAft>
-                <a:spcPts val="300"/>
-              </a:spcAft>
-              <a:buNone/>
-            </a:pPr>
-            <a:r>
-              <a:rPr lang="en-US" sz="1200" i="1" dirty="0">
-                <a:solidFill>
-                  <a:srgbClr val="1C2833"/>
-                </a:solidFill>
-                <a:latin typeface="Arial" pitchFamily="34" charset="0"/>
-                <a:ea typeface="Arial" pitchFamily="34" charset="-122"/>
-                <a:cs typeface="Arial" pitchFamily="34" charset="-120"/>
-              </a:rPr>
-              <a:t>"Look at this chart. If treating these as 'family' is what the verse asks, what would change about how you behave?"</a:t>
-            </a:r>
-            <a:pPr algn="l" indent="0" marL="0">
-              <a:lnSpc>
-                <a:spcPts val="1620"/>
-              </a:lnSpc>
-              <a:spcAft>
-                <a:spcPts val="300"/>
-              </a:spcAft>
-              <a:buNone/>
-            </a:pPr>
-            <a:r>
-              <a:rPr lang="en-US" sz="1200" dirty="0">
-                <a:solidFill>
-                  <a:srgbClr val="1C2833"/>
-                </a:solidFill>
-                <a:latin typeface="Arial" pitchFamily="34" charset="0"/>
-                <a:ea typeface="Arial" pitchFamily="34" charset="-122"/>
-                <a:cs typeface="Arial" pitchFamily="34" charset="-120"/>
-              </a:rPr>
-              <a:t> (Sample answers: not littering, not killing things for no reason, knowing names, paying attention.)</a:t>
+              <a:t> Read the whole half-verse from the handout:</a:t>
             </a:r>
             <a:endParaRPr lang="en-US" sz="1200" dirty="0"/>
           </a:p>
@@ -6081,7 +7645,7 @@
       </p:sp>
       <p:sp>
         <p:nvSpPr>
-          <p:cNvPr id="6" name="Text 4"/>
+          <p:cNvPr id="9" name="Text 7"/>
           <p:cNvSpPr/>
           <p:nvPr/>
         </p:nvSpPr>
@@ -6231,7 +7795,7 @@
                 <a:ea typeface="Georgia" pitchFamily="34" charset="-122"/>
                 <a:cs typeface="Georgia" pitchFamily="34" charset="-120"/>
               </a:rPr>
-              <a:t>Wrap-up (5 min)</a:t>
+              <a:t>Core (20 min) (cont.)</a:t>
             </a:r>
             <a:endParaRPr lang="en-US" sz="1800" dirty="0"/>
           </a:p>
@@ -6245,8 +7809,61 @@
         </p:nvSpPr>
         <p:spPr>
           <a:xfrm>
-            <a:off x="406301" y="870942"/>
-            <a:ext cx="8498026" cy="639812"/>
+            <a:off x="406301" y="883593"/>
+            <a:ext cx="8331398" cy="1112044"/>
+          </a:xfrm>
+          <a:prstGeom prst="rect">
+            <a:avLst/>
+          </a:prstGeom>
+          <a:solidFill>
+            <a:srgbClr val="F4F8F9"/>
+          </a:solidFill>
+          <a:ln/>
+        </p:spPr>
+        <p:txBody>
+          <a:bodyPr wrap="square" rtlCol="0" anchor="ctr"/>
+          <a:lstStyle/>
+          <a:p>
+            <a:pPr indent="0" marL="0">
+              <a:buNone/>
+            </a:pPr>
+            <a:endParaRPr lang="en-US" dirty="0"/>
+          </a:p>
+        </p:txBody>
+      </p:sp>
+      <p:sp>
+        <p:nvSpPr>
+          <p:cNvPr id="5" name="Shape 3"/>
+          <p:cNvSpPr/>
+          <p:nvPr/>
+        </p:nvSpPr>
+        <p:spPr>
+          <a:xfrm>
+            <a:off x="434876" y="883593"/>
+            <a:ext cx="0" cy="1112044"/>
+          </a:xfrm>
+          <a:prstGeom prst="line">
+            <a:avLst/>
+          </a:prstGeom>
+          <a:noFill/>
+          <a:ln w="57150">
+            <a:solidFill>
+              <a:srgbClr val="FE4447"/>
+            </a:solidFill>
+            <a:prstDash val="solid"/>
+          </a:ln>
+        </p:spPr>
+      </p:sp>
+      <p:sp>
+        <p:nvSpPr>
+          <p:cNvPr id="6" name="Text 4"/>
+          <p:cNvSpPr/>
+          <p:nvPr/>
+        </p:nvSpPr>
+        <p:spPr>
+          <a:xfrm>
+            <a:off x="692051" y="1074093"/>
+            <a:ext cx="7973389" cy="230981"/>
           </a:xfrm>
           <a:prstGeom prst="rect">
             <a:avLst/>
@@ -6260,7 +7877,7 @@
           <a:p>
             <a:pPr algn="l" indent="0" marL="0">
               <a:lnSpc>
-                <a:spcPts val="1680"/>
+                <a:spcPts val="1820"/>
               </a:lnSpc>
               <a:spcBef>
                 <a:spcPts val="300"/>
@@ -6271,19 +7888,44 @@
               <a:buNone/>
             </a:pPr>
             <a:r>
-              <a:rPr lang="en-US" sz="1200" dirty="0">
-                <a:solidFill>
-                  <a:srgbClr val="1C2833"/>
-                </a:solidFill>
-                <a:latin typeface="Arial" pitchFamily="34" charset="0"/>
-                <a:ea typeface="Arial" pitchFamily="34" charset="-122"/>
-                <a:cs typeface="Arial" pitchFamily="34" charset="-120"/>
-              </a:rPr>
-              <a:t>– One-sentence exit ticket on a slip of paper: </a:t>
-            </a:r>
-            <a:pPr algn="l" indent="0" marL="0">
-              <a:lnSpc>
-                <a:spcPts val="1680"/>
+              <a:rPr lang="en-US" sz="1300" i="1" dirty="0">
+                <a:solidFill>
+                  <a:srgbClr val="1C2833"/>
+                </a:solidFill>
+                <a:latin typeface="Georgia" pitchFamily="34" charset="0"/>
+                <a:ea typeface="Georgia" pitchFamily="34" charset="-122"/>
+                <a:cs typeface="Georgia" pitchFamily="34" charset="-120"/>
+              </a:rPr>
+              <a:t>ayaṁ nijaḥ paro veti gaṇanā laghu-cetasām / udāra-caritānāṁ tu vasudhaiva kuṭumbakam //</a:t>
+            </a:r>
+            <a:endParaRPr lang="en-US" sz="1300" dirty="0"/>
+          </a:p>
+        </p:txBody>
+      </p:sp>
+      <p:sp>
+        <p:nvSpPr>
+          <p:cNvPr id="7" name="Text 5"/>
+          <p:cNvSpPr/>
+          <p:nvPr/>
+        </p:nvSpPr>
+        <p:spPr>
+          <a:xfrm>
+            <a:off x="692051" y="1343174"/>
+            <a:ext cx="7973389" cy="461963"/>
+          </a:xfrm>
+          <a:prstGeom prst="rect">
+            <a:avLst/>
+          </a:prstGeom>
+          <a:noFill/>
+          <a:ln/>
+        </p:spPr>
+        <p:txBody>
+          <a:bodyPr wrap="square" lIns="0" tIns="0" rIns="0" bIns="0" rtlCol="0" anchor="t"/>
+          <a:lstStyle/>
+          <a:p>
+            <a:pPr algn="l" indent="0" marL="0">
+              <a:lnSpc>
+                <a:spcPts val="1820"/>
               </a:lnSpc>
               <a:spcBef>
                 <a:spcPts val="300"/>
@@ -6294,46 +7936,23 @@
               <a:buNone/>
             </a:pPr>
             <a:r>
-              <a:rPr lang="en-US" sz="1200" i="1" dirty="0">
-                <a:solidFill>
-                  <a:srgbClr val="1C2833"/>
-                </a:solidFill>
-                <a:latin typeface="Arial" pitchFamily="34" charset="0"/>
-                <a:ea typeface="Arial" pitchFamily="34" charset="-122"/>
-                <a:cs typeface="Arial" pitchFamily="34" charset="-120"/>
-              </a:rPr>
-              <a:t>"Write one non-human thing you now consider part of your extended family — and one specific behaviour that will change because of that."</a:t>
-            </a:r>
-            <a:pPr algn="l" indent="0" marL="0">
-              <a:lnSpc>
-                <a:spcPts val="1680"/>
-              </a:lnSpc>
-              <a:spcBef>
-                <a:spcPts val="300"/>
-              </a:spcBef>
-              <a:spcAft>
-                <a:spcPts val="300"/>
-              </a:spcAft>
-              <a:buNone/>
-            </a:pPr>
-            <a:r>
-              <a:rPr lang="en-US" sz="1200" dirty="0">
-                <a:solidFill>
-                  <a:srgbClr val="1C2833"/>
-                </a:solidFill>
-                <a:latin typeface="Arial" pitchFamily="34" charset="0"/>
-                <a:ea typeface="Arial" pitchFamily="34" charset="-122"/>
-                <a:cs typeface="Arial" pitchFamily="34" charset="-120"/>
-              </a:rPr>
-              <a:t> – Collect the slips. Read 3–4 anonymously at the start of Day 2.</a:t>
-            </a:r>
-            <a:endParaRPr lang="en-US" sz="1200" dirty="0"/>
-          </a:p>
-        </p:txBody>
-      </p:sp>
-      <p:sp>
-        <p:nvSpPr>
-          <p:cNvPr id="5" name="Text 3"/>
+              <a:rPr lang="en-US" sz="1300" i="1" dirty="0">
+                <a:solidFill>
+                  <a:srgbClr val="1C2833"/>
+                </a:solidFill>
+                <a:latin typeface="Georgia" pitchFamily="34" charset="0"/>
+                <a:ea typeface="Georgia" pitchFamily="34" charset="-122"/>
+                <a:cs typeface="Georgia" pitchFamily="34" charset="-120"/>
+              </a:rPr>
+              <a:t>"This is mine, that is theirs — such reckoning is for the small-minded. For those whose conduct is large, the whole earth is one family." — Mahā Upaniṣad 6.71–73</a:t>
+            </a:r>
+            <a:endParaRPr lang="en-US" sz="1300" dirty="0"/>
+          </a:p>
+        </p:txBody>
+      </p:sp>
+      <p:sp>
+        <p:nvSpPr>
+          <p:cNvPr id="8" name="Text 6"/>
           <p:cNvSpPr/>
           <p:nvPr/>
         </p:nvSpPr>
@@ -6483,7 +8102,7 @@
                 <a:ea typeface="Georgia" pitchFamily="34" charset="-122"/>
                 <a:cs typeface="Georgia" pitchFamily="34" charset="-120"/>
               </a:rPr>
-              <a:t>Student-facing content</a:t>
+              <a:t>Core (20 min) (cont.)</a:t>
             </a:r>
             <a:endParaRPr lang="en-US" sz="1800" dirty="0"/>
           </a:p>
@@ -6497,61 +8116,8 @@
         </p:nvSpPr>
         <p:spPr>
           <a:xfrm>
-            <a:off x="406301" y="883593"/>
-            <a:ext cx="8331398" cy="2843213"/>
-          </a:xfrm>
-          <a:prstGeom prst="rect">
-            <a:avLst/>
-          </a:prstGeom>
-          <a:solidFill>
-            <a:srgbClr val="F4F8F9"/>
-          </a:solidFill>
-          <a:ln/>
-        </p:spPr>
-        <p:txBody>
-          <a:bodyPr wrap="square" rtlCol="0" anchor="ctr"/>
-          <a:lstStyle/>
-          <a:p>
-            <a:pPr indent="0" marL="0">
-              <a:buNone/>
-            </a:pPr>
-            <a:endParaRPr lang="en-US" dirty="0"/>
-          </a:p>
-        </p:txBody>
-      </p:sp>
-      <p:sp>
-        <p:nvSpPr>
-          <p:cNvPr id="5" name="Shape 3"/>
-          <p:cNvSpPr/>
-          <p:nvPr/>
-        </p:nvSpPr>
-        <p:spPr>
-          <a:xfrm>
-            <a:off x="434876" y="883593"/>
-            <a:ext cx="0" cy="2843213"/>
-          </a:xfrm>
-          <a:prstGeom prst="line">
-            <a:avLst/>
-          </a:prstGeom>
-          <a:noFill/>
-          <a:ln w="57150">
-            <a:solidFill>
-              <a:srgbClr val="FE4447"/>
-            </a:solidFill>
-            <a:prstDash val="solid"/>
-          </a:ln>
-        </p:spPr>
-      </p:sp>
-      <p:sp>
-        <p:nvSpPr>
-          <p:cNvPr id="6" name="Text 4"/>
-          <p:cNvSpPr/>
-          <p:nvPr/>
-        </p:nvSpPr>
-        <p:spPr>
-          <a:xfrm>
-            <a:off x="692051" y="1074093"/>
-            <a:ext cx="7973389" cy="230981"/>
+            <a:off x="634901" y="883593"/>
+            <a:ext cx="8102798" cy="693241"/>
           </a:xfrm>
           <a:prstGeom prst="rect">
             <a:avLst/>
@@ -6563,435 +8129,214 @@
           <a:bodyPr wrap="square" lIns="0" tIns="0" rIns="0" bIns="0" rtlCol="0" anchor="t"/>
           <a:lstStyle/>
           <a:p>
-            <a:pPr algn="l" indent="0" marL="0">
-              <a:lnSpc>
-                <a:spcPts val="1820"/>
-              </a:lnSpc>
-              <a:spcBef>
-                <a:spcPts val="300"/>
-              </a:spcBef>
-              <a:spcAft>
-                <a:spcPts val="300"/>
-              </a:spcAft>
-              <a:buNone/>
-            </a:pPr>
-            <a:r>
-              <a:rPr lang="en-US" sz="1300" b="1" i="1" dirty="0">
-                <a:solidFill>
-                  <a:srgbClr val="1C2833"/>
-                </a:solidFill>
-                <a:latin typeface="Georgia" pitchFamily="34" charset="0"/>
-                <a:ea typeface="Georgia" pitchFamily="34" charset="-122"/>
-                <a:cs typeface="Georgia" pitchFamily="34" charset="-120"/>
-              </a:rPr>
-              <a:t>Vasudhaiva Kuṭumbakam</a:t>
-            </a:r>
-            <a:pPr algn="l" indent="0" marL="0">
-              <a:lnSpc>
-                <a:spcPts val="1820"/>
-              </a:lnSpc>
-              <a:spcBef>
-                <a:spcPts val="300"/>
-              </a:spcBef>
-              <a:spcAft>
-                <a:spcPts val="300"/>
-              </a:spcAft>
-              <a:buNone/>
-            </a:pPr>
-            <a:r>
-              <a:rPr lang="en-US" sz="1300" dirty="0">
-                <a:solidFill>
-                  <a:srgbClr val="1C2833"/>
-                </a:solidFill>
-                <a:latin typeface="Georgia" pitchFamily="34" charset="0"/>
-                <a:ea typeface="Georgia" pitchFamily="34" charset="-122"/>
-                <a:cs typeface="Georgia" pitchFamily="34" charset="-120"/>
-              </a:rPr>
-              <a:t> — "the Earth itself is one family."</a:t>
-            </a:r>
-            <a:endParaRPr lang="en-US" sz="1300" dirty="0"/>
-          </a:p>
-        </p:txBody>
-      </p:sp>
-      <p:sp>
-        <p:nvSpPr>
-          <p:cNvPr id="7" name="Text 5"/>
-          <p:cNvSpPr/>
-          <p:nvPr/>
-        </p:nvSpPr>
-        <p:spPr>
-          <a:xfrm>
-            <a:off x="692051" y="1343174"/>
-            <a:ext cx="7973389" cy="692944"/>
-          </a:xfrm>
-          <a:prstGeom prst="rect">
-            <a:avLst/>
-          </a:prstGeom>
-          <a:noFill/>
-          <a:ln/>
-        </p:spPr>
-        <p:txBody>
-          <a:bodyPr wrap="square" lIns="0" tIns="0" rIns="0" bIns="0" rtlCol="0" anchor="t"/>
-          <a:lstStyle/>
-          <a:p>
-            <a:pPr algn="l" indent="0" marL="0">
-              <a:lnSpc>
-                <a:spcPts val="1820"/>
-              </a:lnSpc>
-              <a:spcBef>
-                <a:spcPts val="300"/>
-              </a:spcBef>
-              <a:spcAft>
-                <a:spcPts val="300"/>
-              </a:spcAft>
-              <a:buNone/>
-            </a:pPr>
-            <a:r>
-              <a:rPr lang="en-US" sz="1300" dirty="0">
-                <a:solidFill>
-                  <a:srgbClr val="1C2833"/>
-                </a:solidFill>
-                <a:latin typeface="Georgia" pitchFamily="34" charset="0"/>
-                <a:ea typeface="Georgia" pitchFamily="34" charset="-122"/>
-                <a:cs typeface="Georgia" pitchFamily="34" charset="-120"/>
-              </a:rPr>
-              <a:t>A line from the </a:t>
-            </a:r>
-            <a:pPr algn="l" indent="0" marL="0">
-              <a:lnSpc>
-                <a:spcPts val="1820"/>
-              </a:lnSpc>
-              <a:spcBef>
-                <a:spcPts val="300"/>
-              </a:spcBef>
-              <a:spcAft>
-                <a:spcPts val="300"/>
-              </a:spcAft>
-              <a:buNone/>
-            </a:pPr>
-            <a:r>
-              <a:rPr lang="en-US" sz="1300" i="1" dirty="0">
-                <a:solidFill>
-                  <a:srgbClr val="1C2833"/>
-                </a:solidFill>
-                <a:latin typeface="Georgia" pitchFamily="34" charset="0"/>
-                <a:ea typeface="Georgia" pitchFamily="34" charset="-122"/>
-                <a:cs typeface="Georgia" pitchFamily="34" charset="-120"/>
-              </a:rPr>
-              <a:t>Mahā Upaniṣad</a:t>
-            </a:r>
-            <a:pPr algn="l" indent="0" marL="0">
-              <a:lnSpc>
-                <a:spcPts val="1820"/>
-              </a:lnSpc>
-              <a:spcBef>
-                <a:spcPts val="300"/>
-              </a:spcBef>
-              <a:spcAft>
-                <a:spcPts val="300"/>
-              </a:spcAft>
-              <a:buNone/>
-            </a:pPr>
-            <a:r>
-              <a:rPr lang="en-US" sz="1300" dirty="0">
-                <a:solidFill>
-                  <a:srgbClr val="1C2833"/>
-                </a:solidFill>
-                <a:latin typeface="Georgia" pitchFamily="34" charset="0"/>
-                <a:ea typeface="Georgia" pitchFamily="34" charset="-122"/>
-                <a:cs typeface="Georgia" pitchFamily="34" charset="-120"/>
-              </a:rPr>
-              <a:t> (chapter 6, verses 71–73). It is also quoted in the </a:t>
-            </a:r>
-            <a:pPr algn="l" indent="0" marL="0">
-              <a:lnSpc>
-                <a:spcPts val="1820"/>
-              </a:lnSpc>
-              <a:spcBef>
-                <a:spcPts val="300"/>
-              </a:spcBef>
-              <a:spcAft>
-                <a:spcPts val="300"/>
-              </a:spcAft>
-              <a:buNone/>
-            </a:pPr>
-            <a:r>
-              <a:rPr lang="en-US" sz="1300" i="1" dirty="0">
-                <a:solidFill>
-                  <a:srgbClr val="1C2833"/>
-                </a:solidFill>
-                <a:latin typeface="Georgia" pitchFamily="34" charset="0"/>
-                <a:ea typeface="Georgia" pitchFamily="34" charset="-122"/>
-                <a:cs typeface="Georgia" pitchFamily="34" charset="-120"/>
-              </a:rPr>
-              <a:t>Pañcatantra</a:t>
-            </a:r>
-            <a:pPr algn="l" indent="0" marL="0">
-              <a:lnSpc>
-                <a:spcPts val="1820"/>
-              </a:lnSpc>
-              <a:spcBef>
-                <a:spcPts val="300"/>
-              </a:spcBef>
-              <a:spcAft>
-                <a:spcPts val="300"/>
-              </a:spcAft>
-              <a:buNone/>
-            </a:pPr>
-            <a:r>
-              <a:rPr lang="en-US" sz="1300" dirty="0">
-                <a:solidFill>
-                  <a:srgbClr val="1C2833"/>
-                </a:solidFill>
-                <a:latin typeface="Georgia" pitchFamily="34" charset="0"/>
-                <a:ea typeface="Georgia" pitchFamily="34" charset="-122"/>
-                <a:cs typeface="Georgia" pitchFamily="34" charset="-120"/>
-              </a:rPr>
-              <a:t> and the </a:t>
-            </a:r>
-            <a:pPr algn="l" indent="0" marL="0">
-              <a:lnSpc>
-                <a:spcPts val="1820"/>
-              </a:lnSpc>
-              <a:spcBef>
-                <a:spcPts val="300"/>
-              </a:spcBef>
-              <a:spcAft>
-                <a:spcPts val="300"/>
-              </a:spcAft>
-              <a:buNone/>
-            </a:pPr>
-            <a:r>
-              <a:rPr lang="en-US" sz="1300" i="1" dirty="0">
-                <a:solidFill>
-                  <a:srgbClr val="1C2833"/>
-                </a:solidFill>
-                <a:latin typeface="Georgia" pitchFamily="34" charset="0"/>
-                <a:ea typeface="Georgia" pitchFamily="34" charset="-122"/>
-                <a:cs typeface="Georgia" pitchFamily="34" charset="-120"/>
-              </a:rPr>
-              <a:t>Hitopadeśa</a:t>
-            </a:r>
-            <a:pPr algn="l" indent="0" marL="0">
-              <a:lnSpc>
-                <a:spcPts val="1820"/>
-              </a:lnSpc>
-              <a:spcBef>
-                <a:spcPts val="300"/>
-              </a:spcBef>
-              <a:spcAft>
-                <a:spcPts val="300"/>
-              </a:spcAft>
-              <a:buNone/>
-            </a:pPr>
-            <a:r>
-              <a:rPr lang="en-US" sz="1300" dirty="0">
-                <a:solidFill>
-                  <a:srgbClr val="1C2833"/>
-                </a:solidFill>
-                <a:latin typeface="Georgia" pitchFamily="34" charset="0"/>
-                <a:ea typeface="Georgia" pitchFamily="34" charset="-122"/>
-                <a:cs typeface="Georgia" pitchFamily="34" charset="-120"/>
-              </a:rPr>
-              <a:t>. It became the motto of India's Parliament hall and the theme of the country's G20 presidency in 2023.</a:t>
-            </a:r>
-            <a:endParaRPr lang="en-US" sz="1300" dirty="0"/>
-          </a:p>
-        </p:txBody>
-      </p:sp>
-      <p:sp>
-        <p:nvSpPr>
-          <p:cNvPr id="8" name="Text 6"/>
-          <p:cNvSpPr/>
-          <p:nvPr/>
-        </p:nvSpPr>
-        <p:spPr>
-          <a:xfrm>
-            <a:off x="692051" y="2074218"/>
-            <a:ext cx="7973389" cy="230981"/>
-          </a:xfrm>
-          <a:prstGeom prst="rect">
-            <a:avLst/>
-          </a:prstGeom>
-          <a:noFill/>
-          <a:ln/>
-        </p:spPr>
-        <p:txBody>
-          <a:bodyPr wrap="square" lIns="0" tIns="0" rIns="0" bIns="0" rtlCol="0" anchor="t"/>
-          <a:lstStyle/>
-          <a:p>
-            <a:pPr algn="l" indent="0" marL="0">
-              <a:lnSpc>
-                <a:spcPts val="1820"/>
-              </a:lnSpc>
-              <a:spcBef>
-                <a:spcPts val="300"/>
-              </a:spcBef>
-              <a:spcAft>
-                <a:spcPts val="300"/>
-              </a:spcAft>
-              <a:buNone/>
-            </a:pPr>
-            <a:r>
-              <a:rPr lang="en-US" sz="1300" i="1" dirty="0">
-                <a:solidFill>
-                  <a:srgbClr val="1C2833"/>
-                </a:solidFill>
-                <a:latin typeface="Georgia" pitchFamily="34" charset="0"/>
-                <a:ea typeface="Georgia" pitchFamily="34" charset="-122"/>
-                <a:cs typeface="Georgia" pitchFamily="34" charset="-120"/>
-              </a:rPr>
-              <a:t>The full half-verse:</a:t>
-            </a:r>
-            <a:endParaRPr lang="en-US" sz="1300" dirty="0"/>
-          </a:p>
-        </p:txBody>
-      </p:sp>
-      <p:sp>
-        <p:nvSpPr>
-          <p:cNvPr id="9" name="Text 7"/>
-          <p:cNvSpPr/>
-          <p:nvPr/>
-        </p:nvSpPr>
-        <p:spPr>
-          <a:xfrm>
-            <a:off x="692051" y="2343299"/>
-            <a:ext cx="7973389" cy="461963"/>
-          </a:xfrm>
-          <a:prstGeom prst="rect">
-            <a:avLst/>
-          </a:prstGeom>
-          <a:noFill/>
-          <a:ln/>
-        </p:spPr>
-        <p:txBody>
-          <a:bodyPr wrap="square" lIns="0" tIns="0" rIns="0" bIns="0" rtlCol="0" anchor="t"/>
-          <a:lstStyle/>
-          <a:p>
-            <a:pPr algn="l" indent="0" marL="0">
-              <a:lnSpc>
-                <a:spcPts val="1820"/>
-              </a:lnSpc>
-              <a:spcBef>
-                <a:spcPts val="300"/>
-              </a:spcBef>
-              <a:spcAft>
-                <a:spcPts val="300"/>
-              </a:spcAft>
-              <a:buNone/>
-            </a:pPr>
-            <a:r>
-              <a:rPr lang="en-US" sz="1300" i="1" dirty="0">
-                <a:solidFill>
-                  <a:srgbClr val="1C2833"/>
-                </a:solidFill>
-                <a:latin typeface="Georgia" pitchFamily="34" charset="0"/>
-                <a:ea typeface="Georgia" pitchFamily="34" charset="-122"/>
-                <a:cs typeface="Georgia" pitchFamily="34" charset="-120"/>
-              </a:rPr>
-              <a:t>&gt; "This is mine, that is theirs — such reckoning is for the small-minded. &gt; For those whose conduct is large, the whole earth is one family."</a:t>
-            </a:r>
-            <a:endParaRPr lang="en-US" sz="1300" dirty="0"/>
-          </a:p>
-        </p:txBody>
-      </p:sp>
-      <p:sp>
-        <p:nvSpPr>
-          <p:cNvPr id="10" name="Text 8"/>
-          <p:cNvSpPr/>
-          <p:nvPr/>
-        </p:nvSpPr>
-        <p:spPr>
-          <a:xfrm>
-            <a:off x="692051" y="2843361"/>
-            <a:ext cx="7973389" cy="692944"/>
-          </a:xfrm>
-          <a:prstGeom prst="rect">
-            <a:avLst/>
-          </a:prstGeom>
-          <a:noFill/>
-          <a:ln/>
-        </p:spPr>
-        <p:txBody>
-          <a:bodyPr wrap="square" lIns="0" tIns="0" rIns="0" bIns="0" rtlCol="0" anchor="t"/>
-          <a:lstStyle/>
-          <a:p>
-            <a:pPr algn="l" indent="0" marL="0">
-              <a:lnSpc>
-                <a:spcPts val="1820"/>
-              </a:lnSpc>
-              <a:spcBef>
-                <a:spcPts val="300"/>
-              </a:spcBef>
-              <a:spcAft>
-                <a:spcPts val="300"/>
-              </a:spcAft>
-              <a:buNone/>
-            </a:pPr>
-            <a:r>
-              <a:rPr lang="en-US" sz="1300" dirty="0">
-                <a:solidFill>
-                  <a:srgbClr val="1C2833"/>
-                </a:solidFill>
-                <a:latin typeface="Georgia" pitchFamily="34" charset="0"/>
-                <a:ea typeface="Georgia" pitchFamily="34" charset="-122"/>
-                <a:cs typeface="Georgia" pitchFamily="34" charset="-120"/>
-              </a:rPr>
-              <a:t>The verse is an </a:t>
-            </a:r>
-            <a:pPr algn="l" indent="0" marL="0">
-              <a:lnSpc>
-                <a:spcPts val="1820"/>
-              </a:lnSpc>
-              <a:spcBef>
-                <a:spcPts val="300"/>
-              </a:spcBef>
-              <a:spcAft>
-                <a:spcPts val="300"/>
-              </a:spcAft>
-              <a:buNone/>
-            </a:pPr>
-            <a:r>
-              <a:rPr lang="en-US" sz="1300" b="1" i="1" dirty="0">
-                <a:solidFill>
-                  <a:srgbClr val="1C2833"/>
-                </a:solidFill>
-                <a:latin typeface="Georgia" pitchFamily="34" charset="0"/>
-                <a:ea typeface="Georgia" pitchFamily="34" charset="-122"/>
-                <a:cs typeface="Georgia" pitchFamily="34" charset="-120"/>
-              </a:rPr>
-              <a:t>ethic</a:t>
-            </a:r>
-            <a:pPr algn="l" indent="0" marL="0">
-              <a:lnSpc>
-                <a:spcPts val="1820"/>
-              </a:lnSpc>
-              <a:spcBef>
-                <a:spcPts val="300"/>
-              </a:spcBef>
-              <a:spcAft>
-                <a:spcPts val="300"/>
-              </a:spcAft>
-              <a:buNone/>
-            </a:pPr>
-            <a:r>
-              <a:rPr lang="en-US" sz="1300" dirty="0">
-                <a:solidFill>
-                  <a:srgbClr val="1C2833"/>
-                </a:solidFill>
-                <a:latin typeface="Georgia" pitchFamily="34" charset="0"/>
-                <a:ea typeface="Georgia" pitchFamily="34" charset="-122"/>
-                <a:cs typeface="Georgia" pitchFamily="34" charset="-120"/>
-              </a:rPr>
-              <a:t>, not a biological claim. It tells you what to do, not what is. The next nine days are about what an ecological ethic of "family" actually looks like in practice — in your river, in your trees, in your habits.</a:t>
-            </a:r>
-            <a:endParaRPr lang="en-US" sz="1300" dirty="0"/>
-          </a:p>
-        </p:txBody>
-      </p:sp>
-      <p:sp>
-        <p:nvSpPr>
-          <p:cNvPr id="11" name="Text 9"/>
+            <a:pPr algn="l" marL="342900" indent="-342900">
+              <a:lnSpc>
+                <a:spcPts val="1620"/>
+              </a:lnSpc>
+              <a:spcAft>
+                <a:spcPts val="300"/>
+              </a:spcAft>
+              <a:buSzPct val="100000"/>
+              <a:buChar char="•"/>
+            </a:pPr>
+            <a:r>
+              <a:rPr lang="en-US" sz="1200" b="1" dirty="0">
+                <a:solidFill>
+                  <a:srgbClr val="1C2833"/>
+                </a:solidFill>
+                <a:latin typeface="Arial" pitchFamily="34" charset="0"/>
+                <a:ea typeface="Arial" pitchFamily="34" charset="-122"/>
+                <a:cs typeface="Arial" pitchFamily="34" charset="-120"/>
+              </a:rPr>
+              <a:t>Notice the structure.</a:t>
+            </a:r>
+            <a:pPr algn="l" indent="0" marL="0">
+              <a:lnSpc>
+                <a:spcPts val="1620"/>
+              </a:lnSpc>
+              <a:spcAft>
+                <a:spcPts val="300"/>
+              </a:spcAft>
+              <a:buNone/>
+            </a:pPr>
+            <a:r>
+              <a:rPr lang="en-US" sz="1200" dirty="0">
+                <a:solidFill>
+                  <a:srgbClr val="1C2833"/>
+                </a:solidFill>
+                <a:latin typeface="Arial" pitchFamily="34" charset="0"/>
+                <a:ea typeface="Arial" pitchFamily="34" charset="-122"/>
+                <a:cs typeface="Arial" pitchFamily="34" charset="-120"/>
+              </a:rPr>
+              <a:t> It is a </a:t>
+            </a:r>
+            <a:pPr algn="l" indent="0" marL="0">
+              <a:lnSpc>
+                <a:spcPts val="1620"/>
+              </a:lnSpc>
+              <a:spcAft>
+                <a:spcPts val="300"/>
+              </a:spcAft>
+              <a:buNone/>
+            </a:pPr>
+            <a:r>
+              <a:rPr lang="en-US" sz="1200" i="1" dirty="0">
+                <a:solidFill>
+                  <a:srgbClr val="1C2833"/>
+                </a:solidFill>
+                <a:latin typeface="Arial" pitchFamily="34" charset="0"/>
+                <a:ea typeface="Arial" pitchFamily="34" charset="-122"/>
+                <a:cs typeface="Arial" pitchFamily="34" charset="-120"/>
+              </a:rPr>
+              <a:t>comparison</a:t>
+            </a:r>
+            <a:pPr algn="l" indent="0" marL="0">
+              <a:lnSpc>
+                <a:spcPts val="1620"/>
+              </a:lnSpc>
+              <a:spcAft>
+                <a:spcPts val="300"/>
+              </a:spcAft>
+              <a:buNone/>
+            </a:pPr>
+            <a:r>
+              <a:rPr lang="en-US" sz="1200" dirty="0">
+                <a:solidFill>
+                  <a:srgbClr val="1C2833"/>
+                </a:solidFill>
+                <a:latin typeface="Arial" pitchFamily="34" charset="0"/>
+                <a:ea typeface="Arial" pitchFamily="34" charset="-122"/>
+                <a:cs typeface="Arial" pitchFamily="34" charset="-120"/>
+              </a:rPr>
+              <a:t>. The verse is not saying "the Earth IS literally one family" the way "</a:t>
+            </a:r>
+            <a:pPr algn="l" indent="0" marL="0">
+              <a:lnSpc>
+                <a:spcPts val="1620"/>
+              </a:lnSpc>
+              <a:spcAft>
+                <a:spcPts val="300"/>
+              </a:spcAft>
+              <a:buNone/>
+            </a:pPr>
+            <a:r>
+              <a:rPr lang="en-US" sz="1200" i="1" dirty="0">
+                <a:solidFill>
+                  <a:srgbClr val="1C2833"/>
+                </a:solidFill>
+                <a:latin typeface="Arial" pitchFamily="34" charset="0"/>
+                <a:ea typeface="Arial" pitchFamily="34" charset="-122"/>
+                <a:cs typeface="Arial" pitchFamily="34" charset="-120"/>
+              </a:rPr>
+              <a:t>water IS H₂O</a:t>
+            </a:r>
+            <a:pPr algn="l" indent="0" marL="0">
+              <a:lnSpc>
+                <a:spcPts val="1620"/>
+              </a:lnSpc>
+              <a:spcAft>
+                <a:spcPts val="300"/>
+              </a:spcAft>
+              <a:buNone/>
+            </a:pPr>
+            <a:r>
+              <a:rPr lang="en-US" sz="1200" dirty="0">
+                <a:solidFill>
+                  <a:srgbClr val="1C2833"/>
+                </a:solidFill>
+                <a:latin typeface="Arial" pitchFamily="34" charset="0"/>
+                <a:ea typeface="Arial" pitchFamily="34" charset="-122"/>
+                <a:cs typeface="Arial" pitchFamily="34" charset="-120"/>
+              </a:rPr>
+              <a:t>" is a factual claim. It is saying: </a:t>
+            </a:r>
+            <a:pPr algn="l" indent="0" marL="0">
+              <a:lnSpc>
+                <a:spcPts val="1620"/>
+              </a:lnSpc>
+              <a:spcAft>
+                <a:spcPts val="300"/>
+              </a:spcAft>
+              <a:buNone/>
+            </a:pPr>
+            <a:r>
+              <a:rPr lang="en-US" sz="1200" i="1" dirty="0">
+                <a:solidFill>
+                  <a:srgbClr val="1C2833"/>
+                </a:solidFill>
+                <a:latin typeface="Arial" pitchFamily="34" charset="0"/>
+                <a:ea typeface="Arial" pitchFamily="34" charset="-122"/>
+                <a:cs typeface="Arial" pitchFamily="34" charset="-120"/>
+              </a:rPr>
+              <a:t>if</a:t>
+            </a:r>
+            <a:pPr algn="l" indent="0" marL="0">
+              <a:lnSpc>
+                <a:spcPts val="1620"/>
+              </a:lnSpc>
+              <a:spcAft>
+                <a:spcPts val="300"/>
+              </a:spcAft>
+              <a:buNone/>
+            </a:pPr>
+            <a:r>
+              <a:rPr lang="en-US" sz="1200" dirty="0">
+                <a:solidFill>
+                  <a:srgbClr val="1C2833"/>
+                </a:solidFill>
+                <a:latin typeface="Arial" pitchFamily="34" charset="0"/>
+                <a:ea typeface="Arial" pitchFamily="34" charset="-122"/>
+                <a:cs typeface="Arial" pitchFamily="34" charset="-120"/>
+              </a:rPr>
+              <a:t> you live with a big enough sense of belonging, </a:t>
+            </a:r>
+            <a:pPr algn="l" indent="0" marL="0">
+              <a:lnSpc>
+                <a:spcPts val="1620"/>
+              </a:lnSpc>
+              <a:spcAft>
+                <a:spcPts val="300"/>
+              </a:spcAft>
+              <a:buNone/>
+            </a:pPr>
+            <a:r>
+              <a:rPr lang="en-US" sz="1200" i="1" dirty="0">
+                <a:solidFill>
+                  <a:srgbClr val="1C2833"/>
+                </a:solidFill>
+                <a:latin typeface="Arial" pitchFamily="34" charset="0"/>
+                <a:ea typeface="Arial" pitchFamily="34" charset="-122"/>
+                <a:cs typeface="Arial" pitchFamily="34" charset="-120"/>
+              </a:rPr>
+              <a:t>then</a:t>
+            </a:r>
+            <a:pPr algn="l" indent="0" marL="0">
+              <a:lnSpc>
+                <a:spcPts val="1620"/>
+              </a:lnSpc>
+              <a:spcAft>
+                <a:spcPts val="300"/>
+              </a:spcAft>
+              <a:buNone/>
+            </a:pPr>
+            <a:r>
+              <a:rPr lang="en-US" sz="1200" dirty="0">
+                <a:solidFill>
+                  <a:srgbClr val="1C2833"/>
+                </a:solidFill>
+                <a:latin typeface="Arial" pitchFamily="34" charset="0"/>
+                <a:ea typeface="Arial" pitchFamily="34" charset="-122"/>
+                <a:cs typeface="Arial" pitchFamily="34" charset="-120"/>
+              </a:rPr>
+              <a:t> you treat the Earth as a family. The phrase is an ethic, not a biological description.</a:t>
+            </a:r>
+            <a:endParaRPr lang="en-US" sz="1200" dirty="0"/>
+          </a:p>
+        </p:txBody>
+      </p:sp>
+      <p:sp>
+        <p:nvSpPr>
+          <p:cNvPr id="5" name="Text 3"/>
           <p:cNvSpPr/>
           <p:nvPr/>
         </p:nvSpPr>
